--- a/7th Semester/CCE-415_Network Routing & Switching/Sobuj sir/IPV 6.pptx
+++ b/7th Semester/CCE-415_Network Routing & Switching/Sobuj sir/IPV 6.pptx
@@ -242,7 +242,7 @@
           <a:p>
             <a:fld id="{2516541C-3DB1-48CF-8574-BE58FE0745A4}" type="datetimeFigureOut">
               <a:rPr lang="en-GB" smtClean="0"/>
-              <a:t>04/01/2023</a:t>
+              <a:t>12/08/2026</a:t>
             </a:fld>
             <a:endParaRPr lang="en-GB"/>
           </a:p>
@@ -529,243 +529,62 @@
       </p:grpSpPr>
       <p:sp>
         <p:nvSpPr>
-          <p:cNvPr id="51201" name="Rectangle 11"/>
+          <p:cNvPr id="2" name="Slide Image Placeholder 1"/>
           <p:cNvSpPr>
-            <a:spLocks noGrp="1" noChangeArrowheads="1"/>
+            <a:spLocks noGrp="1" noRot="1" noChangeAspect="1"/>
+          </p:cNvSpPr>
+          <p:nvPr>
+            <p:ph type="sldImg"/>
+          </p:nvPr>
+        </p:nvSpPr>
+        <p:spPr/>
+      </p:sp>
+      <p:sp>
+        <p:nvSpPr>
+          <p:cNvPr id="3" name="Notes Placeholder 2"/>
+          <p:cNvSpPr>
+            <a:spLocks noGrp="1"/>
+          </p:cNvSpPr>
+          <p:nvPr>
+            <p:ph type="body" idx="1"/>
+          </p:nvPr>
+        </p:nvSpPr>
+        <p:spPr/>
+        <p:txBody>
+          <a:bodyPr/>
+          <a:lstStyle/>
+          <a:p>
+            <a:endParaRPr lang="en-US" dirty="0"/>
+          </a:p>
+        </p:txBody>
+      </p:sp>
+      <p:sp>
+        <p:nvSpPr>
+          <p:cNvPr id="4" name="Slide Number Placeholder 3"/>
+          <p:cNvSpPr>
+            <a:spLocks noGrp="1"/>
           </p:cNvSpPr>
           <p:nvPr>
             <p:ph type="sldNum" sz="quarter" idx="5"/>
           </p:nvPr>
         </p:nvSpPr>
-        <p:spPr>
-          <a:noFill/>
-          <a:ln/>
-          <a:extLst>
-            <a:ext uri="{909E8E84-426E-40DD-AFC4-6F175D3DCCD1}">
-              <a14:hiddenFill xmlns:a14="http://schemas.microsoft.com/office/drawing/2010/main">
-                <a:solidFill>
-                  <a:srgbClr val="FFFFFF"/>
-                </a:solidFill>
-              </a14:hiddenFill>
-            </a:ext>
-            <a:ext uri="{91240B29-F687-4F45-9708-019B960494DF}">
-              <a14:hiddenLine xmlns:a14="http://schemas.microsoft.com/office/drawing/2010/main" w="9525">
-                <a:solidFill>
-                  <a:srgbClr val="000000"/>
-                </a:solidFill>
-                <a:miter lim="800000"/>
-                <a:headEnd/>
-                <a:tailEnd/>
-              </a14:hiddenLine>
-            </a:ext>
-          </a:extLst>
-        </p:spPr>
-        <p:txBody>
-          <a:bodyPr/>
-          <a:lstStyle>
-            <a:lvl1pPr defTabSz="886397">
-              <a:defRPr sz="2400">
-                <a:solidFill>
-                  <a:schemeClr val="tx1"/>
-                </a:solidFill>
-                <a:latin typeface="Arial" charset="0"/>
-                <a:ea typeface="ＭＳ Ｐゴシック" charset="0"/>
-                <a:cs typeface="ＭＳ Ｐゴシック" charset="0"/>
-              </a:defRPr>
-            </a:lvl1pPr>
-            <a:lvl2pPr marL="729057" indent="-280406" defTabSz="886397">
-              <a:defRPr sz="2400">
-                <a:solidFill>
-                  <a:schemeClr val="tx1"/>
-                </a:solidFill>
-                <a:latin typeface="Arial" charset="0"/>
-                <a:ea typeface="ＭＳ Ｐゴシック" charset="0"/>
-              </a:defRPr>
-            </a:lvl2pPr>
-            <a:lvl3pPr marL="1121626" indent="-224325" defTabSz="886397">
-              <a:defRPr sz="2400">
-                <a:solidFill>
-                  <a:schemeClr val="tx1"/>
-                </a:solidFill>
-                <a:latin typeface="Arial" charset="0"/>
-                <a:ea typeface="ＭＳ Ｐゴシック" charset="0"/>
-              </a:defRPr>
-            </a:lvl3pPr>
-            <a:lvl4pPr marL="1570276" indent="-224325" defTabSz="886397">
-              <a:defRPr sz="2400">
-                <a:solidFill>
-                  <a:schemeClr val="tx1"/>
-                </a:solidFill>
-                <a:latin typeface="Arial" charset="0"/>
-                <a:ea typeface="ＭＳ Ｐゴシック" charset="0"/>
-              </a:defRPr>
-            </a:lvl4pPr>
-            <a:lvl5pPr marL="2018927" indent="-224325" defTabSz="886397">
-              <a:defRPr sz="2400">
-                <a:solidFill>
-                  <a:schemeClr val="tx1"/>
-                </a:solidFill>
-                <a:latin typeface="Arial" charset="0"/>
-                <a:ea typeface="ＭＳ Ｐゴシック" charset="0"/>
-              </a:defRPr>
-            </a:lvl5pPr>
-            <a:lvl6pPr marL="2467577" indent="-224325" algn="ctr" defTabSz="886397" eaLnBrk="0" fontAlgn="base" hangingPunct="0">
-              <a:lnSpc>
-                <a:spcPct val="90000"/>
-              </a:lnSpc>
-              <a:spcBef>
-                <a:spcPct val="0"/>
-              </a:spcBef>
-              <a:spcAft>
-                <a:spcPct val="0"/>
-              </a:spcAft>
-              <a:defRPr sz="2400">
-                <a:solidFill>
-                  <a:schemeClr val="tx1"/>
-                </a:solidFill>
-                <a:latin typeface="Arial" charset="0"/>
-                <a:ea typeface="ＭＳ Ｐゴシック" charset="0"/>
-              </a:defRPr>
-            </a:lvl6pPr>
-            <a:lvl7pPr marL="2916227" indent="-224325" algn="ctr" defTabSz="886397" eaLnBrk="0" fontAlgn="base" hangingPunct="0">
-              <a:lnSpc>
-                <a:spcPct val="90000"/>
-              </a:lnSpc>
-              <a:spcBef>
-                <a:spcPct val="0"/>
-              </a:spcBef>
-              <a:spcAft>
-                <a:spcPct val="0"/>
-              </a:spcAft>
-              <a:defRPr sz="2400">
-                <a:solidFill>
-                  <a:schemeClr val="tx1"/>
-                </a:solidFill>
-                <a:latin typeface="Arial" charset="0"/>
-                <a:ea typeface="ＭＳ Ｐゴシック" charset="0"/>
-              </a:defRPr>
-            </a:lvl7pPr>
-            <a:lvl8pPr marL="3364878" indent="-224325" algn="ctr" defTabSz="886397" eaLnBrk="0" fontAlgn="base" hangingPunct="0">
-              <a:lnSpc>
-                <a:spcPct val="90000"/>
-              </a:lnSpc>
-              <a:spcBef>
-                <a:spcPct val="0"/>
-              </a:spcBef>
-              <a:spcAft>
-                <a:spcPct val="0"/>
-              </a:spcAft>
-              <a:defRPr sz="2400">
-                <a:solidFill>
-                  <a:schemeClr val="tx1"/>
-                </a:solidFill>
-                <a:latin typeface="Arial" charset="0"/>
-                <a:ea typeface="ＭＳ Ｐゴシック" charset="0"/>
-              </a:defRPr>
-            </a:lvl8pPr>
-            <a:lvl9pPr marL="3813528" indent="-224325" algn="ctr" defTabSz="886397" eaLnBrk="0" fontAlgn="base" hangingPunct="0">
-              <a:lnSpc>
-                <a:spcPct val="90000"/>
-              </a:lnSpc>
-              <a:spcBef>
-                <a:spcPct val="0"/>
-              </a:spcBef>
-              <a:spcAft>
-                <a:spcPct val="0"/>
-              </a:spcAft>
-              <a:defRPr sz="2400">
-                <a:solidFill>
-                  <a:schemeClr val="tx1"/>
-                </a:solidFill>
-                <a:latin typeface="Arial" charset="0"/>
-                <a:ea typeface="ＭＳ Ｐゴシック" charset="0"/>
-              </a:defRPr>
-            </a:lvl9pPr>
-          </a:lstStyle>
-          <a:p>
-            <a:fld id="{126C4740-6176-6B42-AE8B-248565D05237}" type="slidenum">
-              <a:rPr lang="en-US" sz="800"/>
-              <a:pPr/>
-              <a:t>12</a:t>
-            </a:fld>
-            <a:endParaRPr lang="en-US" sz="800" dirty="0"/>
-          </a:p>
-        </p:txBody>
-      </p:sp>
-      <p:sp>
-        <p:nvSpPr>
-          <p:cNvPr id="51202" name="Rectangle 2"/>
-          <p:cNvSpPr>
-            <a:spLocks noGrp="1" noRot="1" noChangeAspect="1" noChangeArrowheads="1" noTextEdit="1"/>
-          </p:cNvSpPr>
-          <p:nvPr>
-            <p:ph type="sldImg"/>
-          </p:nvPr>
-        </p:nvSpPr>
-        <p:spPr>
-          <a:ln/>
-        </p:spPr>
-      </p:sp>
-      <p:sp>
-        <p:nvSpPr>
-          <p:cNvPr id="51203" name="Rectangle 3"/>
-          <p:cNvSpPr>
-            <a:spLocks noGrp="1" noChangeArrowheads="1"/>
-          </p:cNvSpPr>
-          <p:nvPr>
-            <p:ph type="body" idx="1"/>
-          </p:nvPr>
-        </p:nvSpPr>
-        <p:spPr>
-          <a:noFill/>
-          <a:ln/>
-          <a:extLst>
-            <a:ext uri="{909E8E84-426E-40DD-AFC4-6F175D3DCCD1}">
-              <a14:hiddenFill xmlns:a14="http://schemas.microsoft.com/office/drawing/2010/main">
-                <a:solidFill>
-                  <a:srgbClr val="FFFFFF"/>
-                </a:solidFill>
-              </a14:hiddenFill>
-            </a:ext>
-            <a:ext uri="{91240B29-F687-4F45-9708-019B960494DF}">
-              <a14:hiddenLine xmlns:a14="http://schemas.microsoft.com/office/drawing/2010/main" w="9525">
-                <a:solidFill>
-                  <a:srgbClr val="000000"/>
-                </a:solidFill>
-                <a:miter lim="800000"/>
-                <a:headEnd/>
-                <a:tailEnd/>
-              </a14:hiddenLine>
-            </a:ext>
-          </a:extLst>
-        </p:spPr>
+        <p:spPr/>
         <p:txBody>
           <a:bodyPr/>
           <a:lstStyle/>
           <a:p>
-            <a:pPr>
-              <a:lnSpc>
-                <a:spcPct val="80000"/>
-              </a:lnSpc>
-              <a:buFontTx/>
-              <a:buNone/>
-            </a:pPr>
-            <a:r>
-              <a:rPr lang="en-US" dirty="0" smtClean="0"/>
-              <a:t>8.2.1.2  IPv4</a:t>
-            </a:r>
-            <a:r>
-              <a:rPr lang="en-US" baseline="0" dirty="0" smtClean="0"/>
-              <a:t> and IPv6 Coexistence</a:t>
-            </a:r>
-            <a:endParaRPr lang="en-US" dirty="0"/>
+            <a:fld id="{11EA0069-CE9C-4DF7-A414-7EEDF68B1A10}" type="slidenum">
+              <a:rPr lang="en-GB" smtClean="0"/>
+              <a:t>1</a:t>
+            </a:fld>
+            <a:endParaRPr lang="en-GB"/>
           </a:p>
         </p:txBody>
       </p:sp>
     </p:spTree>
     <p:extLst>
       <p:ext uri="{BB962C8B-B14F-4D97-AF65-F5344CB8AC3E}">
-        <p14:creationId xmlns:p14="http://schemas.microsoft.com/office/powerpoint/2010/main" val="3556055785"/>
+        <p14:creationId xmlns:p14="http://schemas.microsoft.com/office/powerpoint/2010/main" val="1085499146"/>
       </p:ext>
     </p:extLst>
   </p:cSld>
@@ -951,7 +770,7 @@
             <a:fld id="{4EE133E6-1A71-3948-B0E1-530C95DEAFDE}" type="slidenum">
               <a:rPr lang="en-US" sz="800"/>
               <a:pPr/>
-              <a:t>21</a:t>
+              <a:t>19</a:t>
             </a:fld>
             <a:endParaRPr lang="en-US" sz="800" dirty="0"/>
           </a:p>
@@ -1016,12 +835,12 @@
               <a:buNone/>
             </a:pPr>
             <a:r>
-              <a:rPr lang="en-US" dirty="0" smtClean="0"/>
-              <a:t>8.2.3.3  IPv6 Unicast</a:t>
-            </a:r>
-            <a:r>
-              <a:rPr lang="en-US" baseline="0" dirty="0" smtClean="0"/>
-              <a:t> Addresses (cont.)</a:t>
+              <a:rPr lang="en-US" dirty="0"/>
+              <a:t>8.2.3.3</a:t>
+            </a:r>
+            <a:r>
+              <a:rPr lang="en-US" baseline="0" dirty="0"/>
+              <a:t>  IPv6 Unicast Addresses (cont.)</a:t>
             </a:r>
             <a:endParaRPr lang="en-US" dirty="0"/>
           </a:p>
@@ -1030,7 +849,7 @@
     </p:spTree>
     <p:extLst>
       <p:ext uri="{BB962C8B-B14F-4D97-AF65-F5344CB8AC3E}">
-        <p14:creationId xmlns:p14="http://schemas.microsoft.com/office/powerpoint/2010/main" val="1087119043"/>
+        <p14:creationId xmlns:p14="http://schemas.microsoft.com/office/powerpoint/2010/main" val="2523864835"/>
       </p:ext>
     </p:extLst>
   </p:cSld>
@@ -1216,7 +1035,7 @@
             <a:fld id="{4EE133E6-1A71-3948-B0E1-530C95DEAFDE}" type="slidenum">
               <a:rPr lang="en-US" sz="800"/>
               <a:pPr/>
-              <a:t>22</a:t>
+              <a:t>20</a:t>
             </a:fld>
             <a:endParaRPr lang="en-US" sz="800" dirty="0"/>
           </a:p>
@@ -1281,8 +1100,12 @@
               <a:buNone/>
             </a:pPr>
             <a:r>
-              <a:rPr lang="en-US" dirty="0" smtClean="0"/>
-              <a:t>8.2.3.4  IPv6 Link-Local Unicast Addresses</a:t>
+              <a:rPr lang="en-US" dirty="0"/>
+              <a:t>8.2.3.3  IPv6 Unicast</a:t>
+            </a:r>
+            <a:r>
+              <a:rPr lang="en-US" baseline="0" dirty="0"/>
+              <a:t> Addresses (cont.)</a:t>
             </a:r>
             <a:endParaRPr lang="en-US" dirty="0"/>
           </a:p>
@@ -1291,7 +1114,7 @@
     </p:spTree>
     <p:extLst>
       <p:ext uri="{BB962C8B-B14F-4D97-AF65-F5344CB8AC3E}">
-        <p14:creationId xmlns:p14="http://schemas.microsoft.com/office/powerpoint/2010/main" val="3703692188"/>
+        <p14:creationId xmlns:p14="http://schemas.microsoft.com/office/powerpoint/2010/main" val="3304898829"/>
       </p:ext>
     </p:extLst>
   </p:cSld>
@@ -1477,7 +1300,7 @@
             <a:fld id="{4EE133E6-1A71-3948-B0E1-530C95DEAFDE}" type="slidenum">
               <a:rPr lang="en-US" sz="800"/>
               <a:pPr/>
-              <a:t>23</a:t>
+              <a:t>21</a:t>
             </a:fld>
             <a:endParaRPr lang="en-US" sz="800" dirty="0"/>
           </a:p>
@@ -1542,8 +1365,12 @@
               <a:buNone/>
             </a:pPr>
             <a:r>
-              <a:rPr lang="en-US" dirty="0" smtClean="0"/>
-              <a:t>8.2.3.4  IPv6 Link-Local Unicast Addresses</a:t>
+              <a:rPr lang="en-US" dirty="0"/>
+              <a:t>8.2.3.3  IPv6 Unicast</a:t>
+            </a:r>
+            <a:r>
+              <a:rPr lang="en-US" baseline="0" dirty="0"/>
+              <a:t> Addresses (cont.)</a:t>
             </a:r>
             <a:endParaRPr lang="en-US" dirty="0"/>
           </a:p>
@@ -1552,7 +1379,7 @@
     </p:spTree>
     <p:extLst>
       <p:ext uri="{BB962C8B-B14F-4D97-AF65-F5344CB8AC3E}">
-        <p14:creationId xmlns:p14="http://schemas.microsoft.com/office/powerpoint/2010/main" val="2561802767"/>
+        <p14:creationId xmlns:p14="http://schemas.microsoft.com/office/powerpoint/2010/main" val="1087119043"/>
       </p:ext>
     </p:extLst>
   </p:cSld>
@@ -1738,7 +1565,7 @@
             <a:fld id="{4EE133E6-1A71-3948-B0E1-530C95DEAFDE}" type="slidenum">
               <a:rPr lang="en-US" sz="800"/>
               <a:pPr/>
-              <a:t>24</a:t>
+              <a:t>22</a:t>
             </a:fld>
             <a:endParaRPr lang="en-US" sz="800" dirty="0"/>
           </a:p>
@@ -1803,21 +1630,16 @@
               <a:buNone/>
             </a:pPr>
             <a:r>
-              <a:rPr lang="en-US" dirty="0" smtClean="0"/>
-              <a:t>8.2.4.1  Structure of an IPv6 Global Unicast</a:t>
-            </a:r>
-            <a:r>
-              <a:rPr lang="en-US" baseline="0" dirty="0" smtClean="0"/>
-              <a:t> Address</a:t>
-            </a:r>
-            <a:endParaRPr lang="en-US" dirty="0"/>
+              <a:rPr lang="en-US" dirty="0"/>
+              <a:t>8.2.3.4  IPv6 Link-Local Unicast Addresses</a:t>
+            </a:r>
           </a:p>
         </p:txBody>
       </p:sp>
     </p:spTree>
     <p:extLst>
       <p:ext uri="{BB962C8B-B14F-4D97-AF65-F5344CB8AC3E}">
-        <p14:creationId xmlns:p14="http://schemas.microsoft.com/office/powerpoint/2010/main" val="1910588659"/>
+        <p14:creationId xmlns:p14="http://schemas.microsoft.com/office/powerpoint/2010/main" val="3703692188"/>
       </p:ext>
     </p:extLst>
   </p:cSld>
@@ -2003,7 +1825,7 @@
             <a:fld id="{4EE133E6-1A71-3948-B0E1-530C95DEAFDE}" type="slidenum">
               <a:rPr lang="en-US" sz="800"/>
               <a:pPr/>
-              <a:t>25</a:t>
+              <a:t>23</a:t>
             </a:fld>
             <a:endParaRPr lang="en-US" sz="800" dirty="0"/>
           </a:p>
@@ -2068,21 +1890,16 @@
               <a:buNone/>
             </a:pPr>
             <a:r>
-              <a:rPr lang="en-US" dirty="0" smtClean="0"/>
-              <a:t>8.2.4.1  Structure</a:t>
-            </a:r>
-            <a:r>
-              <a:rPr lang="en-US" baseline="0" dirty="0" smtClean="0"/>
-              <a:t> of an IPv6 Global Unicast Address (cont.)</a:t>
-            </a:r>
-            <a:endParaRPr lang="en-US" dirty="0"/>
+              <a:rPr lang="en-US" dirty="0"/>
+              <a:t>8.2.3.4  IPv6 Link-Local Unicast Addresses</a:t>
+            </a:r>
           </a:p>
         </p:txBody>
       </p:sp>
     </p:spTree>
     <p:extLst>
       <p:ext uri="{BB962C8B-B14F-4D97-AF65-F5344CB8AC3E}">
-        <p14:creationId xmlns:p14="http://schemas.microsoft.com/office/powerpoint/2010/main" val="1107294553"/>
+        <p14:creationId xmlns:p14="http://schemas.microsoft.com/office/powerpoint/2010/main" val="2561802767"/>
       </p:ext>
     </p:extLst>
   </p:cSld>
@@ -2268,7 +2085,7 @@
             <a:fld id="{4EE133E6-1A71-3948-B0E1-530C95DEAFDE}" type="slidenum">
               <a:rPr lang="en-US" sz="800"/>
               <a:pPr/>
-              <a:t>26</a:t>
+              <a:t>24</a:t>
             </a:fld>
             <a:endParaRPr lang="en-US" sz="800" dirty="0"/>
           </a:p>
@@ -2333,12 +2150,12 @@
               <a:buNone/>
             </a:pPr>
             <a:r>
-              <a:rPr lang="en-US" dirty="0" smtClean="0"/>
-              <a:t>8.2.4.1  Structure</a:t>
-            </a:r>
-            <a:r>
-              <a:rPr lang="en-US" baseline="0" dirty="0" smtClean="0"/>
-              <a:t> of an IPv6 Global Unicast Address</a:t>
+              <a:rPr lang="en-US" dirty="0"/>
+              <a:t>8.2.4.1  Structure of an IPv6 Global Unicast</a:t>
+            </a:r>
+            <a:r>
+              <a:rPr lang="en-US" baseline="0" dirty="0"/>
+              <a:t> Address</a:t>
             </a:r>
             <a:endParaRPr lang="en-US" dirty="0"/>
           </a:p>
@@ -2347,7 +2164,7 @@
     </p:spTree>
     <p:extLst>
       <p:ext uri="{BB962C8B-B14F-4D97-AF65-F5344CB8AC3E}">
-        <p14:creationId xmlns:p14="http://schemas.microsoft.com/office/powerpoint/2010/main" val="1432458225"/>
+        <p14:creationId xmlns:p14="http://schemas.microsoft.com/office/powerpoint/2010/main" val="1910588659"/>
       </p:ext>
     </p:extLst>
   </p:cSld>
@@ -2533,7 +2350,7 @@
             <a:fld id="{4EE133E6-1A71-3948-B0E1-530C95DEAFDE}" type="slidenum">
               <a:rPr lang="en-US" sz="800"/>
               <a:pPr/>
-              <a:t>27</a:t>
+              <a:t>25</a:t>
             </a:fld>
             <a:endParaRPr lang="en-US" sz="800" dirty="0"/>
           </a:p>
@@ -2598,8 +2415,12 @@
               <a:buNone/>
             </a:pPr>
             <a:r>
-              <a:rPr lang="en-US" dirty="0" smtClean="0"/>
-              <a:t>8.2.4.2  Static Configuration of a Global Unicast Address</a:t>
+              <a:rPr lang="en-US" dirty="0"/>
+              <a:t>8.2.4.1  Structure</a:t>
+            </a:r>
+            <a:r>
+              <a:rPr lang="en-US" baseline="0" dirty="0"/>
+              <a:t> of an IPv6 Global Unicast Address (cont.)</a:t>
             </a:r>
             <a:endParaRPr lang="en-US" dirty="0"/>
           </a:p>
@@ -2608,7 +2429,7 @@
     </p:spTree>
     <p:extLst>
       <p:ext uri="{BB962C8B-B14F-4D97-AF65-F5344CB8AC3E}">
-        <p14:creationId xmlns:p14="http://schemas.microsoft.com/office/powerpoint/2010/main" val="3164288878"/>
+        <p14:creationId xmlns:p14="http://schemas.microsoft.com/office/powerpoint/2010/main" val="1107294553"/>
       </p:ext>
     </p:extLst>
   </p:cSld>
@@ -2794,7 +2615,7 @@
             <a:fld id="{4EE133E6-1A71-3948-B0E1-530C95DEAFDE}" type="slidenum">
               <a:rPr lang="en-US" sz="800"/>
               <a:pPr/>
-              <a:t>28</a:t>
+              <a:t>26</a:t>
             </a:fld>
             <a:endParaRPr lang="en-US" sz="800" dirty="0"/>
           </a:p>
@@ -2859,12 +2680,12 @@
               <a:buNone/>
             </a:pPr>
             <a:r>
-              <a:rPr lang="en-US" dirty="0" smtClean="0"/>
-              <a:t>8.2.4.2  Static Configuration</a:t>
-            </a:r>
-            <a:r>
-              <a:rPr lang="en-US" baseline="0" dirty="0" smtClean="0"/>
-              <a:t> of an IPv6 Global Unicast Address (cont.)</a:t>
+              <a:rPr lang="en-US" dirty="0"/>
+              <a:t>8.2.4.1  Structure</a:t>
+            </a:r>
+            <a:r>
+              <a:rPr lang="en-US" baseline="0" dirty="0"/>
+              <a:t> of an IPv6 Global Unicast Address</a:t>
             </a:r>
             <a:endParaRPr lang="en-US" dirty="0"/>
           </a:p>
@@ -2873,7 +2694,7 @@
     </p:spTree>
     <p:extLst>
       <p:ext uri="{BB962C8B-B14F-4D97-AF65-F5344CB8AC3E}">
-        <p14:creationId xmlns:p14="http://schemas.microsoft.com/office/powerpoint/2010/main" val="3206030898"/>
+        <p14:creationId xmlns:p14="http://schemas.microsoft.com/office/powerpoint/2010/main" val="1432458225"/>
       </p:ext>
     </p:extLst>
   </p:cSld>
@@ -3059,7 +2880,7 @@
             <a:fld id="{4EE133E6-1A71-3948-B0E1-530C95DEAFDE}" type="slidenum">
               <a:rPr lang="en-US" sz="800"/>
               <a:pPr/>
-              <a:t>29</a:t>
+              <a:t>27</a:t>
             </a:fld>
             <a:endParaRPr lang="en-US" sz="800" dirty="0"/>
           </a:p>
@@ -3124,23 +2945,16 @@
               <a:buNone/>
             </a:pPr>
             <a:r>
-              <a:rPr lang="en-US" dirty="0" smtClean="0"/>
-              <a:t>8.2.4.5  </a:t>
-            </a:r>
-            <a:r>
-              <a:rPr lang="en-US" dirty="0">
-                <a:latin typeface="Arial" charset="0"/>
-              </a:rPr>
-              <a:t>EUI-64 Process or Randomly Generated</a:t>
-            </a:r>
-            <a:endParaRPr lang="en-US" dirty="0"/>
+              <a:rPr lang="en-US" dirty="0"/>
+              <a:t>8.2.4.2  Static Configuration of a Global Unicast Address</a:t>
+            </a:r>
           </a:p>
         </p:txBody>
       </p:sp>
     </p:spTree>
     <p:extLst>
       <p:ext uri="{BB962C8B-B14F-4D97-AF65-F5344CB8AC3E}">
-        <p14:creationId xmlns:p14="http://schemas.microsoft.com/office/powerpoint/2010/main" val="24282342"/>
+        <p14:creationId xmlns:p14="http://schemas.microsoft.com/office/powerpoint/2010/main" val="3164288878"/>
       </p:ext>
     </p:extLst>
   </p:cSld>
@@ -3326,7 +3140,7 @@
             <a:fld id="{4EE133E6-1A71-3948-B0E1-530C95DEAFDE}" type="slidenum">
               <a:rPr lang="en-US" sz="800"/>
               <a:pPr/>
-              <a:t>30</a:t>
+              <a:t>28</a:t>
             </a:fld>
             <a:endParaRPr lang="en-US" sz="800" dirty="0"/>
           </a:p>
@@ -3391,14 +3205,12 @@
               <a:buNone/>
             </a:pPr>
             <a:r>
-              <a:rPr lang="en-US" dirty="0" smtClean="0"/>
-              <a:t>8.2.4.5  </a:t>
-            </a:r>
-            <a:r>
-              <a:rPr lang="en-US" dirty="0">
-                <a:latin typeface="Arial" charset="0"/>
-              </a:rPr>
-              <a:t>EUI-64 Process or Randomly Generated</a:t>
+              <a:rPr lang="en-US" dirty="0"/>
+              <a:t>8.2.4.2  Static Configuration</a:t>
+            </a:r>
+            <a:r>
+              <a:rPr lang="en-US" baseline="0" dirty="0"/>
+              <a:t> of an IPv6 Global Unicast Address (cont.)</a:t>
             </a:r>
             <a:endParaRPr lang="en-US" dirty="0"/>
           </a:p>
@@ -3407,7 +3219,7 @@
     </p:spTree>
     <p:extLst>
       <p:ext uri="{BB962C8B-B14F-4D97-AF65-F5344CB8AC3E}">
-        <p14:creationId xmlns:p14="http://schemas.microsoft.com/office/powerpoint/2010/main" val="23701965"/>
+        <p14:creationId xmlns:p14="http://schemas.microsoft.com/office/powerpoint/2010/main" val="3206030898"/>
       </p:ext>
     </p:extLst>
   </p:cSld>
@@ -3436,239 +3248,62 @@
       </p:grpSpPr>
       <p:sp>
         <p:nvSpPr>
-          <p:cNvPr id="51201" name="Rectangle 11"/>
+          <p:cNvPr id="2" name="Slide Image Placeholder 1"/>
           <p:cNvSpPr>
-            <a:spLocks noGrp="1" noChangeArrowheads="1"/>
+            <a:spLocks noGrp="1" noRot="1" noChangeAspect="1"/>
+          </p:cNvSpPr>
+          <p:nvPr>
+            <p:ph type="sldImg"/>
+          </p:nvPr>
+        </p:nvSpPr>
+        <p:spPr/>
+      </p:sp>
+      <p:sp>
+        <p:nvSpPr>
+          <p:cNvPr id="3" name="Notes Placeholder 2"/>
+          <p:cNvSpPr>
+            <a:spLocks noGrp="1"/>
+          </p:cNvSpPr>
+          <p:nvPr>
+            <p:ph type="body" idx="1"/>
+          </p:nvPr>
+        </p:nvSpPr>
+        <p:spPr/>
+        <p:txBody>
+          <a:bodyPr/>
+          <a:lstStyle/>
+          <a:p>
+            <a:endParaRPr lang="en-US" dirty="0"/>
+          </a:p>
+        </p:txBody>
+      </p:sp>
+      <p:sp>
+        <p:nvSpPr>
+          <p:cNvPr id="4" name="Slide Number Placeholder 3"/>
+          <p:cNvSpPr>
+            <a:spLocks noGrp="1"/>
           </p:cNvSpPr>
           <p:nvPr>
             <p:ph type="sldNum" sz="quarter" idx="5"/>
           </p:nvPr>
         </p:nvSpPr>
-        <p:spPr>
-          <a:noFill/>
-          <a:ln/>
-          <a:extLst>
-            <a:ext uri="{909E8E84-426E-40DD-AFC4-6F175D3DCCD1}">
-              <a14:hiddenFill xmlns:a14="http://schemas.microsoft.com/office/drawing/2010/main">
-                <a:solidFill>
-                  <a:srgbClr val="FFFFFF"/>
-                </a:solidFill>
-              </a14:hiddenFill>
-            </a:ext>
-            <a:ext uri="{91240B29-F687-4F45-9708-019B960494DF}">
-              <a14:hiddenLine xmlns:a14="http://schemas.microsoft.com/office/drawing/2010/main" w="9525">
-                <a:solidFill>
-                  <a:srgbClr val="000000"/>
-                </a:solidFill>
-                <a:miter lim="800000"/>
-                <a:headEnd/>
-                <a:tailEnd/>
-              </a14:hiddenLine>
-            </a:ext>
-          </a:extLst>
-        </p:spPr>
-        <p:txBody>
-          <a:bodyPr/>
-          <a:lstStyle>
-            <a:lvl1pPr defTabSz="886397">
-              <a:defRPr sz="2400">
-                <a:solidFill>
-                  <a:schemeClr val="tx1"/>
-                </a:solidFill>
-                <a:latin typeface="Arial" charset="0"/>
-                <a:ea typeface="ＭＳ Ｐゴシック" charset="0"/>
-                <a:cs typeface="ＭＳ Ｐゴシック" charset="0"/>
-              </a:defRPr>
-            </a:lvl1pPr>
-            <a:lvl2pPr marL="729057" indent="-280406" defTabSz="886397">
-              <a:defRPr sz="2400">
-                <a:solidFill>
-                  <a:schemeClr val="tx1"/>
-                </a:solidFill>
-                <a:latin typeface="Arial" charset="0"/>
-                <a:ea typeface="ＭＳ Ｐゴシック" charset="0"/>
-              </a:defRPr>
-            </a:lvl2pPr>
-            <a:lvl3pPr marL="1121626" indent="-224325" defTabSz="886397">
-              <a:defRPr sz="2400">
-                <a:solidFill>
-                  <a:schemeClr val="tx1"/>
-                </a:solidFill>
-                <a:latin typeface="Arial" charset="0"/>
-                <a:ea typeface="ＭＳ Ｐゴシック" charset="0"/>
-              </a:defRPr>
-            </a:lvl3pPr>
-            <a:lvl4pPr marL="1570276" indent="-224325" defTabSz="886397">
-              <a:defRPr sz="2400">
-                <a:solidFill>
-                  <a:schemeClr val="tx1"/>
-                </a:solidFill>
-                <a:latin typeface="Arial" charset="0"/>
-                <a:ea typeface="ＭＳ Ｐゴシック" charset="0"/>
-              </a:defRPr>
-            </a:lvl4pPr>
-            <a:lvl5pPr marL="2018927" indent="-224325" defTabSz="886397">
-              <a:defRPr sz="2400">
-                <a:solidFill>
-                  <a:schemeClr val="tx1"/>
-                </a:solidFill>
-                <a:latin typeface="Arial" charset="0"/>
-                <a:ea typeface="ＭＳ Ｐゴシック" charset="0"/>
-              </a:defRPr>
-            </a:lvl5pPr>
-            <a:lvl6pPr marL="2467577" indent="-224325" algn="ctr" defTabSz="886397" eaLnBrk="0" fontAlgn="base" hangingPunct="0">
-              <a:lnSpc>
-                <a:spcPct val="90000"/>
-              </a:lnSpc>
-              <a:spcBef>
-                <a:spcPct val="0"/>
-              </a:spcBef>
-              <a:spcAft>
-                <a:spcPct val="0"/>
-              </a:spcAft>
-              <a:defRPr sz="2400">
-                <a:solidFill>
-                  <a:schemeClr val="tx1"/>
-                </a:solidFill>
-                <a:latin typeface="Arial" charset="0"/>
-                <a:ea typeface="ＭＳ Ｐゴシック" charset="0"/>
-              </a:defRPr>
-            </a:lvl6pPr>
-            <a:lvl7pPr marL="2916227" indent="-224325" algn="ctr" defTabSz="886397" eaLnBrk="0" fontAlgn="base" hangingPunct="0">
-              <a:lnSpc>
-                <a:spcPct val="90000"/>
-              </a:lnSpc>
-              <a:spcBef>
-                <a:spcPct val="0"/>
-              </a:spcBef>
-              <a:spcAft>
-                <a:spcPct val="0"/>
-              </a:spcAft>
-              <a:defRPr sz="2400">
-                <a:solidFill>
-                  <a:schemeClr val="tx1"/>
-                </a:solidFill>
-                <a:latin typeface="Arial" charset="0"/>
-                <a:ea typeface="ＭＳ Ｐゴシック" charset="0"/>
-              </a:defRPr>
-            </a:lvl7pPr>
-            <a:lvl8pPr marL="3364878" indent="-224325" algn="ctr" defTabSz="886397" eaLnBrk="0" fontAlgn="base" hangingPunct="0">
-              <a:lnSpc>
-                <a:spcPct val="90000"/>
-              </a:lnSpc>
-              <a:spcBef>
-                <a:spcPct val="0"/>
-              </a:spcBef>
-              <a:spcAft>
-                <a:spcPct val="0"/>
-              </a:spcAft>
-              <a:defRPr sz="2400">
-                <a:solidFill>
-                  <a:schemeClr val="tx1"/>
-                </a:solidFill>
-                <a:latin typeface="Arial" charset="0"/>
-                <a:ea typeface="ＭＳ Ｐゴシック" charset="0"/>
-              </a:defRPr>
-            </a:lvl8pPr>
-            <a:lvl9pPr marL="3813528" indent="-224325" algn="ctr" defTabSz="886397" eaLnBrk="0" fontAlgn="base" hangingPunct="0">
-              <a:lnSpc>
-                <a:spcPct val="90000"/>
-              </a:lnSpc>
-              <a:spcBef>
-                <a:spcPct val="0"/>
-              </a:spcBef>
-              <a:spcAft>
-                <a:spcPct val="0"/>
-              </a:spcAft>
-              <a:defRPr sz="2400">
-                <a:solidFill>
-                  <a:schemeClr val="tx1"/>
-                </a:solidFill>
-                <a:latin typeface="Arial" charset="0"/>
-                <a:ea typeface="ＭＳ Ｐゴシック" charset="0"/>
-              </a:defRPr>
-            </a:lvl9pPr>
-          </a:lstStyle>
-          <a:p>
-            <a:fld id="{126C4740-6176-6B42-AE8B-248565D05237}" type="slidenum">
-              <a:rPr lang="en-US" sz="800"/>
-              <a:pPr/>
-              <a:t>13</a:t>
-            </a:fld>
-            <a:endParaRPr lang="en-US" sz="800" dirty="0"/>
-          </a:p>
-        </p:txBody>
-      </p:sp>
-      <p:sp>
-        <p:nvSpPr>
-          <p:cNvPr id="51202" name="Rectangle 2"/>
-          <p:cNvSpPr>
-            <a:spLocks noGrp="1" noRot="1" noChangeAspect="1" noChangeArrowheads="1" noTextEdit="1"/>
-          </p:cNvSpPr>
-          <p:nvPr>
-            <p:ph type="sldImg"/>
-          </p:nvPr>
-        </p:nvSpPr>
-        <p:spPr>
-          <a:ln/>
-        </p:spPr>
-      </p:sp>
-      <p:sp>
-        <p:nvSpPr>
-          <p:cNvPr id="51203" name="Rectangle 3"/>
-          <p:cNvSpPr>
-            <a:spLocks noGrp="1" noChangeArrowheads="1"/>
-          </p:cNvSpPr>
-          <p:nvPr>
-            <p:ph type="body" idx="1"/>
-          </p:nvPr>
-        </p:nvSpPr>
-        <p:spPr>
-          <a:noFill/>
-          <a:ln/>
-          <a:extLst>
-            <a:ext uri="{909E8E84-426E-40DD-AFC4-6F175D3DCCD1}">
-              <a14:hiddenFill xmlns:a14="http://schemas.microsoft.com/office/drawing/2010/main">
-                <a:solidFill>
-                  <a:srgbClr val="FFFFFF"/>
-                </a:solidFill>
-              </a14:hiddenFill>
-            </a:ext>
-            <a:ext uri="{91240B29-F687-4F45-9708-019B960494DF}">
-              <a14:hiddenLine xmlns:a14="http://schemas.microsoft.com/office/drawing/2010/main" w="9525">
-                <a:solidFill>
-                  <a:srgbClr val="000000"/>
-                </a:solidFill>
-                <a:miter lim="800000"/>
-                <a:headEnd/>
-                <a:tailEnd/>
-              </a14:hiddenLine>
-            </a:ext>
-          </a:extLst>
-        </p:spPr>
+        <p:spPr/>
         <p:txBody>
           <a:bodyPr/>
           <a:lstStyle/>
           <a:p>
-            <a:pPr>
-              <a:lnSpc>
-                <a:spcPct val="80000"/>
-              </a:lnSpc>
-              <a:buFontTx/>
-              <a:buNone/>
-            </a:pPr>
-            <a:r>
-              <a:rPr lang="en-US" dirty="0" smtClean="0"/>
-              <a:t>8.2.1.2  IPv4 and IPv6 Coexistence</a:t>
-            </a:r>
-            <a:endParaRPr lang="en-US" dirty="0"/>
+            <a:fld id="{11EA0069-CE9C-4DF7-A414-7EEDF68B1A10}" type="slidenum">
+              <a:rPr lang="en-GB" smtClean="0"/>
+              <a:t>3</a:t>
+            </a:fld>
+            <a:endParaRPr lang="en-GB"/>
           </a:p>
         </p:txBody>
       </p:sp>
     </p:spTree>
     <p:extLst>
       <p:ext uri="{BB962C8B-B14F-4D97-AF65-F5344CB8AC3E}">
-        <p14:creationId xmlns:p14="http://schemas.microsoft.com/office/powerpoint/2010/main" val="3848619941"/>
+        <p14:creationId xmlns:p14="http://schemas.microsoft.com/office/powerpoint/2010/main" val="2373402650"/>
       </p:ext>
     </p:extLst>
   </p:cSld>
@@ -3854,7 +3489,7 @@
             <a:fld id="{4EE133E6-1A71-3948-B0E1-530C95DEAFDE}" type="slidenum">
               <a:rPr lang="en-US" sz="800"/>
               <a:pPr/>
-              <a:t>31</a:t>
+              <a:t>29</a:t>
             </a:fld>
             <a:endParaRPr lang="en-US" sz="800" dirty="0"/>
           </a:p>
@@ -3919,14 +3554,14 @@
               <a:buNone/>
             </a:pPr>
             <a:r>
-              <a:rPr lang="en-US" dirty="0" smtClean="0"/>
+              <a:rPr lang="en-US" dirty="0"/>
               <a:t>8.2.4.5  </a:t>
             </a:r>
             <a:r>
               <a:rPr lang="en-US" dirty="0">
                 <a:latin typeface="Arial" charset="0"/>
               </a:rPr>
-              <a:t>EUI-64 Process or Randomly Generated (cont.)</a:t>
+              <a:t>EUI-64 Process or Randomly Generated</a:t>
             </a:r>
             <a:endParaRPr lang="en-US" dirty="0"/>
           </a:p>
@@ -3935,7 +3570,7 @@
     </p:spTree>
     <p:extLst>
       <p:ext uri="{BB962C8B-B14F-4D97-AF65-F5344CB8AC3E}">
-        <p14:creationId xmlns:p14="http://schemas.microsoft.com/office/powerpoint/2010/main" val="930282408"/>
+        <p14:creationId xmlns:p14="http://schemas.microsoft.com/office/powerpoint/2010/main" val="24282342"/>
       </p:ext>
     </p:extLst>
   </p:cSld>
@@ -4121,7 +3756,7 @@
             <a:fld id="{4EE133E6-1A71-3948-B0E1-530C95DEAFDE}" type="slidenum">
               <a:rPr lang="en-US" sz="800"/>
               <a:pPr/>
-              <a:t>32</a:t>
+              <a:t>30</a:t>
             </a:fld>
             <a:endParaRPr lang="en-US" sz="800" dirty="0"/>
           </a:p>
@@ -4186,14 +3821,14 @@
               <a:buNone/>
             </a:pPr>
             <a:r>
-              <a:rPr lang="en-US" dirty="0" smtClean="0"/>
+              <a:rPr lang="en-US" dirty="0"/>
               <a:t>8.2.4.5  </a:t>
             </a:r>
             <a:r>
               <a:rPr lang="en-US" dirty="0">
                 <a:latin typeface="Arial" charset="0"/>
               </a:rPr>
-              <a:t>EUI-64 Process or Randomly Generated (cont.)</a:t>
+              <a:t>EUI-64 Process or Randomly Generated</a:t>
             </a:r>
             <a:endParaRPr lang="en-US" dirty="0"/>
           </a:p>
@@ -4202,7 +3837,7 @@
     </p:spTree>
     <p:extLst>
       <p:ext uri="{BB962C8B-B14F-4D97-AF65-F5344CB8AC3E}">
-        <p14:creationId xmlns:p14="http://schemas.microsoft.com/office/powerpoint/2010/main" val="1833187210"/>
+        <p14:creationId xmlns:p14="http://schemas.microsoft.com/office/powerpoint/2010/main" val="23701965"/>
       </p:ext>
     </p:extLst>
   </p:cSld>
@@ -4388,7 +4023,7 @@
             <a:fld id="{4EE133E6-1A71-3948-B0E1-530C95DEAFDE}" type="slidenum">
               <a:rPr lang="en-US" sz="800"/>
               <a:pPr/>
-              <a:t>33</a:t>
+              <a:t>31</a:t>
             </a:fld>
             <a:endParaRPr lang="en-US" sz="800" dirty="0"/>
           </a:p>
@@ -4453,12 +4088,14 @@
               <a:buNone/>
             </a:pPr>
             <a:r>
-              <a:rPr lang="en-US" dirty="0" smtClean="0"/>
-              <a:t>8.2.4.6  Dynamic</a:t>
-            </a:r>
-            <a:r>
-              <a:rPr lang="en-US" baseline="0" dirty="0" smtClean="0"/>
-              <a:t> Link-local Addresses</a:t>
+              <a:rPr lang="en-US" dirty="0"/>
+              <a:t>8.2.4.5  </a:t>
+            </a:r>
+            <a:r>
+              <a:rPr lang="en-US" dirty="0">
+                <a:latin typeface="Arial" charset="0"/>
+              </a:rPr>
+              <a:t>EUI-64 Process or Randomly Generated (cont.)</a:t>
             </a:r>
             <a:endParaRPr lang="en-US" dirty="0"/>
           </a:p>
@@ -4467,7 +4104,7 @@
     </p:spTree>
     <p:extLst>
       <p:ext uri="{BB962C8B-B14F-4D97-AF65-F5344CB8AC3E}">
-        <p14:creationId xmlns:p14="http://schemas.microsoft.com/office/powerpoint/2010/main" val="506498711"/>
+        <p14:creationId xmlns:p14="http://schemas.microsoft.com/office/powerpoint/2010/main" val="930282408"/>
       </p:ext>
     </p:extLst>
   </p:cSld>
@@ -4653,7 +4290,7 @@
             <a:fld id="{4EE133E6-1A71-3948-B0E1-530C95DEAFDE}" type="slidenum">
               <a:rPr lang="en-US" sz="800"/>
               <a:pPr/>
-              <a:t>34</a:t>
+              <a:t>32</a:t>
             </a:fld>
             <a:endParaRPr lang="en-US" sz="800" dirty="0"/>
           </a:p>
@@ -4718,14 +4355,14 @@
               <a:buNone/>
             </a:pPr>
             <a:r>
-              <a:rPr lang="en-US" dirty="0" smtClean="0"/>
-              <a:t>8.2.4.6  </a:t>
-            </a:r>
-            <a:r>
-              <a:rPr lang="en-US" dirty="0" smtClean="0">
+              <a:rPr lang="en-US" dirty="0"/>
+              <a:t>8.2.4.5  </a:t>
+            </a:r>
+            <a:r>
+              <a:rPr lang="en-US" dirty="0">
                 <a:latin typeface="Arial" charset="0"/>
               </a:rPr>
-              <a:t>Dynamic Link-local Addresses (cont.)</a:t>
+              <a:t>EUI-64 Process or Randomly Generated (cont.)</a:t>
             </a:r>
             <a:endParaRPr lang="en-US" dirty="0"/>
           </a:p>
@@ -4734,7 +4371,7 @@
     </p:spTree>
     <p:extLst>
       <p:ext uri="{BB962C8B-B14F-4D97-AF65-F5344CB8AC3E}">
-        <p14:creationId xmlns:p14="http://schemas.microsoft.com/office/powerpoint/2010/main" val="2030010452"/>
+        <p14:creationId xmlns:p14="http://schemas.microsoft.com/office/powerpoint/2010/main" val="1833187210"/>
       </p:ext>
     </p:extLst>
   </p:cSld>
@@ -4920,7 +4557,7 @@
             <a:fld id="{4EE133E6-1A71-3948-B0E1-530C95DEAFDE}" type="slidenum">
               <a:rPr lang="en-US" sz="800"/>
               <a:pPr/>
-              <a:t>35</a:t>
+              <a:t>33</a:t>
             </a:fld>
             <a:endParaRPr lang="en-US" sz="800" dirty="0"/>
           </a:p>
@@ -4985,11 +4622,11 @@
               <a:buNone/>
             </a:pPr>
             <a:r>
-              <a:rPr lang="en-US" dirty="0" smtClean="0"/>
-              <a:t>8.2.4.7  Static</a:t>
-            </a:r>
-            <a:r>
-              <a:rPr lang="en-US" baseline="0" dirty="0" smtClean="0"/>
+              <a:rPr lang="en-US" dirty="0"/>
+              <a:t>8.2.4.6  Dynamic</a:t>
+            </a:r>
+            <a:r>
+              <a:rPr lang="en-US" baseline="0" dirty="0"/>
               <a:t> Link-local Addresses</a:t>
             </a:r>
             <a:endParaRPr lang="en-US" dirty="0"/>
@@ -4999,7 +4636,7 @@
     </p:spTree>
     <p:extLst>
       <p:ext uri="{BB962C8B-B14F-4D97-AF65-F5344CB8AC3E}">
-        <p14:creationId xmlns:p14="http://schemas.microsoft.com/office/powerpoint/2010/main" val="3035704153"/>
+        <p14:creationId xmlns:p14="http://schemas.microsoft.com/office/powerpoint/2010/main" val="506498711"/>
       </p:ext>
     </p:extLst>
   </p:cSld>
@@ -5185,7 +4822,7 @@
             <a:fld id="{4EE133E6-1A71-3948-B0E1-530C95DEAFDE}" type="slidenum">
               <a:rPr lang="en-US" sz="800"/>
               <a:pPr/>
-              <a:t>36</a:t>
+              <a:t>34</a:t>
             </a:fld>
             <a:endParaRPr lang="en-US" sz="800" dirty="0"/>
           </a:p>
@@ -5242,30 +4879,6 @@
           <a:bodyPr/>
           <a:lstStyle/>
           <a:p>
-            <a:pPr marL="110605" indent="-110605" defTabSz="1001675" eaLnBrk="0" fontAlgn="base" hangingPunct="0">
-              <a:lnSpc>
-                <a:spcPct val="80000"/>
-              </a:lnSpc>
-              <a:spcBef>
-                <a:spcPct val="50000"/>
-              </a:spcBef>
-              <a:spcAft>
-                <a:spcPct val="0"/>
-              </a:spcAft>
-              <a:buSzPct val="100000"/>
-              <a:defRPr/>
-            </a:pPr>
-            <a:r>
-              <a:rPr lang="en-US" dirty="0" smtClean="0"/>
-              <a:t>8.2.4.7  Static</a:t>
-            </a:r>
-            <a:r>
-              <a:rPr lang="en-US" baseline="0" dirty="0" smtClean="0"/>
-              <a:t> Link-local Addresses (cont.)</a:t>
-            </a:r>
-            <a:endParaRPr lang="en-US" dirty="0" smtClean="0"/>
-          </a:p>
-          <a:p>
             <a:pPr>
               <a:lnSpc>
                 <a:spcPct val="80000"/>
@@ -5273,6 +4886,16 @@
               <a:buFontTx/>
               <a:buNone/>
             </a:pPr>
+            <a:r>
+              <a:rPr lang="en-US" dirty="0"/>
+              <a:t>8.2.4.6  </a:t>
+            </a:r>
+            <a:r>
+              <a:rPr lang="en-US" dirty="0">
+                <a:latin typeface="Arial" charset="0"/>
+              </a:rPr>
+              <a:t>Dynamic Link-local Addresses (cont.)</a:t>
+            </a:r>
             <a:endParaRPr lang="en-US" dirty="0"/>
           </a:p>
         </p:txBody>
@@ -5280,7 +4903,7 @@
     </p:spTree>
     <p:extLst>
       <p:ext uri="{BB962C8B-B14F-4D97-AF65-F5344CB8AC3E}">
-        <p14:creationId xmlns:p14="http://schemas.microsoft.com/office/powerpoint/2010/main" val="1548682403"/>
+        <p14:creationId xmlns:p14="http://schemas.microsoft.com/office/powerpoint/2010/main" val="2030010452"/>
       </p:ext>
     </p:extLst>
   </p:cSld>
@@ -5466,7 +5089,7 @@
             <a:fld id="{4EE133E6-1A71-3948-B0E1-530C95DEAFDE}" type="slidenum">
               <a:rPr lang="en-US" sz="800"/>
               <a:pPr/>
-              <a:t>37</a:t>
+              <a:t>35</a:t>
             </a:fld>
             <a:endParaRPr lang="en-US" sz="800" dirty="0"/>
           </a:p>
@@ -5531,8 +5154,12 @@
               <a:buNone/>
             </a:pPr>
             <a:r>
-              <a:rPr lang="en-US" dirty="0" smtClean="0"/>
-              <a:t>8.2.4.8 Verifying IPv6 Address Configuration</a:t>
+              <a:rPr lang="en-US" dirty="0"/>
+              <a:t>8.2.4.7  Static</a:t>
+            </a:r>
+            <a:r>
+              <a:rPr lang="en-US" baseline="0" dirty="0"/>
+              <a:t> Link-local Addresses</a:t>
             </a:r>
             <a:endParaRPr lang="en-US" dirty="0"/>
           </a:p>
@@ -5541,7 +5168,7 @@
     </p:spTree>
     <p:extLst>
       <p:ext uri="{BB962C8B-B14F-4D97-AF65-F5344CB8AC3E}">
-        <p14:creationId xmlns:p14="http://schemas.microsoft.com/office/powerpoint/2010/main" val="2040059033"/>
+        <p14:creationId xmlns:p14="http://schemas.microsoft.com/office/powerpoint/2010/main" val="3035704153"/>
       </p:ext>
     </p:extLst>
   </p:cSld>
@@ -5727,7 +5354,7 @@
             <a:fld id="{4EE133E6-1A71-3948-B0E1-530C95DEAFDE}" type="slidenum">
               <a:rPr lang="en-US" sz="800"/>
               <a:pPr/>
-              <a:t>38</a:t>
+              <a:t>36</a:t>
             </a:fld>
             <a:endParaRPr lang="en-US" sz="800" dirty="0"/>
           </a:p>
@@ -5784,6 +5411,30 @@
           <a:bodyPr/>
           <a:lstStyle/>
           <a:p>
+            <a:pPr marL="110605" indent="-110605" defTabSz="1001675" eaLnBrk="0" fontAlgn="base" hangingPunct="0">
+              <a:lnSpc>
+                <a:spcPct val="80000"/>
+              </a:lnSpc>
+              <a:spcBef>
+                <a:spcPct val="50000"/>
+              </a:spcBef>
+              <a:spcAft>
+                <a:spcPct val="0"/>
+              </a:spcAft>
+              <a:buSzPct val="100000"/>
+              <a:defRPr/>
+            </a:pPr>
+            <a:r>
+              <a:rPr lang="en-US" dirty="0"/>
+              <a:t>8.2.4.7  Static</a:t>
+            </a:r>
+            <a:r>
+              <a:rPr lang="en-US" baseline="0" dirty="0"/>
+              <a:t> Link-local Addresses (cont.)</a:t>
+            </a:r>
+            <a:endParaRPr lang="en-US" dirty="0"/>
+          </a:p>
+          <a:p>
             <a:pPr>
               <a:lnSpc>
                 <a:spcPct val="80000"/>
@@ -5791,10 +5442,6 @@
               <a:buFontTx/>
               <a:buNone/>
             </a:pPr>
-            <a:r>
-              <a:rPr lang="en-US" dirty="0" smtClean="0"/>
-              <a:t>8.2.4.8 Verifying IPv6 Address Configuration (cont.)</a:t>
-            </a:r>
             <a:endParaRPr lang="en-US" dirty="0"/>
           </a:p>
         </p:txBody>
@@ -5802,7 +5449,7 @@
     </p:spTree>
     <p:extLst>
       <p:ext uri="{BB962C8B-B14F-4D97-AF65-F5344CB8AC3E}">
-        <p14:creationId xmlns:p14="http://schemas.microsoft.com/office/powerpoint/2010/main" val="4167531511"/>
+        <p14:creationId xmlns:p14="http://schemas.microsoft.com/office/powerpoint/2010/main" val="1548682403"/>
       </p:ext>
     </p:extLst>
   </p:cSld>
@@ -5831,7 +5478,7 @@
       </p:grpSpPr>
       <p:sp>
         <p:nvSpPr>
-          <p:cNvPr id="61441" name="Rectangle 11"/>
+          <p:cNvPr id="59393" name="Rectangle 11"/>
           <p:cNvSpPr>
             <a:spLocks noGrp="1" noChangeArrowheads="1"/>
           </p:cNvSpPr>
@@ -5985,10 +5632,10 @@
             </a:lvl9pPr>
           </a:lstStyle>
           <a:p>
-            <a:fld id="{B0AE87D6-DF4D-4E45-B583-CE3BFF4036EF}" type="slidenum">
+            <a:fld id="{4EE133E6-1A71-3948-B0E1-530C95DEAFDE}" type="slidenum">
               <a:rPr lang="en-US" sz="800"/>
               <a:pPr/>
-              <a:t>39</a:t>
+              <a:t>37</a:t>
             </a:fld>
             <a:endParaRPr lang="en-US" sz="800" dirty="0"/>
           </a:p>
@@ -5996,7 +5643,7 @@
       </p:sp>
       <p:sp>
         <p:nvSpPr>
-          <p:cNvPr id="61442" name="Rectangle 2"/>
+          <p:cNvPr id="59394" name="Rectangle 2"/>
           <p:cNvSpPr>
             <a:spLocks noGrp="1" noRot="1" noChangeAspect="1" noChangeArrowheads="1" noTextEdit="1"/>
           </p:cNvSpPr>
@@ -6010,7 +5657,7 @@
       </p:sp>
       <p:sp>
         <p:nvSpPr>
-          <p:cNvPr id="61443" name="Rectangle 3"/>
+          <p:cNvPr id="59395" name="Rectangle 3"/>
           <p:cNvSpPr>
             <a:spLocks noGrp="1" noChangeArrowheads="1"/>
           </p:cNvSpPr>
@@ -6053,21 +5700,16 @@
               <a:buNone/>
             </a:pPr>
             <a:r>
-              <a:rPr lang="en-US" dirty="0" smtClean="0"/>
-              <a:t>8.2.5.1  Assigned</a:t>
-            </a:r>
-            <a:r>
-              <a:rPr lang="en-US" baseline="0" dirty="0" smtClean="0"/>
-              <a:t> IPv6 Multicast Addresses</a:t>
-            </a:r>
-            <a:endParaRPr lang="en-US" dirty="0"/>
+              <a:rPr lang="en-US" dirty="0"/>
+              <a:t>8.2.4.8 Verifying IPv6 Address Configuration</a:t>
+            </a:r>
           </a:p>
         </p:txBody>
       </p:sp>
     </p:spTree>
     <p:extLst>
       <p:ext uri="{BB962C8B-B14F-4D97-AF65-F5344CB8AC3E}">
-        <p14:creationId xmlns:p14="http://schemas.microsoft.com/office/powerpoint/2010/main" val="2500687778"/>
+        <p14:creationId xmlns:p14="http://schemas.microsoft.com/office/powerpoint/2010/main" val="2040059033"/>
       </p:ext>
     </p:extLst>
   </p:cSld>
@@ -6096,7 +5738,7 @@
       </p:grpSpPr>
       <p:sp>
         <p:nvSpPr>
-          <p:cNvPr id="61441" name="Rectangle 11"/>
+          <p:cNvPr id="59393" name="Rectangle 11"/>
           <p:cNvSpPr>
             <a:spLocks noGrp="1" noChangeArrowheads="1"/>
           </p:cNvSpPr>
@@ -6250,10 +5892,10 @@
             </a:lvl9pPr>
           </a:lstStyle>
           <a:p>
-            <a:fld id="{B0AE87D6-DF4D-4E45-B583-CE3BFF4036EF}" type="slidenum">
+            <a:fld id="{4EE133E6-1A71-3948-B0E1-530C95DEAFDE}" type="slidenum">
               <a:rPr lang="en-US" sz="800"/>
               <a:pPr/>
-              <a:t>40</a:t>
+              <a:t>38</a:t>
             </a:fld>
             <a:endParaRPr lang="en-US" sz="800" dirty="0"/>
           </a:p>
@@ -6261,7 +5903,7 @@
       </p:sp>
       <p:sp>
         <p:nvSpPr>
-          <p:cNvPr id="61442" name="Rectangle 2"/>
+          <p:cNvPr id="59394" name="Rectangle 2"/>
           <p:cNvSpPr>
             <a:spLocks noGrp="1" noRot="1" noChangeAspect="1" noChangeArrowheads="1" noTextEdit="1"/>
           </p:cNvSpPr>
@@ -6275,7 +5917,7 @@
       </p:sp>
       <p:sp>
         <p:nvSpPr>
-          <p:cNvPr id="61443" name="Rectangle 3"/>
+          <p:cNvPr id="59395" name="Rectangle 3"/>
           <p:cNvSpPr>
             <a:spLocks noGrp="1" noChangeArrowheads="1"/>
           </p:cNvSpPr>
@@ -6318,17 +5960,16 @@
               <a:buNone/>
             </a:pPr>
             <a:r>
-              <a:rPr lang="en-US" dirty="0" smtClean="0"/>
-              <a:t>8.2.5.1  Assigned IPv6 Multicast Addresses (cont.)</a:t>
-            </a:r>
-            <a:endParaRPr lang="en-US" dirty="0"/>
+              <a:rPr lang="en-US" dirty="0"/>
+              <a:t>8.2.4.8 Verifying IPv6 Address Configuration (cont.)</a:t>
+            </a:r>
           </a:p>
         </p:txBody>
       </p:sp>
     </p:spTree>
     <p:extLst>
       <p:ext uri="{BB962C8B-B14F-4D97-AF65-F5344CB8AC3E}">
-        <p14:creationId xmlns:p14="http://schemas.microsoft.com/office/powerpoint/2010/main" val="768673095"/>
+        <p14:creationId xmlns:p14="http://schemas.microsoft.com/office/powerpoint/2010/main" val="4167531511"/>
       </p:ext>
     </p:extLst>
   </p:cSld>
@@ -6514,7 +6155,7 @@
             <a:fld id="{126C4740-6176-6B42-AE8B-248565D05237}" type="slidenum">
               <a:rPr lang="en-US" sz="800"/>
               <a:pPr/>
-              <a:t>14</a:t>
+              <a:t>12</a:t>
             </a:fld>
             <a:endParaRPr lang="en-US" sz="800" dirty="0"/>
           </a:p>
@@ -6579,12 +6220,12 @@
               <a:buNone/>
             </a:pPr>
             <a:r>
-              <a:rPr lang="en-US" dirty="0" smtClean="0"/>
-              <a:t>8.2.1.2 IPv4</a:t>
-            </a:r>
-            <a:r>
-              <a:rPr lang="en-US" baseline="0" dirty="0" smtClean="0"/>
-              <a:t> and IPV6 Coexistence (cont.)</a:t>
+              <a:rPr lang="en-US" dirty="0"/>
+              <a:t>8.2.1.2  IPv4</a:t>
+            </a:r>
+            <a:r>
+              <a:rPr lang="en-US" baseline="0" dirty="0"/>
+              <a:t> and IPv6 Coexistence</a:t>
             </a:r>
             <a:endParaRPr lang="en-US" dirty="0"/>
           </a:p>
@@ -6593,7 +6234,7 @@
     </p:spTree>
     <p:extLst>
       <p:ext uri="{BB962C8B-B14F-4D97-AF65-F5344CB8AC3E}">
-        <p14:creationId xmlns:p14="http://schemas.microsoft.com/office/powerpoint/2010/main" val="2378733314"/>
+        <p14:creationId xmlns:p14="http://schemas.microsoft.com/office/powerpoint/2010/main" val="3556055785"/>
       </p:ext>
     </p:extLst>
   </p:cSld>
@@ -6779,7 +6420,7 @@
             <a:fld id="{B0AE87D6-DF4D-4E45-B583-CE3BFF4036EF}" type="slidenum">
               <a:rPr lang="en-US" sz="800"/>
               <a:pPr/>
-              <a:t>41</a:t>
+              <a:t>39</a:t>
             </a:fld>
             <a:endParaRPr lang="en-US" sz="800" dirty="0"/>
           </a:p>
@@ -6844,8 +6485,12 @@
               <a:buNone/>
             </a:pPr>
             <a:r>
-              <a:rPr lang="en-US" dirty="0" smtClean="0"/>
-              <a:t>8.2.5.1  Assigned IPv6 Multicast Addresses (cont.)</a:t>
+              <a:rPr lang="en-US" dirty="0"/>
+              <a:t>8.2.5.1  Assigned</a:t>
+            </a:r>
+            <a:r>
+              <a:rPr lang="en-US" baseline="0" dirty="0"/>
+              <a:t> IPv6 Multicast Addresses</a:t>
             </a:r>
             <a:endParaRPr lang="en-US" dirty="0"/>
           </a:p>
@@ -6854,7 +6499,7 @@
     </p:spTree>
     <p:extLst>
       <p:ext uri="{BB962C8B-B14F-4D97-AF65-F5344CB8AC3E}">
-        <p14:creationId xmlns:p14="http://schemas.microsoft.com/office/powerpoint/2010/main" val="1671902261"/>
+        <p14:creationId xmlns:p14="http://schemas.microsoft.com/office/powerpoint/2010/main" val="2500687778"/>
       </p:ext>
     </p:extLst>
   </p:cSld>
@@ -7040,7 +6685,7 @@
             <a:fld id="{B0AE87D6-DF4D-4E45-B583-CE3BFF4036EF}" type="slidenum">
               <a:rPr lang="en-US" sz="800"/>
               <a:pPr/>
-              <a:t>42</a:t>
+              <a:t>40</a:t>
             </a:fld>
             <a:endParaRPr lang="en-US" sz="800" dirty="0"/>
           </a:p>
@@ -7105,17 +6750,16 @@
               <a:buNone/>
             </a:pPr>
             <a:r>
-              <a:rPr lang="en-US" dirty="0" smtClean="0"/>
-              <a:t>8.2.5.2  Solicited Node IPv6 Multicast Addresses</a:t>
-            </a:r>
-            <a:endParaRPr lang="en-US" dirty="0"/>
+              <a:rPr lang="en-US" dirty="0"/>
+              <a:t>8.2.5.1  Assigned IPv6 Multicast Addresses (cont.)</a:t>
+            </a:r>
           </a:p>
         </p:txBody>
       </p:sp>
     </p:spTree>
     <p:extLst>
       <p:ext uri="{BB962C8B-B14F-4D97-AF65-F5344CB8AC3E}">
-        <p14:creationId xmlns:p14="http://schemas.microsoft.com/office/powerpoint/2010/main" val="3410590287"/>
+        <p14:creationId xmlns:p14="http://schemas.microsoft.com/office/powerpoint/2010/main" val="768673095"/>
       </p:ext>
     </p:extLst>
   </p:cSld>
@@ -7301,7 +6945,7 @@
             <a:fld id="{B0AE87D6-DF4D-4E45-B583-CE3BFF4036EF}" type="slidenum">
               <a:rPr lang="en-US" sz="800"/>
               <a:pPr/>
-              <a:t>43</a:t>
+              <a:t>41</a:t>
             </a:fld>
             <a:endParaRPr lang="en-US" sz="800" dirty="0"/>
           </a:p>
@@ -7366,10 +7010,529 @@
               <a:buNone/>
             </a:pPr>
             <a:r>
-              <a:rPr lang="en-US" dirty="0" smtClean="0"/>
+              <a:rPr lang="en-US" dirty="0"/>
+              <a:t>8.2.5.1  Assigned IPv6 Multicast Addresses (cont.)</a:t>
+            </a:r>
+          </a:p>
+        </p:txBody>
+      </p:sp>
+    </p:spTree>
+    <p:extLst>
+      <p:ext uri="{BB962C8B-B14F-4D97-AF65-F5344CB8AC3E}">
+        <p14:creationId xmlns:p14="http://schemas.microsoft.com/office/powerpoint/2010/main" val="1671902261"/>
+      </p:ext>
+    </p:extLst>
+  </p:cSld>
+  <p:clrMapOvr>
+    <a:masterClrMapping/>
+  </p:clrMapOvr>
+</p:notes>
+</file>
+
+<file path=ppt/notesSlides/notesSlide33.xml><?xml version="1.0" encoding="utf-8"?>
+<p:notes xmlns:a="http://schemas.openxmlformats.org/drawingml/2006/main" xmlns:r="http://schemas.openxmlformats.org/officeDocument/2006/relationships" xmlns:p="http://schemas.openxmlformats.org/presentationml/2006/main">
+  <p:cSld>
+    <p:spTree>
+      <p:nvGrpSpPr>
+        <p:cNvPr id="1" name=""/>
+        <p:cNvGrpSpPr/>
+        <p:nvPr/>
+      </p:nvGrpSpPr>
+      <p:grpSpPr>
+        <a:xfrm>
+          <a:off x="0" y="0"/>
+          <a:ext cx="0" cy="0"/>
+          <a:chOff x="0" y="0"/>
+          <a:chExt cx="0" cy="0"/>
+        </a:xfrm>
+      </p:grpSpPr>
+      <p:sp>
+        <p:nvSpPr>
+          <p:cNvPr id="61441" name="Rectangle 11"/>
+          <p:cNvSpPr>
+            <a:spLocks noGrp="1" noChangeArrowheads="1"/>
+          </p:cNvSpPr>
+          <p:nvPr>
+            <p:ph type="sldNum" sz="quarter" idx="5"/>
+          </p:nvPr>
+        </p:nvSpPr>
+        <p:spPr>
+          <a:noFill/>
+          <a:ln/>
+          <a:extLst>
+            <a:ext uri="{909E8E84-426E-40DD-AFC4-6F175D3DCCD1}">
+              <a14:hiddenFill xmlns:a14="http://schemas.microsoft.com/office/drawing/2010/main">
+                <a:solidFill>
+                  <a:srgbClr val="FFFFFF"/>
+                </a:solidFill>
+              </a14:hiddenFill>
+            </a:ext>
+            <a:ext uri="{91240B29-F687-4F45-9708-019B960494DF}">
+              <a14:hiddenLine xmlns:a14="http://schemas.microsoft.com/office/drawing/2010/main" w="9525">
+                <a:solidFill>
+                  <a:srgbClr val="000000"/>
+                </a:solidFill>
+                <a:miter lim="800000"/>
+                <a:headEnd/>
+                <a:tailEnd/>
+              </a14:hiddenLine>
+            </a:ext>
+          </a:extLst>
+        </p:spPr>
+        <p:txBody>
+          <a:bodyPr/>
+          <a:lstStyle>
+            <a:lvl1pPr defTabSz="886397">
+              <a:defRPr sz="2400">
+                <a:solidFill>
+                  <a:schemeClr val="tx1"/>
+                </a:solidFill>
+                <a:latin typeface="Arial" charset="0"/>
+                <a:ea typeface="ＭＳ Ｐゴシック" charset="0"/>
+                <a:cs typeface="ＭＳ Ｐゴシック" charset="0"/>
+              </a:defRPr>
+            </a:lvl1pPr>
+            <a:lvl2pPr marL="729057" indent="-280406" defTabSz="886397">
+              <a:defRPr sz="2400">
+                <a:solidFill>
+                  <a:schemeClr val="tx1"/>
+                </a:solidFill>
+                <a:latin typeface="Arial" charset="0"/>
+                <a:ea typeface="ＭＳ Ｐゴシック" charset="0"/>
+              </a:defRPr>
+            </a:lvl2pPr>
+            <a:lvl3pPr marL="1121626" indent="-224325" defTabSz="886397">
+              <a:defRPr sz="2400">
+                <a:solidFill>
+                  <a:schemeClr val="tx1"/>
+                </a:solidFill>
+                <a:latin typeface="Arial" charset="0"/>
+                <a:ea typeface="ＭＳ Ｐゴシック" charset="0"/>
+              </a:defRPr>
+            </a:lvl3pPr>
+            <a:lvl4pPr marL="1570276" indent="-224325" defTabSz="886397">
+              <a:defRPr sz="2400">
+                <a:solidFill>
+                  <a:schemeClr val="tx1"/>
+                </a:solidFill>
+                <a:latin typeface="Arial" charset="0"/>
+                <a:ea typeface="ＭＳ Ｐゴシック" charset="0"/>
+              </a:defRPr>
+            </a:lvl4pPr>
+            <a:lvl5pPr marL="2018927" indent="-224325" defTabSz="886397">
+              <a:defRPr sz="2400">
+                <a:solidFill>
+                  <a:schemeClr val="tx1"/>
+                </a:solidFill>
+                <a:latin typeface="Arial" charset="0"/>
+                <a:ea typeface="ＭＳ Ｐゴシック" charset="0"/>
+              </a:defRPr>
+            </a:lvl5pPr>
+            <a:lvl6pPr marL="2467577" indent="-224325" algn="ctr" defTabSz="886397" eaLnBrk="0" fontAlgn="base" hangingPunct="0">
+              <a:lnSpc>
+                <a:spcPct val="90000"/>
+              </a:lnSpc>
+              <a:spcBef>
+                <a:spcPct val="0"/>
+              </a:spcBef>
+              <a:spcAft>
+                <a:spcPct val="0"/>
+              </a:spcAft>
+              <a:defRPr sz="2400">
+                <a:solidFill>
+                  <a:schemeClr val="tx1"/>
+                </a:solidFill>
+                <a:latin typeface="Arial" charset="0"/>
+                <a:ea typeface="ＭＳ Ｐゴシック" charset="0"/>
+              </a:defRPr>
+            </a:lvl6pPr>
+            <a:lvl7pPr marL="2916227" indent="-224325" algn="ctr" defTabSz="886397" eaLnBrk="0" fontAlgn="base" hangingPunct="0">
+              <a:lnSpc>
+                <a:spcPct val="90000"/>
+              </a:lnSpc>
+              <a:spcBef>
+                <a:spcPct val="0"/>
+              </a:spcBef>
+              <a:spcAft>
+                <a:spcPct val="0"/>
+              </a:spcAft>
+              <a:defRPr sz="2400">
+                <a:solidFill>
+                  <a:schemeClr val="tx1"/>
+                </a:solidFill>
+                <a:latin typeface="Arial" charset="0"/>
+                <a:ea typeface="ＭＳ Ｐゴシック" charset="0"/>
+              </a:defRPr>
+            </a:lvl7pPr>
+            <a:lvl8pPr marL="3364878" indent="-224325" algn="ctr" defTabSz="886397" eaLnBrk="0" fontAlgn="base" hangingPunct="0">
+              <a:lnSpc>
+                <a:spcPct val="90000"/>
+              </a:lnSpc>
+              <a:spcBef>
+                <a:spcPct val="0"/>
+              </a:spcBef>
+              <a:spcAft>
+                <a:spcPct val="0"/>
+              </a:spcAft>
+              <a:defRPr sz="2400">
+                <a:solidFill>
+                  <a:schemeClr val="tx1"/>
+                </a:solidFill>
+                <a:latin typeface="Arial" charset="0"/>
+                <a:ea typeface="ＭＳ Ｐゴシック" charset="0"/>
+              </a:defRPr>
+            </a:lvl8pPr>
+            <a:lvl9pPr marL="3813528" indent="-224325" algn="ctr" defTabSz="886397" eaLnBrk="0" fontAlgn="base" hangingPunct="0">
+              <a:lnSpc>
+                <a:spcPct val="90000"/>
+              </a:lnSpc>
+              <a:spcBef>
+                <a:spcPct val="0"/>
+              </a:spcBef>
+              <a:spcAft>
+                <a:spcPct val="0"/>
+              </a:spcAft>
+              <a:defRPr sz="2400">
+                <a:solidFill>
+                  <a:schemeClr val="tx1"/>
+                </a:solidFill>
+                <a:latin typeface="Arial" charset="0"/>
+                <a:ea typeface="ＭＳ Ｐゴシック" charset="0"/>
+              </a:defRPr>
+            </a:lvl9pPr>
+          </a:lstStyle>
+          <a:p>
+            <a:fld id="{B0AE87D6-DF4D-4E45-B583-CE3BFF4036EF}" type="slidenum">
+              <a:rPr lang="en-US" sz="800"/>
+              <a:pPr/>
+              <a:t>42</a:t>
+            </a:fld>
+            <a:endParaRPr lang="en-US" sz="800" dirty="0"/>
+          </a:p>
+        </p:txBody>
+      </p:sp>
+      <p:sp>
+        <p:nvSpPr>
+          <p:cNvPr id="61442" name="Rectangle 2"/>
+          <p:cNvSpPr>
+            <a:spLocks noGrp="1" noRot="1" noChangeAspect="1" noChangeArrowheads="1" noTextEdit="1"/>
+          </p:cNvSpPr>
+          <p:nvPr>
+            <p:ph type="sldImg"/>
+          </p:nvPr>
+        </p:nvSpPr>
+        <p:spPr>
+          <a:ln/>
+        </p:spPr>
+      </p:sp>
+      <p:sp>
+        <p:nvSpPr>
+          <p:cNvPr id="61443" name="Rectangle 3"/>
+          <p:cNvSpPr>
+            <a:spLocks noGrp="1" noChangeArrowheads="1"/>
+          </p:cNvSpPr>
+          <p:nvPr>
+            <p:ph type="body" idx="1"/>
+          </p:nvPr>
+        </p:nvSpPr>
+        <p:spPr>
+          <a:noFill/>
+          <a:ln/>
+          <a:extLst>
+            <a:ext uri="{909E8E84-426E-40DD-AFC4-6F175D3DCCD1}">
+              <a14:hiddenFill xmlns:a14="http://schemas.microsoft.com/office/drawing/2010/main">
+                <a:solidFill>
+                  <a:srgbClr val="FFFFFF"/>
+                </a:solidFill>
+              </a14:hiddenFill>
+            </a:ext>
+            <a:ext uri="{91240B29-F687-4F45-9708-019B960494DF}">
+              <a14:hiddenLine xmlns:a14="http://schemas.microsoft.com/office/drawing/2010/main" w="9525">
+                <a:solidFill>
+                  <a:srgbClr val="000000"/>
+                </a:solidFill>
+                <a:miter lim="800000"/>
+                <a:headEnd/>
+                <a:tailEnd/>
+              </a14:hiddenLine>
+            </a:ext>
+          </a:extLst>
+        </p:spPr>
+        <p:txBody>
+          <a:bodyPr/>
+          <a:lstStyle/>
+          <a:p>
+            <a:pPr>
+              <a:lnSpc>
+                <a:spcPct val="80000"/>
+              </a:lnSpc>
+              <a:buFontTx/>
+              <a:buNone/>
+            </a:pPr>
+            <a:r>
+              <a:rPr lang="en-US" dirty="0"/>
+              <a:t>8.2.5.2  Solicited Node IPv6 Multicast Addresses</a:t>
+            </a:r>
+          </a:p>
+        </p:txBody>
+      </p:sp>
+    </p:spTree>
+    <p:extLst>
+      <p:ext uri="{BB962C8B-B14F-4D97-AF65-F5344CB8AC3E}">
+        <p14:creationId xmlns:p14="http://schemas.microsoft.com/office/powerpoint/2010/main" val="3410590287"/>
+      </p:ext>
+    </p:extLst>
+  </p:cSld>
+  <p:clrMapOvr>
+    <a:masterClrMapping/>
+  </p:clrMapOvr>
+</p:notes>
+</file>
+
+<file path=ppt/notesSlides/notesSlide34.xml><?xml version="1.0" encoding="utf-8"?>
+<p:notes xmlns:a="http://schemas.openxmlformats.org/drawingml/2006/main" xmlns:r="http://schemas.openxmlformats.org/officeDocument/2006/relationships" xmlns:p="http://schemas.openxmlformats.org/presentationml/2006/main">
+  <p:cSld>
+    <p:spTree>
+      <p:nvGrpSpPr>
+        <p:cNvPr id="1" name=""/>
+        <p:cNvGrpSpPr/>
+        <p:nvPr/>
+      </p:nvGrpSpPr>
+      <p:grpSpPr>
+        <a:xfrm>
+          <a:off x="0" y="0"/>
+          <a:ext cx="0" cy="0"/>
+          <a:chOff x="0" y="0"/>
+          <a:chExt cx="0" cy="0"/>
+        </a:xfrm>
+      </p:grpSpPr>
+      <p:sp>
+        <p:nvSpPr>
+          <p:cNvPr id="61441" name="Rectangle 11"/>
+          <p:cNvSpPr>
+            <a:spLocks noGrp="1" noChangeArrowheads="1"/>
+          </p:cNvSpPr>
+          <p:nvPr>
+            <p:ph type="sldNum" sz="quarter" idx="5"/>
+          </p:nvPr>
+        </p:nvSpPr>
+        <p:spPr>
+          <a:noFill/>
+          <a:ln/>
+          <a:extLst>
+            <a:ext uri="{909E8E84-426E-40DD-AFC4-6F175D3DCCD1}">
+              <a14:hiddenFill xmlns:a14="http://schemas.microsoft.com/office/drawing/2010/main">
+                <a:solidFill>
+                  <a:srgbClr val="FFFFFF"/>
+                </a:solidFill>
+              </a14:hiddenFill>
+            </a:ext>
+            <a:ext uri="{91240B29-F687-4F45-9708-019B960494DF}">
+              <a14:hiddenLine xmlns:a14="http://schemas.microsoft.com/office/drawing/2010/main" w="9525">
+                <a:solidFill>
+                  <a:srgbClr val="000000"/>
+                </a:solidFill>
+                <a:miter lim="800000"/>
+                <a:headEnd/>
+                <a:tailEnd/>
+              </a14:hiddenLine>
+            </a:ext>
+          </a:extLst>
+        </p:spPr>
+        <p:txBody>
+          <a:bodyPr/>
+          <a:lstStyle>
+            <a:lvl1pPr defTabSz="886397">
+              <a:defRPr sz="2400">
+                <a:solidFill>
+                  <a:schemeClr val="tx1"/>
+                </a:solidFill>
+                <a:latin typeface="Arial" charset="0"/>
+                <a:ea typeface="ＭＳ Ｐゴシック" charset="0"/>
+                <a:cs typeface="ＭＳ Ｐゴシック" charset="0"/>
+              </a:defRPr>
+            </a:lvl1pPr>
+            <a:lvl2pPr marL="729057" indent="-280406" defTabSz="886397">
+              <a:defRPr sz="2400">
+                <a:solidFill>
+                  <a:schemeClr val="tx1"/>
+                </a:solidFill>
+                <a:latin typeface="Arial" charset="0"/>
+                <a:ea typeface="ＭＳ Ｐゴシック" charset="0"/>
+              </a:defRPr>
+            </a:lvl2pPr>
+            <a:lvl3pPr marL="1121626" indent="-224325" defTabSz="886397">
+              <a:defRPr sz="2400">
+                <a:solidFill>
+                  <a:schemeClr val="tx1"/>
+                </a:solidFill>
+                <a:latin typeface="Arial" charset="0"/>
+                <a:ea typeface="ＭＳ Ｐゴシック" charset="0"/>
+              </a:defRPr>
+            </a:lvl3pPr>
+            <a:lvl4pPr marL="1570276" indent="-224325" defTabSz="886397">
+              <a:defRPr sz="2400">
+                <a:solidFill>
+                  <a:schemeClr val="tx1"/>
+                </a:solidFill>
+                <a:latin typeface="Arial" charset="0"/>
+                <a:ea typeface="ＭＳ Ｐゴシック" charset="0"/>
+              </a:defRPr>
+            </a:lvl4pPr>
+            <a:lvl5pPr marL="2018927" indent="-224325" defTabSz="886397">
+              <a:defRPr sz="2400">
+                <a:solidFill>
+                  <a:schemeClr val="tx1"/>
+                </a:solidFill>
+                <a:latin typeface="Arial" charset="0"/>
+                <a:ea typeface="ＭＳ Ｐゴシック" charset="0"/>
+              </a:defRPr>
+            </a:lvl5pPr>
+            <a:lvl6pPr marL="2467577" indent="-224325" algn="ctr" defTabSz="886397" eaLnBrk="0" fontAlgn="base" hangingPunct="0">
+              <a:lnSpc>
+                <a:spcPct val="90000"/>
+              </a:lnSpc>
+              <a:spcBef>
+                <a:spcPct val="0"/>
+              </a:spcBef>
+              <a:spcAft>
+                <a:spcPct val="0"/>
+              </a:spcAft>
+              <a:defRPr sz="2400">
+                <a:solidFill>
+                  <a:schemeClr val="tx1"/>
+                </a:solidFill>
+                <a:latin typeface="Arial" charset="0"/>
+                <a:ea typeface="ＭＳ Ｐゴシック" charset="0"/>
+              </a:defRPr>
+            </a:lvl6pPr>
+            <a:lvl7pPr marL="2916227" indent="-224325" algn="ctr" defTabSz="886397" eaLnBrk="0" fontAlgn="base" hangingPunct="0">
+              <a:lnSpc>
+                <a:spcPct val="90000"/>
+              </a:lnSpc>
+              <a:spcBef>
+                <a:spcPct val="0"/>
+              </a:spcBef>
+              <a:spcAft>
+                <a:spcPct val="0"/>
+              </a:spcAft>
+              <a:defRPr sz="2400">
+                <a:solidFill>
+                  <a:schemeClr val="tx1"/>
+                </a:solidFill>
+                <a:latin typeface="Arial" charset="0"/>
+                <a:ea typeface="ＭＳ Ｐゴシック" charset="0"/>
+              </a:defRPr>
+            </a:lvl7pPr>
+            <a:lvl8pPr marL="3364878" indent="-224325" algn="ctr" defTabSz="886397" eaLnBrk="0" fontAlgn="base" hangingPunct="0">
+              <a:lnSpc>
+                <a:spcPct val="90000"/>
+              </a:lnSpc>
+              <a:spcBef>
+                <a:spcPct val="0"/>
+              </a:spcBef>
+              <a:spcAft>
+                <a:spcPct val="0"/>
+              </a:spcAft>
+              <a:defRPr sz="2400">
+                <a:solidFill>
+                  <a:schemeClr val="tx1"/>
+                </a:solidFill>
+                <a:latin typeface="Arial" charset="0"/>
+                <a:ea typeface="ＭＳ Ｐゴシック" charset="0"/>
+              </a:defRPr>
+            </a:lvl8pPr>
+            <a:lvl9pPr marL="3813528" indent="-224325" algn="ctr" defTabSz="886397" eaLnBrk="0" fontAlgn="base" hangingPunct="0">
+              <a:lnSpc>
+                <a:spcPct val="90000"/>
+              </a:lnSpc>
+              <a:spcBef>
+                <a:spcPct val="0"/>
+              </a:spcBef>
+              <a:spcAft>
+                <a:spcPct val="0"/>
+              </a:spcAft>
+              <a:defRPr sz="2400">
+                <a:solidFill>
+                  <a:schemeClr val="tx1"/>
+                </a:solidFill>
+                <a:latin typeface="Arial" charset="0"/>
+                <a:ea typeface="ＭＳ Ｐゴシック" charset="0"/>
+              </a:defRPr>
+            </a:lvl9pPr>
+          </a:lstStyle>
+          <a:p>
+            <a:fld id="{B0AE87D6-DF4D-4E45-B583-CE3BFF4036EF}" type="slidenum">
+              <a:rPr lang="en-US" sz="800"/>
+              <a:pPr/>
+              <a:t>43</a:t>
+            </a:fld>
+            <a:endParaRPr lang="en-US" sz="800" dirty="0"/>
+          </a:p>
+        </p:txBody>
+      </p:sp>
+      <p:sp>
+        <p:nvSpPr>
+          <p:cNvPr id="61442" name="Rectangle 2"/>
+          <p:cNvSpPr>
+            <a:spLocks noGrp="1" noRot="1" noChangeAspect="1" noChangeArrowheads="1" noTextEdit="1"/>
+          </p:cNvSpPr>
+          <p:nvPr>
+            <p:ph type="sldImg"/>
+          </p:nvPr>
+        </p:nvSpPr>
+        <p:spPr>
+          <a:ln/>
+        </p:spPr>
+      </p:sp>
+      <p:sp>
+        <p:nvSpPr>
+          <p:cNvPr id="61443" name="Rectangle 3"/>
+          <p:cNvSpPr>
+            <a:spLocks noGrp="1" noChangeArrowheads="1"/>
+          </p:cNvSpPr>
+          <p:nvPr>
+            <p:ph type="body" idx="1"/>
+          </p:nvPr>
+        </p:nvSpPr>
+        <p:spPr>
+          <a:noFill/>
+          <a:ln/>
+          <a:extLst>
+            <a:ext uri="{909E8E84-426E-40DD-AFC4-6F175D3DCCD1}">
+              <a14:hiddenFill xmlns:a14="http://schemas.microsoft.com/office/drawing/2010/main">
+                <a:solidFill>
+                  <a:srgbClr val="FFFFFF"/>
+                </a:solidFill>
+              </a14:hiddenFill>
+            </a:ext>
+            <a:ext uri="{91240B29-F687-4F45-9708-019B960494DF}">
+              <a14:hiddenLine xmlns:a14="http://schemas.microsoft.com/office/drawing/2010/main" w="9525">
+                <a:solidFill>
+                  <a:srgbClr val="000000"/>
+                </a:solidFill>
+                <a:miter lim="800000"/>
+                <a:headEnd/>
+                <a:tailEnd/>
+              </a14:hiddenLine>
+            </a:ext>
+          </a:extLst>
+        </p:spPr>
+        <p:txBody>
+          <a:bodyPr/>
+          <a:lstStyle/>
+          <a:p>
+            <a:pPr>
+              <a:lnSpc>
+                <a:spcPct val="80000"/>
+              </a:lnSpc>
+              <a:buFontTx/>
+              <a:buNone/>
+            </a:pPr>
+            <a:r>
+              <a:rPr lang="en-US" dirty="0"/>
               <a:t>8.2.5.2  Solicited Node IPv6 Multicast Addresses (cont.)</a:t>
             </a:r>
-            <a:endParaRPr lang="en-US" dirty="0"/>
           </a:p>
         </p:txBody>
       </p:sp>
@@ -7405,7 +7568,7 @@
       </p:grpSpPr>
       <p:sp>
         <p:nvSpPr>
-          <p:cNvPr id="59393" name="Rectangle 11"/>
+          <p:cNvPr id="51201" name="Rectangle 11"/>
           <p:cNvSpPr>
             <a:spLocks noGrp="1" noChangeArrowheads="1"/>
           </p:cNvSpPr>
@@ -7559,10 +7722,10 @@
             </a:lvl9pPr>
           </a:lstStyle>
           <a:p>
-            <a:fld id="{4EE133E6-1A71-3948-B0E1-530C95DEAFDE}" type="slidenum">
+            <a:fld id="{126C4740-6176-6B42-AE8B-248565D05237}" type="slidenum">
               <a:rPr lang="en-US" sz="800"/>
               <a:pPr/>
-              <a:t>15</a:t>
+              <a:t>13</a:t>
             </a:fld>
             <a:endParaRPr lang="en-US" sz="800" dirty="0"/>
           </a:p>
@@ -7570,7 +7733,7 @@
       </p:sp>
       <p:sp>
         <p:nvSpPr>
-          <p:cNvPr id="59394" name="Rectangle 2"/>
+          <p:cNvPr id="51202" name="Rectangle 2"/>
           <p:cNvSpPr>
             <a:spLocks noGrp="1" noRot="1" noChangeAspect="1" noChangeArrowheads="1" noTextEdit="1"/>
           </p:cNvSpPr>
@@ -7584,7 +7747,7 @@
       </p:sp>
       <p:sp>
         <p:nvSpPr>
-          <p:cNvPr id="59395" name="Rectangle 3"/>
+          <p:cNvPr id="51203" name="Rectangle 3"/>
           <p:cNvSpPr>
             <a:spLocks noGrp="1" noChangeArrowheads="1"/>
           </p:cNvSpPr>
@@ -7627,17 +7790,16 @@
               <a:buNone/>
             </a:pPr>
             <a:r>
-              <a:rPr lang="en-US" dirty="0" smtClean="0"/>
-              <a:t>8.2.3.2  IPv6 Prefix Length</a:t>
-            </a:r>
-            <a:endParaRPr lang="en-US" dirty="0"/>
+              <a:rPr lang="en-US" dirty="0"/>
+              <a:t>8.2.1.2  IPv4 and IPv6 Coexistence</a:t>
+            </a:r>
           </a:p>
         </p:txBody>
       </p:sp>
     </p:spTree>
     <p:extLst>
       <p:ext uri="{BB962C8B-B14F-4D97-AF65-F5344CB8AC3E}">
-        <p14:creationId xmlns:p14="http://schemas.microsoft.com/office/powerpoint/2010/main" val="3670492007"/>
+        <p14:creationId xmlns:p14="http://schemas.microsoft.com/office/powerpoint/2010/main" val="3848619941"/>
       </p:ext>
     </p:extLst>
   </p:cSld>
@@ -7666,7 +7828,7 @@
       </p:grpSpPr>
       <p:sp>
         <p:nvSpPr>
-          <p:cNvPr id="59393" name="Rectangle 11"/>
+          <p:cNvPr id="51201" name="Rectangle 11"/>
           <p:cNvSpPr>
             <a:spLocks noGrp="1" noChangeArrowheads="1"/>
           </p:cNvSpPr>
@@ -7820,10 +7982,10 @@
             </a:lvl9pPr>
           </a:lstStyle>
           <a:p>
-            <a:fld id="{4EE133E6-1A71-3948-B0E1-530C95DEAFDE}" type="slidenum">
+            <a:fld id="{126C4740-6176-6B42-AE8B-248565D05237}" type="slidenum">
               <a:rPr lang="en-US" sz="800"/>
               <a:pPr/>
-              <a:t>16</a:t>
+              <a:t>14</a:t>
             </a:fld>
             <a:endParaRPr lang="en-US" sz="800" dirty="0"/>
           </a:p>
@@ -7831,7 +7993,7 @@
       </p:sp>
       <p:sp>
         <p:nvSpPr>
-          <p:cNvPr id="59394" name="Rectangle 2"/>
+          <p:cNvPr id="51202" name="Rectangle 2"/>
           <p:cNvSpPr>
             <a:spLocks noGrp="1" noRot="1" noChangeAspect="1" noChangeArrowheads="1" noTextEdit="1"/>
           </p:cNvSpPr>
@@ -7845,7 +8007,7 @@
       </p:sp>
       <p:sp>
         <p:nvSpPr>
-          <p:cNvPr id="59395" name="Rectangle 3"/>
+          <p:cNvPr id="51203" name="Rectangle 3"/>
           <p:cNvSpPr>
             <a:spLocks noGrp="1" noChangeArrowheads="1"/>
           </p:cNvSpPr>
@@ -7888,12 +8050,12 @@
               <a:buNone/>
             </a:pPr>
             <a:r>
-              <a:rPr lang="en-US" dirty="0" smtClean="0"/>
-              <a:t>8.2.3.1  IPv6</a:t>
-            </a:r>
-            <a:r>
-              <a:rPr lang="en-US" baseline="0" dirty="0" smtClean="0"/>
-              <a:t> Address Types</a:t>
+              <a:rPr lang="en-US" dirty="0"/>
+              <a:t>8.2.1.2 IPv4</a:t>
+            </a:r>
+            <a:r>
+              <a:rPr lang="en-US" baseline="0" dirty="0"/>
+              <a:t> and IPV6 Coexistence (cont.)</a:t>
             </a:r>
             <a:endParaRPr lang="en-US" dirty="0"/>
           </a:p>
@@ -7902,7 +8064,7 @@
     </p:spTree>
     <p:extLst>
       <p:ext uri="{BB962C8B-B14F-4D97-AF65-F5344CB8AC3E}">
-        <p14:creationId xmlns:p14="http://schemas.microsoft.com/office/powerpoint/2010/main" val="1463685246"/>
+        <p14:creationId xmlns:p14="http://schemas.microsoft.com/office/powerpoint/2010/main" val="2378733314"/>
       </p:ext>
     </p:extLst>
   </p:cSld>
@@ -8088,7 +8250,7 @@
             <a:fld id="{4EE133E6-1A71-3948-B0E1-530C95DEAFDE}" type="slidenum">
               <a:rPr lang="en-US" sz="800"/>
               <a:pPr/>
-              <a:t>17</a:t>
+              <a:t>15</a:t>
             </a:fld>
             <a:endParaRPr lang="en-US" sz="800" dirty="0"/>
           </a:p>
@@ -8153,21 +8315,16 @@
               <a:buNone/>
             </a:pPr>
             <a:r>
-              <a:rPr lang="en-US" dirty="0" smtClean="0"/>
-              <a:t>8.2.3.1/8.2.3.3  IPv6</a:t>
-            </a:r>
-            <a:r>
-              <a:rPr lang="en-US" baseline="0" dirty="0" smtClean="0"/>
-              <a:t> Unicast Addresses</a:t>
-            </a:r>
-            <a:endParaRPr lang="en-US" dirty="0"/>
+              <a:rPr lang="en-US" dirty="0"/>
+              <a:t>8.2.3.2  IPv6 Prefix Length</a:t>
+            </a:r>
           </a:p>
         </p:txBody>
       </p:sp>
     </p:spTree>
     <p:extLst>
       <p:ext uri="{BB962C8B-B14F-4D97-AF65-F5344CB8AC3E}">
-        <p14:creationId xmlns:p14="http://schemas.microsoft.com/office/powerpoint/2010/main" val="1663675421"/>
+        <p14:creationId xmlns:p14="http://schemas.microsoft.com/office/powerpoint/2010/main" val="3670492007"/>
       </p:ext>
     </p:extLst>
   </p:cSld>
@@ -8353,7 +8510,7 @@
             <a:fld id="{4EE133E6-1A71-3948-B0E1-530C95DEAFDE}" type="slidenum">
               <a:rPr lang="en-US" sz="800"/>
               <a:pPr/>
-              <a:t>18</a:t>
+              <a:t>16</a:t>
             </a:fld>
             <a:endParaRPr lang="en-US" sz="800" dirty="0"/>
           </a:p>
@@ -8418,8 +8575,12 @@
               <a:buNone/>
             </a:pPr>
             <a:r>
-              <a:rPr lang="en-US" dirty="0" smtClean="0"/>
-              <a:t>8.2.3.3  IPv6 Unicast Addresses (cont.)</a:t>
+              <a:rPr lang="en-US" dirty="0"/>
+              <a:t>8.2.3.1  IPv6</a:t>
+            </a:r>
+            <a:r>
+              <a:rPr lang="en-US" baseline="0" dirty="0"/>
+              <a:t> Address Types</a:t>
             </a:r>
             <a:endParaRPr lang="en-US" dirty="0"/>
           </a:p>
@@ -8428,7 +8589,7 @@
     </p:spTree>
     <p:extLst>
       <p:ext uri="{BB962C8B-B14F-4D97-AF65-F5344CB8AC3E}">
-        <p14:creationId xmlns:p14="http://schemas.microsoft.com/office/powerpoint/2010/main" val="3292512762"/>
+        <p14:creationId xmlns:p14="http://schemas.microsoft.com/office/powerpoint/2010/main" val="1463685246"/>
       </p:ext>
     </p:extLst>
   </p:cSld>
@@ -8614,7 +8775,7 @@
             <a:fld id="{4EE133E6-1A71-3948-B0E1-530C95DEAFDE}" type="slidenum">
               <a:rPr lang="en-US" sz="800"/>
               <a:pPr/>
-              <a:t>19</a:t>
+              <a:t>17</a:t>
             </a:fld>
             <a:endParaRPr lang="en-US" sz="800" dirty="0"/>
           </a:p>
@@ -8679,12 +8840,12 @@
               <a:buNone/>
             </a:pPr>
             <a:r>
-              <a:rPr lang="en-US" dirty="0" smtClean="0"/>
-              <a:t>8.2.3.3</a:t>
-            </a:r>
-            <a:r>
-              <a:rPr lang="en-US" baseline="0" dirty="0" smtClean="0"/>
-              <a:t>  IPv6 Unicast Addresses (cont.)</a:t>
+              <a:rPr lang="en-US" dirty="0"/>
+              <a:t>8.2.3.1/8.2.3.3  IPv6</a:t>
+            </a:r>
+            <a:r>
+              <a:rPr lang="en-US" baseline="0" dirty="0"/>
+              <a:t> Unicast Addresses</a:t>
             </a:r>
             <a:endParaRPr lang="en-US" dirty="0"/>
           </a:p>
@@ -8693,7 +8854,7 @@
     </p:spTree>
     <p:extLst>
       <p:ext uri="{BB962C8B-B14F-4D97-AF65-F5344CB8AC3E}">
-        <p14:creationId xmlns:p14="http://schemas.microsoft.com/office/powerpoint/2010/main" val="2523864835"/>
+        <p14:creationId xmlns:p14="http://schemas.microsoft.com/office/powerpoint/2010/main" val="1663675421"/>
       </p:ext>
     </p:extLst>
   </p:cSld>
@@ -8879,7 +9040,7 @@
             <a:fld id="{4EE133E6-1A71-3948-B0E1-530C95DEAFDE}" type="slidenum">
               <a:rPr lang="en-US" sz="800"/>
               <a:pPr/>
-              <a:t>20</a:t>
+              <a:t>18</a:t>
             </a:fld>
             <a:endParaRPr lang="en-US" sz="800" dirty="0"/>
           </a:p>
@@ -8944,21 +9105,16 @@
               <a:buNone/>
             </a:pPr>
             <a:r>
-              <a:rPr lang="en-US" dirty="0" smtClean="0"/>
-              <a:t>8.2.3.3  IPv6 Unicast</a:t>
-            </a:r>
-            <a:r>
-              <a:rPr lang="en-US" baseline="0" dirty="0" smtClean="0"/>
-              <a:t> Addresses (cont.)</a:t>
-            </a:r>
-            <a:endParaRPr lang="en-US" dirty="0"/>
+              <a:rPr lang="en-US" dirty="0"/>
+              <a:t>8.2.3.3  IPv6 Unicast Addresses (cont.)</a:t>
+            </a:r>
           </a:p>
         </p:txBody>
       </p:sp>
     </p:spTree>
     <p:extLst>
       <p:ext uri="{BB962C8B-B14F-4D97-AF65-F5344CB8AC3E}">
-        <p14:creationId xmlns:p14="http://schemas.microsoft.com/office/powerpoint/2010/main" val="3304898829"/>
+        <p14:creationId xmlns:p14="http://schemas.microsoft.com/office/powerpoint/2010/main" val="3292512762"/>
       </p:ext>
     </p:extLst>
   </p:cSld>
@@ -9099,7 +9255,7 @@
           <a:p>
             <a:fld id="{97B33207-BA23-4F25-9AB9-C0CEEC03B0F6}" type="datetimeFigureOut">
               <a:rPr lang="en-GB" smtClean="0"/>
-              <a:t>04/01/2023</a:t>
+              <a:t>12/08/2026</a:t>
             </a:fld>
             <a:endParaRPr lang="en-GB"/>
           </a:p>
@@ -9269,7 +9425,7 @@
           <a:p>
             <a:fld id="{97B33207-BA23-4F25-9AB9-C0CEEC03B0F6}" type="datetimeFigureOut">
               <a:rPr lang="en-GB" smtClean="0"/>
-              <a:t>04/01/2023</a:t>
+              <a:t>12/08/2026</a:t>
             </a:fld>
             <a:endParaRPr lang="en-GB"/>
           </a:p>
@@ -9449,7 +9605,7 @@
           <a:p>
             <a:fld id="{97B33207-BA23-4F25-9AB9-C0CEEC03B0F6}" type="datetimeFigureOut">
               <a:rPr lang="en-GB" smtClean="0"/>
-              <a:t>04/01/2023</a:t>
+              <a:t>12/08/2026</a:t>
             </a:fld>
             <a:endParaRPr lang="en-GB"/>
           </a:p>
@@ -9619,7 +9775,7 @@
           <a:p>
             <a:fld id="{97B33207-BA23-4F25-9AB9-C0CEEC03B0F6}" type="datetimeFigureOut">
               <a:rPr lang="en-GB" smtClean="0"/>
-              <a:t>04/01/2023</a:t>
+              <a:t>12/08/2026</a:t>
             </a:fld>
             <a:endParaRPr lang="en-GB"/>
           </a:p>
@@ -9865,7 +10021,7 @@
           <a:p>
             <a:fld id="{97B33207-BA23-4F25-9AB9-C0CEEC03B0F6}" type="datetimeFigureOut">
               <a:rPr lang="en-GB" smtClean="0"/>
-              <a:t>04/01/2023</a:t>
+              <a:t>12/08/2026</a:t>
             </a:fld>
             <a:endParaRPr lang="en-GB"/>
           </a:p>
@@ -10097,7 +10253,7 @@
           <a:p>
             <a:fld id="{97B33207-BA23-4F25-9AB9-C0CEEC03B0F6}" type="datetimeFigureOut">
               <a:rPr lang="en-GB" smtClean="0"/>
-              <a:t>04/01/2023</a:t>
+              <a:t>12/08/2026</a:t>
             </a:fld>
             <a:endParaRPr lang="en-GB"/>
           </a:p>
@@ -10464,7 +10620,7 @@
           <a:p>
             <a:fld id="{97B33207-BA23-4F25-9AB9-C0CEEC03B0F6}" type="datetimeFigureOut">
               <a:rPr lang="en-GB" smtClean="0"/>
-              <a:t>04/01/2023</a:t>
+              <a:t>12/08/2026</a:t>
             </a:fld>
             <a:endParaRPr lang="en-GB"/>
           </a:p>
@@ -10582,7 +10738,7 @@
           <a:p>
             <a:fld id="{97B33207-BA23-4F25-9AB9-C0CEEC03B0F6}" type="datetimeFigureOut">
               <a:rPr lang="en-GB" smtClean="0"/>
-              <a:t>04/01/2023</a:t>
+              <a:t>12/08/2026</a:t>
             </a:fld>
             <a:endParaRPr lang="en-GB"/>
           </a:p>
@@ -10677,7 +10833,7 @@
           <a:p>
             <a:fld id="{97B33207-BA23-4F25-9AB9-C0CEEC03B0F6}" type="datetimeFigureOut">
               <a:rPr lang="en-GB" smtClean="0"/>
-              <a:t>04/01/2023</a:t>
+              <a:t>12/08/2026</a:t>
             </a:fld>
             <a:endParaRPr lang="en-GB"/>
           </a:p>
@@ -10954,7 +11110,7 @@
           <a:p>
             <a:fld id="{97B33207-BA23-4F25-9AB9-C0CEEC03B0F6}" type="datetimeFigureOut">
               <a:rPr lang="en-GB" smtClean="0"/>
-              <a:t>04/01/2023</a:t>
+              <a:t>12/08/2026</a:t>
             </a:fld>
             <a:endParaRPr lang="en-GB"/>
           </a:p>
@@ -11207,7 +11363,7 @@
           <a:p>
             <a:fld id="{97B33207-BA23-4F25-9AB9-C0CEEC03B0F6}" type="datetimeFigureOut">
               <a:rPr lang="en-GB" smtClean="0"/>
-              <a:t>04/01/2023</a:t>
+              <a:t>12/08/2026</a:t>
             </a:fld>
             <a:endParaRPr lang="en-GB"/>
           </a:p>
@@ -11420,7 +11576,7 @@
           <a:p>
             <a:fld id="{97B33207-BA23-4F25-9AB9-C0CEEC03B0F6}" type="datetimeFigureOut">
               <a:rPr lang="en-GB" smtClean="0"/>
-              <a:t>04/01/2023</a:t>
+              <a:t>12/08/2026</a:t>
             </a:fld>
             <a:endParaRPr lang="en-GB"/>
           </a:p>
@@ -11840,7 +11996,7 @@
           <p:nvPr/>
         </p:nvPicPr>
         <p:blipFill>
-          <a:blip r:embed="rId2">
+          <a:blip r:embed="rId3">
             <a:extLst>
               <a:ext uri="{28A0092B-C50C-407E-A947-70E740481C1C}">
                 <a14:useLocalDpi xmlns:a14="http://schemas.microsoft.com/office/drawing/2010/main" val="0"/>
@@ -11876,7 +12032,7 @@
           <p:nvPr/>
         </p:nvPicPr>
         <p:blipFill>
-          <a:blip r:embed="rId3">
+          <a:blip r:embed="rId4">
             <a:extLst>
               <a:ext uri="{28A0092B-C50C-407E-A947-70E740481C1C}">
                 <a14:useLocalDpi xmlns:a14="http://schemas.microsoft.com/office/drawing/2010/main" val="0"/>
@@ -11977,7 +12133,7 @@
           <p:nvPr/>
         </p:nvPicPr>
         <p:blipFill>
-          <a:blip r:embed="rId4" cstate="print">
+          <a:blip r:embed="rId5" cstate="print">
             <a:extLst>
               <a:ext uri="{28A0092B-C50C-407E-A947-70E740481C1C}">
                 <a14:useLocalDpi xmlns:a14="http://schemas.microsoft.com/office/drawing/2010/main" val="0"/>
@@ -12007,7 +12163,7 @@
           <p:nvPr/>
         </p:nvPicPr>
         <p:blipFill>
-          <a:blip r:embed="rId5">
+          <a:blip r:embed="rId6">
             <a:extLst>
               <a:ext uri="{28A0092B-C50C-407E-A947-70E740481C1C}">
                 <a14:useLocalDpi xmlns:a14="http://schemas.microsoft.com/office/drawing/2010/main" val="0"/>
@@ -12048,7 +12204,7 @@
           <p:nvPr/>
         </p:nvPicPr>
         <p:blipFill>
-          <a:blip r:embed="rId6"/>
+          <a:blip r:embed="rId7"/>
           <a:stretch>
             <a:fillRect/>
           </a:stretch>
@@ -12135,13 +12291,6 @@
   <p:clrMapOvr>
     <a:masterClrMapping/>
   </p:clrMapOvr>
-  <p:timing>
-    <p:tnLst>
-      <p:par>
-        <p:cTn id="1" dur="indefinite" restart="never" nodeType="tmRoot"/>
-      </p:par>
-    </p:tnLst>
-  </p:timing>
 </p:sld>
 </file>
 
@@ -12441,7 +12590,7 @@
         </p:blipFill>
         <p:spPr>
           <a:xfrm>
-            <a:off x="1304465" y="920975"/>
+            <a:off x="1470719" y="920975"/>
             <a:ext cx="8564170" cy="4334480"/>
           </a:xfrm>
           <a:prstGeom prst="rect">
@@ -12483,13 +12632,6 @@
   <p:clrMapOvr>
     <a:masterClrMapping/>
   </p:clrMapOvr>
-  <p:timing>
-    <p:tnLst>
-      <p:par>
-        <p:cTn id="1" dur="indefinite" restart="never" nodeType="tmRoot"/>
-      </p:par>
-    </p:tnLst>
-  </p:timing>
 </p:sld>
 </file>
 
@@ -12891,13 +13033,6 @@
   <p:clrMapOvr>
     <a:masterClrMapping/>
   </p:clrMapOvr>
-  <p:timing>
-    <p:tnLst>
-      <p:par>
-        <p:cTn id="1" dur="indefinite" restart="never" nodeType="tmRoot"/>
-      </p:par>
-    </p:tnLst>
-  </p:timing>
 </p:sld>
 </file>
 
@@ -12947,26 +13082,17 @@
               </a:rPr>
               <a:t>IPv4 Issues</a:t>
             </a:r>
-            <a:r>
-              <a:rPr lang="en-US" dirty="0">
-                <a:latin typeface="Arial" charset="0"/>
-              </a:rPr>
-              <a:t/>
-            </a:r>
             <a:br>
               <a:rPr lang="en-US" dirty="0">
                 <a:latin typeface="Arial" charset="0"/>
               </a:rPr>
             </a:br>
             <a:r>
-              <a:rPr lang="en-US" dirty="0" smtClean="0">
+              <a:rPr lang="en-US" dirty="0">
                 <a:latin typeface="Arial" charset="0"/>
               </a:rPr>
               <a:t>IPv4 and IPv6 Coexistence</a:t>
             </a:r>
-            <a:endParaRPr lang="en-US" dirty="0">
-              <a:latin typeface="Arial" charset="0"/>
-            </a:endParaRPr>
           </a:p>
         </p:txBody>
       </p:sp>
@@ -13188,26 +13314,17 @@
               </a:rPr>
               <a:t>IPv4 Issues</a:t>
             </a:r>
-            <a:r>
-              <a:rPr lang="en-US" dirty="0">
-                <a:latin typeface="Arial" charset="0"/>
-              </a:rPr>
-              <a:t/>
-            </a:r>
             <a:br>
               <a:rPr lang="en-US" dirty="0">
                 <a:latin typeface="Arial" charset="0"/>
               </a:rPr>
             </a:br>
             <a:r>
-              <a:rPr lang="en-US" dirty="0" smtClean="0">
+              <a:rPr lang="en-US" dirty="0">
                 <a:latin typeface="Arial" charset="0"/>
               </a:rPr>
               <a:t>IPv4 and IPv6 Coexistence (cont.)</a:t>
             </a:r>
-            <a:endParaRPr lang="en-US" dirty="0">
-              <a:latin typeface="Arial" charset="0"/>
-            </a:endParaRPr>
           </a:p>
         </p:txBody>
       </p:sp>
@@ -13386,26 +13503,17 @@
               </a:rPr>
               <a:t>IPv4 Issues</a:t>
             </a:r>
-            <a:r>
-              <a:rPr lang="en-US" dirty="0">
-                <a:latin typeface="Arial" charset="0"/>
-              </a:rPr>
-              <a:t/>
-            </a:r>
             <a:br>
               <a:rPr lang="en-US" dirty="0">
                 <a:latin typeface="Arial" charset="0"/>
               </a:rPr>
             </a:br>
             <a:r>
-              <a:rPr lang="en-US" dirty="0" smtClean="0">
+              <a:rPr lang="en-US" dirty="0">
                 <a:latin typeface="Arial" charset="0"/>
               </a:rPr>
               <a:t>IPv4 and IPv6 Coexistence (cont.)</a:t>
             </a:r>
-            <a:endParaRPr lang="en-US" dirty="0">
-              <a:latin typeface="Arial" charset="0"/>
-            </a:endParaRPr>
           </a:p>
         </p:txBody>
       </p:sp>
@@ -13581,26 +13689,17 @@
               </a:rPr>
               <a:t>Types of IPv6 Addresses</a:t>
             </a:r>
-            <a:r>
-              <a:rPr lang="en-US" dirty="0">
-                <a:latin typeface="Arial" charset="0"/>
-              </a:rPr>
-              <a:t/>
-            </a:r>
             <a:br>
               <a:rPr lang="en-US" dirty="0">
                 <a:latin typeface="Arial" charset="0"/>
               </a:rPr>
             </a:br>
             <a:r>
-              <a:rPr lang="en-US" dirty="0" smtClean="0">
+              <a:rPr lang="en-US" dirty="0">
                 <a:latin typeface="Arial" charset="0"/>
               </a:rPr>
               <a:t>IPv6 Prefix Length</a:t>
             </a:r>
-            <a:endParaRPr lang="en-US" dirty="0">
-              <a:latin typeface="Arial" charset="0"/>
-            </a:endParaRPr>
           </a:p>
         </p:txBody>
       </p:sp>
@@ -13641,7 +13740,7 @@
               <a:buChar char="§"/>
             </a:pPr>
             <a:r>
-              <a:rPr lang="en-US" dirty="0" smtClean="0"/>
+              <a:rPr lang="en-US" dirty="0"/>
               <a:t>IPv6 address/prefix length</a:t>
             </a:r>
           </a:p>
@@ -13652,11 +13751,7 @@
             </a:pPr>
             <a:r>
               <a:rPr lang="en-US" dirty="0"/>
-              <a:t>P</a:t>
-            </a:r>
-            <a:r>
-              <a:rPr lang="en-US" dirty="0" smtClean="0"/>
-              <a:t>refix length can range from 0 to 128</a:t>
+              <a:t>Prefix length can range from 0 to 128</a:t>
             </a:r>
           </a:p>
           <a:p>
@@ -13665,7 +13760,7 @@
               <a:buChar char="§"/>
             </a:pPr>
             <a:r>
-              <a:rPr lang="en-US" dirty="0" smtClean="0"/>
+              <a:rPr lang="en-US" dirty="0"/>
               <a:t>Typical prefix length is /64</a:t>
             </a:r>
           </a:p>
@@ -13841,26 +13936,17 @@
               </a:rPr>
               <a:t>Types of IPv6 Addresses</a:t>
             </a:r>
-            <a:r>
-              <a:rPr lang="en-US" dirty="0">
-                <a:latin typeface="Arial" charset="0"/>
-              </a:rPr>
-              <a:t/>
-            </a:r>
             <a:br>
               <a:rPr lang="en-US" dirty="0">
                 <a:latin typeface="Arial" charset="0"/>
               </a:rPr>
             </a:br>
             <a:r>
-              <a:rPr lang="en-US" dirty="0" smtClean="0">
+              <a:rPr lang="en-US" dirty="0">
                 <a:latin typeface="Arial" charset="0"/>
               </a:rPr>
               <a:t>IPv6 Address Types</a:t>
             </a:r>
-            <a:endParaRPr lang="en-US" dirty="0">
-              <a:latin typeface="Arial" charset="0"/>
-            </a:endParaRPr>
           </a:p>
         </p:txBody>
       </p:sp>
@@ -14025,12 +14111,6 @@
               </a:rPr>
               <a:t>Types of IPv6 Addresses</a:t>
             </a:r>
-            <a:r>
-              <a:rPr lang="en-US" dirty="0">
-                <a:latin typeface="Arial" charset="0"/>
-              </a:rPr>
-              <a:t/>
-            </a:r>
             <a:br>
               <a:rPr lang="en-US" dirty="0">
                 <a:latin typeface="Arial" charset="0"/>
@@ -14040,17 +14120,8 @@
               <a:rPr lang="en-US" dirty="0">
                 <a:latin typeface="Arial" charset="0"/>
               </a:rPr>
-              <a:t>IPv6 </a:t>
-            </a:r>
-            <a:r>
-              <a:rPr lang="en-US" dirty="0" smtClean="0">
-                <a:latin typeface="Arial" charset="0"/>
-              </a:rPr>
-              <a:t>Unicast Addresses</a:t>
-            </a:r>
-            <a:endParaRPr lang="en-US" dirty="0">
-              <a:latin typeface="Arial" charset="0"/>
-            </a:endParaRPr>
+              <a:t>IPv6 Unicast Addresses</a:t>
+            </a:r>
           </a:p>
         </p:txBody>
       </p:sp>
@@ -14080,16 +14151,12 @@
               <a:buNone/>
             </a:pPr>
             <a:r>
-              <a:rPr lang="en-US" b="1" dirty="0" smtClean="0"/>
+              <a:rPr lang="en-US" b="1" dirty="0"/>
               <a:t>Unicast</a:t>
             </a:r>
             <a:r>
               <a:rPr lang="en-US" dirty="0"/>
-              <a:t> </a:t>
-            </a:r>
-            <a:r>
-              <a:rPr lang="en-US" dirty="0" smtClean="0"/>
-              <a:t> </a:t>
+              <a:t>  </a:t>
             </a:r>
           </a:p>
           <a:p>
@@ -14099,19 +14166,7 @@
             </a:pPr>
             <a:r>
               <a:rPr lang="en-US" dirty="0"/>
-              <a:t>U</a:t>
-            </a:r>
-            <a:r>
-              <a:rPr lang="en-US" dirty="0" smtClean="0"/>
-              <a:t>niquely </a:t>
-            </a:r>
-            <a:r>
-              <a:rPr lang="en-US" dirty="0"/>
-              <a:t>identifies an interface on an IPv6-enabled </a:t>
-            </a:r>
-            <a:r>
-              <a:rPr lang="en-US" dirty="0" smtClean="0"/>
-              <a:t>device.</a:t>
+              <a:t>Uniquely identifies an interface on an IPv6-enabled device.</a:t>
             </a:r>
           </a:p>
           <a:p>
@@ -14120,16 +14175,8 @@
               <a:buChar char="§"/>
             </a:pPr>
             <a:r>
-              <a:rPr lang="en-US" dirty="0" smtClean="0"/>
-              <a:t>A </a:t>
-            </a:r>
-            <a:r>
               <a:rPr lang="en-US" dirty="0"/>
-              <a:t>packet sent to a unicast address is received by the interface that is assigned that address. </a:t>
-            </a:r>
-            <a:r>
-              <a:rPr lang="en-US" dirty="0" smtClean="0"/>
-              <a:t> </a:t>
+              <a:t>A packet sent to a unicast address is received by the interface that is assigned that address.  </a:t>
             </a:r>
           </a:p>
           <a:p>
@@ -14140,19 +14187,19 @@
             <a:endParaRPr lang="en-US" dirty="0"/>
           </a:p>
           <a:p>
-            <a:endParaRPr lang="en-US" dirty="0" smtClean="0"/>
-          </a:p>
-          <a:p>
             <a:endParaRPr lang="en-US" dirty="0"/>
           </a:p>
           <a:p>
-            <a:endParaRPr lang="en-US" b="1" dirty="0" smtClean="0"/>
+            <a:endParaRPr lang="en-US" dirty="0"/>
           </a:p>
           <a:p>
             <a:endParaRPr lang="en-US" b="1" dirty="0"/>
           </a:p>
           <a:p>
-            <a:endParaRPr lang="en-US" b="1" dirty="0" smtClean="0"/>
+            <a:endParaRPr lang="en-US" b="1" dirty="0"/>
+          </a:p>
+          <a:p>
+            <a:endParaRPr lang="en-US" b="1" dirty="0"/>
           </a:p>
           <a:p>
             <a:endParaRPr lang="en-US" b="1" dirty="0"/>
@@ -14283,12 +14330,6 @@
               </a:rPr>
               <a:t>Types of IPv6 Addresses</a:t>
             </a:r>
-            <a:r>
-              <a:rPr lang="en-US" dirty="0">
-                <a:latin typeface="Arial" charset="0"/>
-              </a:rPr>
-              <a:t/>
-            </a:r>
             <a:br>
               <a:rPr lang="en-US" dirty="0">
                 <a:latin typeface="Arial" charset="0"/>
@@ -14298,17 +14339,8 @@
               <a:rPr lang="en-US" dirty="0">
                 <a:latin typeface="Arial" charset="0"/>
               </a:rPr>
-              <a:t>IPv6 </a:t>
-            </a:r>
-            <a:r>
-              <a:rPr lang="en-US" dirty="0" smtClean="0">
-                <a:latin typeface="Arial" charset="0"/>
-              </a:rPr>
-              <a:t>Unicast Addresses (cont.)</a:t>
-            </a:r>
-            <a:endParaRPr lang="en-US" dirty="0">
-              <a:latin typeface="Arial" charset="0"/>
-            </a:endParaRPr>
+              <a:t>IPv6 Unicast Addresses (cont.)</a:t>
+            </a:r>
           </a:p>
         </p:txBody>
       </p:sp>
@@ -14423,26 +14455,17 @@
               </a:rPr>
               <a:t>Types of IPv6 Addresses</a:t>
             </a:r>
-            <a:r>
-              <a:rPr lang="en-US" dirty="0">
-                <a:latin typeface="Arial" charset="0"/>
-              </a:rPr>
-              <a:t/>
-            </a:r>
             <a:br>
               <a:rPr lang="en-US" dirty="0">
                 <a:latin typeface="Arial" charset="0"/>
               </a:rPr>
             </a:br>
             <a:r>
-              <a:rPr lang="en-US" dirty="0" smtClean="0">
+              <a:rPr lang="en-US" dirty="0">
                 <a:latin typeface="Arial" charset="0"/>
               </a:rPr>
               <a:t>IPv6 Unicast Addresses (cont.)</a:t>
             </a:r>
-            <a:endParaRPr lang="en-US" dirty="0">
-              <a:latin typeface="Arial" charset="0"/>
-            </a:endParaRPr>
           </a:p>
         </p:txBody>
       </p:sp>
@@ -14482,19 +14505,7 @@
             </a:pPr>
             <a:r>
               <a:rPr lang="en-US" dirty="0"/>
-              <a:t>S</a:t>
-            </a:r>
-            <a:r>
-              <a:rPr lang="en-US" dirty="0" smtClean="0"/>
-              <a:t>imilar </a:t>
-            </a:r>
-            <a:r>
-              <a:rPr lang="en-US" dirty="0"/>
-              <a:t>to a public IPv4 </a:t>
-            </a:r>
-            <a:r>
-              <a:rPr lang="en-US" dirty="0" smtClean="0"/>
-              <a:t>address</a:t>
+              <a:t>Similar to a public IPv4 address</a:t>
             </a:r>
           </a:p>
           <a:p>
@@ -14504,11 +14515,7 @@
             </a:pPr>
             <a:r>
               <a:rPr lang="en-US" dirty="0"/>
-              <a:t>G</a:t>
-            </a:r>
-            <a:r>
-              <a:rPr lang="en-US" dirty="0" smtClean="0"/>
-              <a:t>lobally unique</a:t>
+              <a:t>Globally unique</a:t>
             </a:r>
           </a:p>
           <a:p>
@@ -14517,16 +14524,8 @@
               <a:buChar char="§"/>
             </a:pPr>
             <a:r>
-              <a:rPr lang="en-US" dirty="0" smtClean="0"/>
-              <a:t>Internet </a:t>
-            </a:r>
-            <a:r>
               <a:rPr lang="en-US" dirty="0"/>
-              <a:t>routable </a:t>
-            </a:r>
-            <a:r>
-              <a:rPr lang="en-US" dirty="0" smtClean="0"/>
-              <a:t>addresses</a:t>
+              <a:t>Internet routable addresses</a:t>
             </a:r>
           </a:p>
           <a:p>
@@ -14535,16 +14534,8 @@
               <a:buChar char="§"/>
             </a:pPr>
             <a:r>
-              <a:rPr lang="en-US" dirty="0" smtClean="0"/>
-              <a:t>Can </a:t>
-            </a:r>
-            <a:r>
               <a:rPr lang="en-US" dirty="0"/>
-              <a:t>be configured statically or assigned </a:t>
-            </a:r>
-            <a:r>
-              <a:rPr lang="en-US" dirty="0" smtClean="0"/>
-              <a:t>dynamically </a:t>
+              <a:t>Can be configured statically or assigned dynamically </a:t>
             </a:r>
           </a:p>
           <a:p>
@@ -14563,16 +14554,8 @@
               <a:buChar char="§"/>
             </a:pPr>
             <a:r>
-              <a:rPr lang="en-US" dirty="0" smtClean="0"/>
-              <a:t>Used </a:t>
-            </a:r>
-            <a:r>
               <a:rPr lang="en-US" dirty="0"/>
-              <a:t>to communicate with other devices on the same local </a:t>
-            </a:r>
-            <a:r>
-              <a:rPr lang="en-US" dirty="0" smtClean="0"/>
-              <a:t>link</a:t>
+              <a:t>Used to communicate with other devices on the same local link</a:t>
             </a:r>
           </a:p>
           <a:p>
@@ -14581,24 +14564,8 @@
               <a:buChar char="§"/>
             </a:pPr>
             <a:r>
-              <a:rPr lang="en-US" dirty="0" smtClean="0"/>
-              <a:t>Confined </a:t>
-            </a:r>
-            <a:r>
               <a:rPr lang="en-US" dirty="0"/>
-              <a:t>to a single </a:t>
-            </a:r>
-            <a:r>
-              <a:rPr lang="en-US" dirty="0" smtClean="0"/>
-              <a:t>link;  not </a:t>
-            </a:r>
-            <a:r>
-              <a:rPr lang="en-US" dirty="0"/>
-              <a:t>routable beyond the </a:t>
-            </a:r>
-            <a:r>
-              <a:rPr lang="en-US" dirty="0" smtClean="0"/>
-              <a:t>link</a:t>
+              <a:t>Confined to a single link;  not routable beyond the link</a:t>
             </a:r>
           </a:p>
         </p:txBody>
@@ -14913,13 +14880,6 @@
   <p:clrMapOvr>
     <a:masterClrMapping/>
   </p:clrMapOvr>
-  <p:timing>
-    <p:tnLst>
-      <p:par>
-        <p:cTn id="1" dur="indefinite" restart="never" nodeType="tmRoot"/>
-      </p:par>
-    </p:tnLst>
-  </p:timing>
 </p:sld>
 </file>
 
@@ -14969,26 +14929,17 @@
               </a:rPr>
               <a:t>Types of IPv6 Addresses</a:t>
             </a:r>
-            <a:r>
-              <a:rPr lang="en-US" dirty="0">
-                <a:latin typeface="Arial" charset="0"/>
-              </a:rPr>
-              <a:t/>
-            </a:r>
             <a:br>
               <a:rPr lang="en-US" dirty="0">
                 <a:latin typeface="Arial" charset="0"/>
               </a:rPr>
             </a:br>
             <a:r>
-              <a:rPr lang="en-US" dirty="0" smtClean="0">
+              <a:rPr lang="en-US" dirty="0">
                 <a:latin typeface="Arial" charset="0"/>
               </a:rPr>
               <a:t>IPv6 Unicast Addresses (cont.)</a:t>
             </a:r>
-            <a:endParaRPr lang="en-US" dirty="0">
-              <a:latin typeface="Arial" charset="0"/>
-            </a:endParaRPr>
           </a:p>
         </p:txBody>
       </p:sp>
@@ -15028,16 +14979,8 @@
               <a:buChar char="§"/>
             </a:pPr>
             <a:r>
-              <a:rPr lang="en-US" dirty="0" smtClean="0"/>
-              <a:t>Used </a:t>
-            </a:r>
-            <a:r>
               <a:rPr lang="en-US" dirty="0"/>
-              <a:t>by a host to send a packet to itself and cannot be assigned to a physical </a:t>
-            </a:r>
-            <a:r>
-              <a:rPr lang="en-US" dirty="0" smtClean="0"/>
-              <a:t>interface.</a:t>
+              <a:t>Used by a host to send a packet to itself and cannot be assigned to a physical interface.</a:t>
             </a:r>
           </a:p>
           <a:p>
@@ -15047,19 +14990,7 @@
             </a:pPr>
             <a:r>
               <a:rPr lang="en-US" dirty="0"/>
-              <a:t>P</a:t>
-            </a:r>
-            <a:r>
-              <a:rPr lang="en-US" dirty="0" smtClean="0"/>
-              <a:t>ing </a:t>
-            </a:r>
-            <a:r>
-              <a:rPr lang="en-US" dirty="0"/>
-              <a:t>an IPv6 loopback address to test the configuration of TCP/IP on the local </a:t>
-            </a:r>
-            <a:r>
-              <a:rPr lang="en-US" dirty="0" smtClean="0"/>
-              <a:t>host.</a:t>
+              <a:t>Ping an IPv6 loopback address to test the configuration of TCP/IP on the local host.</a:t>
             </a:r>
           </a:p>
           <a:p>
@@ -15069,21 +15000,8 @@
             </a:pPr>
             <a:r>
               <a:rPr lang="en-US" dirty="0"/>
-              <a:t>A</a:t>
-            </a:r>
-            <a:r>
-              <a:rPr lang="en-US" dirty="0" smtClean="0"/>
-              <a:t>ll-0s </a:t>
-            </a:r>
-            <a:r>
-              <a:rPr lang="en-US" dirty="0"/>
-              <a:t>except for the last bit, represented as ::1/128 or just ::</a:t>
-            </a:r>
-            <a:r>
-              <a:rPr lang="en-US" dirty="0" smtClean="0"/>
-              <a:t>1.</a:t>
-            </a:r>
-            <a:endParaRPr lang="en-US" dirty="0"/>
+              <a:t>All-0s except for the last bit, represented as ::1/128 or just ::1.</a:t>
+            </a:r>
           </a:p>
           <a:p>
             <a:pPr>
@@ -15100,24 +15018,8 @@
               <a:buChar char="§"/>
             </a:pPr>
             <a:r>
-              <a:rPr lang="en-US" dirty="0" smtClean="0"/>
-              <a:t>All-0’s </a:t>
-            </a:r>
-            <a:r>
               <a:rPr lang="en-US" dirty="0"/>
-              <a:t>address represented </a:t>
-            </a:r>
-            <a:r>
-              <a:rPr lang="en-US" dirty="0" smtClean="0"/>
-              <a:t>as </a:t>
-            </a:r>
-            <a:r>
-              <a:rPr lang="en-US" dirty="0"/>
-              <a:t>::/128 or just </a:t>
-            </a:r>
-            <a:r>
-              <a:rPr lang="en-US" dirty="0" smtClean="0"/>
-              <a:t>:: </a:t>
+              <a:t>All-0’s address represented as ::/128 or just :: </a:t>
             </a:r>
           </a:p>
           <a:p>
@@ -15127,27 +15029,7 @@
             </a:pPr>
             <a:r>
               <a:rPr lang="en-US" dirty="0"/>
-              <a:t>C</a:t>
-            </a:r>
-            <a:r>
-              <a:rPr lang="en-US" dirty="0" smtClean="0"/>
-              <a:t>annot </a:t>
-            </a:r>
-            <a:r>
-              <a:rPr lang="en-US" dirty="0"/>
-              <a:t>be assigned to an interface and is </a:t>
-            </a:r>
-            <a:r>
-              <a:rPr lang="en-US" dirty="0" smtClean="0"/>
-              <a:t>only used </a:t>
-            </a:r>
-            <a:r>
-              <a:rPr lang="en-US" dirty="0"/>
-              <a:t>as a source </a:t>
-            </a:r>
-            <a:r>
-              <a:rPr lang="en-US" dirty="0" smtClean="0"/>
-              <a:t>address.</a:t>
+              <a:t>Cannot be assigned to an interface and is only used as a source address.</a:t>
             </a:r>
           </a:p>
           <a:p>
@@ -15156,18 +15038,9 @@
               <a:buChar char="§"/>
             </a:pPr>
             <a:r>
-              <a:rPr lang="en-US" dirty="0" smtClean="0"/>
-              <a:t>An </a:t>
-            </a:r>
-            <a:r>
               <a:rPr lang="en-US" dirty="0"/>
-              <a:t>unspecified address is used as a source address when the device does not yet have a permanent IPv6 address or when the source of the packet is irrelevant to the </a:t>
-            </a:r>
-            <a:r>
-              <a:rPr lang="en-US" dirty="0" smtClean="0"/>
-              <a:t>destination.</a:t>
-            </a:r>
-            <a:endParaRPr lang="en-US" dirty="0"/>
+              <a:t>An unspecified address is used as a source address when the device does not yet have a permanent IPv6 address or when the source of the packet is irrelevant to the destination.</a:t>
+            </a:r>
           </a:p>
         </p:txBody>
       </p:sp>
@@ -15233,26 +15106,17 @@
               </a:rPr>
               <a:t>Types of IPv6 Addresses</a:t>
             </a:r>
-            <a:r>
-              <a:rPr lang="en-US" dirty="0">
-                <a:latin typeface="Arial" charset="0"/>
-              </a:rPr>
-              <a:t/>
-            </a:r>
             <a:br>
               <a:rPr lang="en-US" dirty="0">
                 <a:latin typeface="Arial" charset="0"/>
               </a:rPr>
             </a:br>
             <a:r>
-              <a:rPr lang="en-US" dirty="0" smtClean="0">
+              <a:rPr lang="en-US" dirty="0">
                 <a:latin typeface="Arial" charset="0"/>
               </a:rPr>
               <a:t>IPv6 Unicast Addresses (cont.)</a:t>
             </a:r>
-            <a:endParaRPr lang="en-US" dirty="0">
-              <a:latin typeface="Arial" charset="0"/>
-            </a:endParaRPr>
           </a:p>
         </p:txBody>
       </p:sp>
@@ -15291,16 +15155,8 @@
               <a:buChar char="§"/>
             </a:pPr>
             <a:r>
-              <a:rPr lang="en-US" dirty="0" smtClean="0"/>
-              <a:t>Similar to private </a:t>
-            </a:r>
-            <a:r>
               <a:rPr lang="en-US" dirty="0"/>
-              <a:t>addresses for </a:t>
-            </a:r>
-            <a:r>
-              <a:rPr lang="en-US" dirty="0" smtClean="0"/>
-              <a:t>IPv4.</a:t>
+              <a:t>Similar to private addresses for IPv4.</a:t>
             </a:r>
           </a:p>
           <a:p>
@@ -15310,19 +15166,7 @@
             </a:pPr>
             <a:r>
               <a:rPr lang="en-US" dirty="0"/>
-              <a:t>U</a:t>
-            </a:r>
-            <a:r>
-              <a:rPr lang="en-US" dirty="0" smtClean="0"/>
-              <a:t>sed </a:t>
-            </a:r>
-            <a:r>
-              <a:rPr lang="en-US" dirty="0"/>
-              <a:t>for local addressing within a site or between a limited number of </a:t>
-            </a:r>
-            <a:r>
-              <a:rPr lang="en-US" dirty="0" smtClean="0"/>
-              <a:t>sites.</a:t>
+              <a:t>Used for local addressing within a site or between a limited number of sites.</a:t>
             </a:r>
           </a:p>
           <a:p>
@@ -15332,21 +15176,8 @@
             </a:pPr>
             <a:r>
               <a:rPr lang="en-US" dirty="0"/>
-              <a:t>I</a:t>
-            </a:r>
-            <a:r>
-              <a:rPr lang="en-US" dirty="0" smtClean="0"/>
-              <a:t>n </a:t>
-            </a:r>
-            <a:r>
-              <a:rPr lang="en-US" dirty="0"/>
-              <a:t>the range of FC00::/7 to FDFF::/</a:t>
-            </a:r>
-            <a:r>
-              <a:rPr lang="en-US" dirty="0" smtClean="0"/>
-              <a:t>7.</a:t>
-            </a:r>
-            <a:endParaRPr lang="en-US" dirty="0"/>
+              <a:t>In the range of FC00::/7 to FDFF::/7.</a:t>
+            </a:r>
           </a:p>
           <a:p>
             <a:pPr marL="0" indent="0">
@@ -15364,16 +15195,8 @@
               <a:buChar char="§"/>
             </a:pPr>
             <a:r>
-              <a:rPr lang="en-US" dirty="0" smtClean="0"/>
-              <a:t>Used </a:t>
-            </a:r>
-            <a:r>
               <a:rPr lang="en-US" dirty="0"/>
-              <a:t>to help transition from IPv4 to </a:t>
-            </a:r>
-            <a:r>
-              <a:rPr lang="en-US" dirty="0" smtClean="0"/>
-              <a:t>IPv6.</a:t>
+              <a:t>Used to help transition from IPv4 to IPv6.</a:t>
             </a:r>
             <a:endParaRPr lang="en-US" dirty="0">
               <a:effectLst/>
@@ -15443,26 +15266,17 @@
               </a:rPr>
               <a:t>Types of IPv6 Addresses</a:t>
             </a:r>
-            <a:r>
-              <a:rPr lang="en-US" dirty="0">
-                <a:latin typeface="Arial" charset="0"/>
-              </a:rPr>
-              <a:t/>
-            </a:r>
             <a:br>
               <a:rPr lang="en-US" dirty="0">
                 <a:latin typeface="Arial" charset="0"/>
               </a:rPr>
             </a:br>
             <a:r>
-              <a:rPr lang="en-US" dirty="0" smtClean="0">
+              <a:rPr lang="en-US" dirty="0">
                 <a:latin typeface="Arial" charset="0"/>
               </a:rPr>
               <a:t>IPv6 Link-Local Unicast Addresses</a:t>
             </a:r>
-            <a:endParaRPr lang="en-US" dirty="0">
-              <a:latin typeface="Arial" charset="0"/>
-            </a:endParaRPr>
           </a:p>
         </p:txBody>
       </p:sp>
@@ -15700,26 +15514,17 @@
               </a:rPr>
               <a:t>Types of IPv6 Addresses</a:t>
             </a:r>
-            <a:r>
-              <a:rPr lang="en-US" dirty="0">
-                <a:latin typeface="Arial" charset="0"/>
-              </a:rPr>
-              <a:t/>
-            </a:r>
             <a:br>
               <a:rPr lang="en-US" dirty="0">
                 <a:latin typeface="Arial" charset="0"/>
               </a:rPr>
             </a:br>
             <a:r>
-              <a:rPr lang="en-US" dirty="0" smtClean="0">
+              <a:rPr lang="en-US" dirty="0">
                 <a:latin typeface="Arial" charset="0"/>
               </a:rPr>
               <a:t>IPv6 Link-Local Unicast Addresses (cont.)</a:t>
             </a:r>
-            <a:endParaRPr lang="en-US" dirty="0">
-              <a:latin typeface="Arial" charset="0"/>
-            </a:endParaRPr>
           </a:p>
         </p:txBody>
       </p:sp>
@@ -15867,12 +15672,6 @@
               </a:rPr>
               <a:t>IPv6 Unicast Addresses</a:t>
             </a:r>
-            <a:r>
-              <a:rPr lang="en-US" dirty="0">
-                <a:latin typeface="Arial" charset="0"/>
-              </a:rPr>
-              <a:t/>
-            </a:r>
             <a:br>
               <a:rPr lang="en-US" dirty="0">
                 <a:latin typeface="Arial" charset="0"/>
@@ -15926,15 +15725,15 @@
           </a:p>
           <a:p>
             <a:r>
-              <a:rPr lang="en-US" dirty="0" smtClean="0"/>
+              <a:rPr lang="en-US" dirty="0"/>
               <a:t>Currently, only global </a:t>
             </a:r>
             <a:r>
-              <a:rPr lang="en-US" dirty="0" err="1" smtClean="0"/>
+              <a:rPr lang="en-US" dirty="0" err="1"/>
               <a:t>unicast</a:t>
             </a:r>
             <a:r>
-              <a:rPr lang="en-US" dirty="0" smtClean="0"/>
+              <a:rPr lang="en-US" dirty="0"/>
               <a:t> addresses with the first three bits of 001 or 2000::/3 are being assigned</a:t>
             </a:r>
           </a:p>
@@ -16054,12 +15853,6 @@
               </a:rPr>
               <a:t>IPv6 Unicast Addresses</a:t>
             </a:r>
-            <a:r>
-              <a:rPr lang="en-US" dirty="0">
-                <a:latin typeface="Arial" charset="0"/>
-              </a:rPr>
-              <a:t/>
-            </a:r>
             <a:br>
               <a:rPr lang="en-US" dirty="0">
                 <a:latin typeface="Arial" charset="0"/>
@@ -16360,12 +16153,6 @@
               </a:rPr>
               <a:t>IPv6 Unicast Addresses</a:t>
             </a:r>
-            <a:r>
-              <a:rPr lang="en-US" dirty="0">
-                <a:latin typeface="Arial" charset="0"/>
-              </a:rPr>
-              <a:t/>
-            </a:r>
             <a:br>
               <a:rPr lang="en-US" dirty="0">
                 <a:latin typeface="Arial" charset="0"/>
@@ -16423,19 +16210,7 @@
             </a:pPr>
             <a:r>
               <a:rPr lang="en-US" dirty="0"/>
-              <a:t>E</a:t>
-            </a:r>
-            <a:r>
-              <a:rPr lang="en-US" dirty="0" smtClean="0"/>
-              <a:t>quivalent </a:t>
-            </a:r>
-            <a:r>
-              <a:rPr lang="en-US" dirty="0"/>
-              <a:t>to the host portion of an IPv4 </a:t>
-            </a:r>
-            <a:r>
-              <a:rPr lang="en-US" dirty="0" smtClean="0"/>
-              <a:t>address.</a:t>
+              <a:t>Equivalent to the host portion of an IPv4 address.</a:t>
             </a:r>
           </a:p>
           <a:p>
@@ -16444,18 +16219,9 @@
               <a:buChar char="§"/>
             </a:pPr>
             <a:r>
-              <a:rPr lang="en-US" dirty="0" smtClean="0"/>
-              <a:t>Used because </a:t>
-            </a:r>
-            <a:r>
               <a:rPr lang="en-US" dirty="0"/>
-              <a:t>a single host may have multiple interfaces, each having one or more IPv6 </a:t>
-            </a:r>
-            <a:r>
-              <a:rPr lang="en-US" dirty="0" smtClean="0"/>
-              <a:t>addresses.</a:t>
-            </a:r>
-            <a:endParaRPr lang="en-US" dirty="0"/>
+              <a:t>Used because a single host may have multiple interfaces, each having one or more IPv6 addresses.</a:t>
+            </a:r>
           </a:p>
           <a:p>
             <a:pPr marL="0" indent="0">
@@ -16630,12 +16396,6 @@
               </a:rPr>
               <a:t>IPv6 Unicast Addresses</a:t>
             </a:r>
-            <a:r>
-              <a:rPr lang="en-US" dirty="0">
-                <a:latin typeface="Arial" charset="0"/>
-              </a:rPr>
-              <a:t/>
-            </a:r>
             <a:br>
               <a:rPr lang="en-US" dirty="0">
                 <a:latin typeface="Arial" charset="0"/>
@@ -16766,12 +16526,6 @@
               </a:rPr>
               <a:t>IPv6 Unicast Addresses</a:t>
             </a:r>
-            <a:r>
-              <a:rPr lang="en-US" dirty="0">
-                <a:latin typeface="Arial" charset="0"/>
-              </a:rPr>
-              <a:t/>
-            </a:r>
             <a:br>
               <a:rPr lang="en-US" dirty="0">
                 <a:latin typeface="Arial" charset="0"/>
@@ -16916,12 +16670,6 @@
                 <a:latin typeface="Arial" charset="0"/>
               </a:rPr>
               <a:t>IPv6 Unicast Addresses</a:t>
-            </a:r>
-            <a:r>
-              <a:rPr lang="en-US" dirty="0">
-                <a:latin typeface="Arial" charset="0"/>
-              </a:rPr>
-              <a:t/>
             </a:r>
             <a:br>
               <a:rPr lang="en-US" dirty="0">
@@ -17136,7 +16884,7 @@
           <p:nvPr/>
         </p:nvPicPr>
         <p:blipFill>
-          <a:blip r:embed="rId2">
+          <a:blip r:embed="rId3">
             <a:extLst>
               <a:ext uri="{28A0092B-C50C-407E-A947-70E740481C1C}">
                 <a14:useLocalDpi xmlns:a14="http://schemas.microsoft.com/office/drawing/2010/main" val="0"/>
@@ -17172,7 +16920,7 @@
           <p:nvPr/>
         </p:nvPicPr>
         <p:blipFill>
-          <a:blip r:embed="rId3">
+          <a:blip r:embed="rId4">
             <a:extLst>
               <a:ext uri="{28A0092B-C50C-407E-A947-70E740481C1C}">
                 <a14:useLocalDpi xmlns:a14="http://schemas.microsoft.com/office/drawing/2010/main" val="0"/>
@@ -17278,7 +17026,7 @@
           <p:nvPr/>
         </p:nvPicPr>
         <p:blipFill>
-          <a:blip r:embed="rId4" cstate="print">
+          <a:blip r:embed="rId5" cstate="print">
             <a:extLst>
               <a:ext uri="{28A0092B-C50C-407E-A947-70E740481C1C}">
                 <a14:useLocalDpi xmlns:a14="http://schemas.microsoft.com/office/drawing/2010/main" val="0"/>
@@ -17308,7 +17056,7 @@
           <p:nvPr/>
         </p:nvPicPr>
         <p:blipFill>
-          <a:blip r:embed="rId5">
+          <a:blip r:embed="rId6">
             <a:extLst>
               <a:ext uri="{28A0092B-C50C-407E-A947-70E740481C1C}">
                 <a14:useLocalDpi xmlns:a14="http://schemas.microsoft.com/office/drawing/2010/main" val="0"/>
@@ -17349,7 +17097,7 @@
           <p:nvPr/>
         </p:nvPicPr>
         <p:blipFill>
-          <a:blip r:embed="rId6"/>
+          <a:blip r:embed="rId7"/>
           <a:stretch>
             <a:fillRect/>
           </a:stretch>
@@ -17367,30 +17115,6 @@
       <p:pic>
         <p:nvPicPr>
           <p:cNvPr id="2" name="Picture 1"/>
-          <p:cNvPicPr>
-            <a:picLocks noChangeAspect="1"/>
-          </p:cNvPicPr>
-          <p:nvPr/>
-        </p:nvPicPr>
-        <p:blipFill>
-          <a:blip r:embed="rId7"/>
-          <a:stretch>
-            <a:fillRect/>
-          </a:stretch>
-        </p:blipFill>
-        <p:spPr>
-          <a:xfrm>
-            <a:off x="175365" y="1161464"/>
-            <a:ext cx="6414149" cy="2729743"/>
-          </a:xfrm>
-          <a:prstGeom prst="rect">
-            <a:avLst/>
-          </a:prstGeom>
-        </p:spPr>
-      </p:pic>
-      <p:pic>
-        <p:nvPicPr>
-          <p:cNvPr id="3" name="Picture 2"/>
           <p:cNvPicPr>
             <a:picLocks noChangeAspect="1"/>
           </p:cNvPicPr>
@@ -17404,58 +17128,17 @@
         </p:blipFill>
         <p:spPr>
           <a:xfrm>
-            <a:off x="6589514" y="1352428"/>
-            <a:ext cx="5290160" cy="2745006"/>
+            <a:off x="175365" y="1161464"/>
+            <a:ext cx="6414149" cy="2729743"/>
           </a:xfrm>
           <a:prstGeom prst="rect">
             <a:avLst/>
           </a:prstGeom>
         </p:spPr>
       </p:pic>
-      <p:sp>
-        <p:nvSpPr>
-          <p:cNvPr id="4" name="Rectangle 3"/>
-          <p:cNvSpPr/>
-          <p:nvPr/>
-        </p:nvSpPr>
-        <p:spPr>
-          <a:xfrm>
-            <a:off x="7236023" y="792132"/>
-            <a:ext cx="1622560" cy="369332"/>
-          </a:xfrm>
-          <a:prstGeom prst="rect">
-            <a:avLst/>
-          </a:prstGeom>
-        </p:spPr>
-        <p:txBody>
-          <a:bodyPr wrap="none">
-            <a:spAutoFit/>
-          </a:bodyPr>
-          <a:lstStyle/>
-          <a:p>
-            <a:r>
-              <a:rPr lang="en-GB" altLang="ko-KR" dirty="0">
-                <a:solidFill>
-                  <a:srgbClr val="002060"/>
-                </a:solidFill>
-                <a:latin typeface="Lucida Sans" pitchFamily="34" charset="0"/>
-                <a:cs typeface="Times New Roman" pitchFamily="18" charset="0"/>
-              </a:rPr>
-              <a:t>Hexadecimal</a:t>
-            </a:r>
-            <a:endParaRPr lang="ko-KR" altLang="en-US" dirty="0">
-              <a:solidFill>
-                <a:srgbClr val="002060"/>
-              </a:solidFill>
-              <a:latin typeface="Lucida Sans" pitchFamily="34" charset="0"/>
-              <a:cs typeface="Times New Roman" pitchFamily="18" charset="0"/>
-            </a:endParaRPr>
-          </a:p>
-        </p:txBody>
-      </p:sp>
       <p:pic>
         <p:nvPicPr>
-          <p:cNvPr id="6" name="Picture 5"/>
+          <p:cNvPr id="3" name="Picture 2"/>
           <p:cNvPicPr>
             <a:picLocks noChangeAspect="1"/>
           </p:cNvPicPr>
@@ -17469,6 +17152,71 @@
         </p:blipFill>
         <p:spPr>
           <a:xfrm>
+            <a:off x="6589514" y="1352428"/>
+            <a:ext cx="5290160" cy="2745006"/>
+          </a:xfrm>
+          <a:prstGeom prst="rect">
+            <a:avLst/>
+          </a:prstGeom>
+        </p:spPr>
+      </p:pic>
+      <p:sp>
+        <p:nvSpPr>
+          <p:cNvPr id="4" name="Rectangle 3"/>
+          <p:cNvSpPr/>
+          <p:nvPr/>
+        </p:nvSpPr>
+        <p:spPr>
+          <a:xfrm>
+            <a:off x="7236023" y="792132"/>
+            <a:ext cx="1622560" cy="369332"/>
+          </a:xfrm>
+          <a:prstGeom prst="rect">
+            <a:avLst/>
+          </a:prstGeom>
+        </p:spPr>
+        <p:txBody>
+          <a:bodyPr wrap="none">
+            <a:spAutoFit/>
+          </a:bodyPr>
+          <a:lstStyle/>
+          <a:p>
+            <a:r>
+              <a:rPr lang="en-GB" altLang="ko-KR" dirty="0">
+                <a:solidFill>
+                  <a:srgbClr val="002060"/>
+                </a:solidFill>
+                <a:latin typeface="Lucida Sans" pitchFamily="34" charset="0"/>
+                <a:cs typeface="Times New Roman" pitchFamily="18" charset="0"/>
+              </a:rPr>
+              <a:t>Hexadecimal</a:t>
+            </a:r>
+            <a:endParaRPr lang="ko-KR" altLang="en-US" dirty="0">
+              <a:solidFill>
+                <a:srgbClr val="002060"/>
+              </a:solidFill>
+              <a:latin typeface="Lucida Sans" pitchFamily="34" charset="0"/>
+              <a:cs typeface="Times New Roman" pitchFamily="18" charset="0"/>
+            </a:endParaRPr>
+          </a:p>
+        </p:txBody>
+      </p:sp>
+      <p:pic>
+        <p:nvPicPr>
+          <p:cNvPr id="6" name="Picture 5"/>
+          <p:cNvPicPr>
+            <a:picLocks noChangeAspect="1"/>
+          </p:cNvPicPr>
+          <p:nvPr/>
+        </p:nvPicPr>
+        <p:blipFill>
+          <a:blip r:embed="rId10"/>
+          <a:stretch>
+            <a:fillRect/>
+          </a:stretch>
+        </p:blipFill>
+        <p:spPr>
+          <a:xfrm>
             <a:off x="4251500" y="3659745"/>
             <a:ext cx="5524849" cy="2734076"/>
           </a:xfrm>
@@ -17487,13 +17235,6 @@
   <p:clrMapOvr>
     <a:masterClrMapping/>
   </p:clrMapOvr>
-  <p:timing>
-    <p:tnLst>
-      <p:par>
-        <p:cTn id="1" dur="indefinite" restart="never" nodeType="tmRoot"/>
-      </p:par>
-    </p:tnLst>
-  </p:timing>
 </p:sld>
 </file>
 
@@ -17542,12 +17283,6 @@
                 <a:latin typeface="Arial" charset="0"/>
               </a:rPr>
               <a:t>IPv6 Unicast Addresses</a:t>
-            </a:r>
-            <a:r>
-              <a:rPr lang="en-US" dirty="0">
-                <a:latin typeface="Arial" charset="0"/>
-              </a:rPr>
-              <a:t/>
             </a:r>
             <a:br>
               <a:rPr lang="en-US" dirty="0">
@@ -17663,78 +17398,36 @@
           <a:lstStyle/>
           <a:p>
             <a:pPr eaLnBrk="1" hangingPunct="1"/>
-            <a:r>
-              <a:rPr lang="en-US" sz="1800" dirty="0">
-                <a:latin typeface="Arial" charset="0"/>
-              </a:rPr>
-              <a:t/>
-            </a:r>
             <a:br>
               <a:rPr lang="en-US" sz="1800" dirty="0">
                 <a:latin typeface="Arial" charset="0"/>
               </a:rPr>
             </a:br>
-            <a:r>
-              <a:rPr lang="en-US" sz="1800" dirty="0">
-                <a:latin typeface="Arial" charset="0"/>
-              </a:rPr>
-              <a:t/>
-            </a:r>
             <a:br>
               <a:rPr lang="en-US" sz="1800" dirty="0">
                 <a:latin typeface="Arial" charset="0"/>
               </a:rPr>
             </a:br>
-            <a:r>
-              <a:rPr lang="en-US" sz="1800" dirty="0">
-                <a:latin typeface="Arial" charset="0"/>
-              </a:rPr>
-              <a:t/>
-            </a:r>
             <a:br>
               <a:rPr lang="en-US" sz="1800" dirty="0">
                 <a:latin typeface="Arial" charset="0"/>
               </a:rPr>
             </a:br>
-            <a:r>
-              <a:rPr lang="en-US" sz="1800" dirty="0">
-                <a:latin typeface="Arial" charset="0"/>
-              </a:rPr>
-              <a:t/>
-            </a:r>
             <a:br>
               <a:rPr lang="en-US" sz="1800" dirty="0">
                 <a:latin typeface="Arial" charset="0"/>
               </a:rPr>
             </a:br>
-            <a:r>
-              <a:rPr lang="en-US" sz="1800" dirty="0">
-                <a:latin typeface="Arial" charset="0"/>
-              </a:rPr>
-              <a:t/>
-            </a:r>
             <a:br>
               <a:rPr lang="en-US" sz="1800" dirty="0">
                 <a:latin typeface="Arial" charset="0"/>
               </a:rPr>
             </a:br>
-            <a:r>
-              <a:rPr lang="en-US" sz="1800" dirty="0">
-                <a:latin typeface="Arial" charset="0"/>
-              </a:rPr>
-              <a:t/>
-            </a:r>
             <a:br>
               <a:rPr lang="en-US" sz="1800" dirty="0">
                 <a:latin typeface="Arial" charset="0"/>
               </a:rPr>
             </a:br>
-            <a:r>
-              <a:rPr lang="en-US" sz="1800" dirty="0">
-                <a:latin typeface="Arial" charset="0"/>
-              </a:rPr>
-              <a:t/>
-            </a:r>
             <a:br>
               <a:rPr lang="en-US" sz="1800" dirty="0">
                 <a:latin typeface="Arial" charset="0"/>
@@ -17745,12 +17438,6 @@
                 <a:latin typeface="Arial" charset="0"/>
               </a:rPr>
               <a:t>IPv6 Unicast Addresses</a:t>
-            </a:r>
-            <a:r>
-              <a:rPr lang="en-US" dirty="0">
-                <a:latin typeface="Arial" charset="0"/>
-              </a:rPr>
-              <a:t/>
             </a:r>
             <a:br>
               <a:rPr lang="en-US" dirty="0">
@@ -17882,12 +17569,6 @@
               </a:rPr>
               <a:t>IPv6 Unicast Addresses</a:t>
             </a:r>
-            <a:r>
-              <a:rPr lang="en-US" dirty="0">
-                <a:latin typeface="Arial" charset="0"/>
-              </a:rPr>
-              <a:t/>
-            </a:r>
             <a:br>
               <a:rPr lang="en-US" dirty="0">
                 <a:latin typeface="Arial" charset="0"/>
@@ -18050,26 +17731,17 @@
               </a:rPr>
               <a:t>IPv6 Unicast Addresses</a:t>
             </a:r>
-            <a:r>
-              <a:rPr lang="en-US" dirty="0">
-                <a:latin typeface="Arial" charset="0"/>
-              </a:rPr>
-              <a:t/>
-            </a:r>
             <a:br>
               <a:rPr lang="en-US" dirty="0">
                 <a:latin typeface="Arial" charset="0"/>
               </a:rPr>
             </a:br>
             <a:r>
-              <a:rPr lang="en-US" dirty="0" smtClean="0">
+              <a:rPr lang="en-US" dirty="0">
                 <a:latin typeface="Arial" charset="0"/>
               </a:rPr>
               <a:t>Dynamic Link-local Addresses</a:t>
             </a:r>
-            <a:endParaRPr lang="en-US" dirty="0">
-              <a:latin typeface="Arial" charset="0"/>
-            </a:endParaRPr>
           </a:p>
         </p:txBody>
       </p:sp>
@@ -18266,26 +17938,17 @@
               </a:rPr>
               <a:t>IPv6 Unicast Addresses</a:t>
             </a:r>
-            <a:r>
-              <a:rPr lang="en-US" dirty="0">
-                <a:latin typeface="Arial" charset="0"/>
-              </a:rPr>
-              <a:t/>
-            </a:r>
             <a:br>
               <a:rPr lang="en-US" dirty="0">
                 <a:latin typeface="Arial" charset="0"/>
               </a:rPr>
             </a:br>
             <a:r>
-              <a:rPr lang="en-US" dirty="0" smtClean="0">
+              <a:rPr lang="en-US" dirty="0">
                 <a:latin typeface="Arial" charset="0"/>
               </a:rPr>
               <a:t>Dynamic Link-local Addresses (cont.)</a:t>
             </a:r>
-            <a:endParaRPr lang="en-US" dirty="0">
-              <a:latin typeface="Arial" charset="0"/>
-            </a:endParaRPr>
           </a:p>
         </p:txBody>
       </p:sp>
@@ -18494,26 +18157,17 @@
               </a:rPr>
               <a:t>IPv6 Unicast Addresses</a:t>
             </a:r>
-            <a:r>
-              <a:rPr lang="en-US" dirty="0">
-                <a:latin typeface="Arial" charset="0"/>
-              </a:rPr>
-              <a:t/>
-            </a:r>
             <a:br>
               <a:rPr lang="en-US" dirty="0">
                 <a:latin typeface="Arial" charset="0"/>
               </a:rPr>
             </a:br>
             <a:r>
-              <a:rPr lang="en-US" dirty="0" smtClean="0">
+              <a:rPr lang="en-US" dirty="0">
                 <a:latin typeface="Arial" charset="0"/>
               </a:rPr>
               <a:t>Static Link-local Addresses</a:t>
             </a:r>
-            <a:endParaRPr lang="en-US" dirty="0">
-              <a:latin typeface="Arial" charset="0"/>
-            </a:endParaRPr>
           </a:p>
         </p:txBody>
       </p:sp>
@@ -18662,26 +18316,17 @@
               </a:rPr>
               <a:t>IPv6 Unicast Addresses</a:t>
             </a:r>
-            <a:r>
-              <a:rPr lang="en-US" dirty="0">
-                <a:latin typeface="Arial" charset="0"/>
-              </a:rPr>
-              <a:t/>
-            </a:r>
             <a:br>
               <a:rPr lang="en-US" dirty="0">
                 <a:latin typeface="Arial" charset="0"/>
               </a:rPr>
             </a:br>
             <a:r>
-              <a:rPr lang="en-US" dirty="0" smtClean="0">
+              <a:rPr lang="en-US" dirty="0">
                 <a:latin typeface="Arial" charset="0"/>
               </a:rPr>
               <a:t>Static Link-local Addresses (cont.)</a:t>
             </a:r>
-            <a:endParaRPr lang="en-US" dirty="0">
-              <a:latin typeface="Arial" charset="0"/>
-            </a:endParaRPr>
           </a:p>
         </p:txBody>
       </p:sp>
@@ -18830,26 +18475,17 @@
               </a:rPr>
               <a:t>IPv6 Global Unicast Addresses</a:t>
             </a:r>
-            <a:r>
-              <a:rPr lang="en-US" dirty="0">
-                <a:latin typeface="Arial" charset="0"/>
-              </a:rPr>
-              <a:t/>
-            </a:r>
             <a:br>
               <a:rPr lang="en-US" dirty="0">
                 <a:latin typeface="Arial" charset="0"/>
               </a:rPr>
             </a:br>
             <a:r>
-              <a:rPr lang="en-US" dirty="0" smtClean="0">
+              <a:rPr lang="en-US" dirty="0">
                 <a:latin typeface="Arial" charset="0"/>
               </a:rPr>
               <a:t>Verifying IPv6 Address Configuration</a:t>
             </a:r>
-            <a:endParaRPr lang="en-US" dirty="0">
-              <a:latin typeface="Arial" charset="0"/>
-            </a:endParaRPr>
           </a:p>
         </p:txBody>
       </p:sp>
@@ -19028,26 +18664,17 @@
               </a:rPr>
               <a:t>IPv6 Global Unicast Addresses</a:t>
             </a:r>
-            <a:r>
-              <a:rPr lang="en-US" dirty="0">
-                <a:latin typeface="Arial" charset="0"/>
-              </a:rPr>
-              <a:t/>
-            </a:r>
             <a:br>
               <a:rPr lang="en-US" dirty="0">
                 <a:latin typeface="Arial" charset="0"/>
               </a:rPr>
             </a:br>
             <a:r>
-              <a:rPr lang="en-US" dirty="0" smtClean="0">
+              <a:rPr lang="en-US" dirty="0">
                 <a:latin typeface="Arial" charset="0"/>
               </a:rPr>
               <a:t>Verifying IPv6 Address Configuration (cont.)</a:t>
             </a:r>
-            <a:endParaRPr lang="en-US" dirty="0">
-              <a:latin typeface="Arial" charset="0"/>
-            </a:endParaRPr>
           </a:p>
         </p:txBody>
       </p:sp>
@@ -19173,14 +18800,11 @@
               </a:rPr>
             </a:br>
             <a:r>
-              <a:rPr lang="en-US" dirty="0" smtClean="0">
+              <a:rPr lang="en-US" dirty="0">
                 <a:latin typeface="Arial" charset="0"/>
               </a:rPr>
               <a:t>Assigned IPv6 Multicast Addresses</a:t>
             </a:r>
-            <a:endParaRPr lang="en-US" dirty="0">
-              <a:latin typeface="Arial" charset="0"/>
-            </a:endParaRPr>
           </a:p>
         </p:txBody>
       </p:sp>
@@ -19222,11 +18846,7 @@
             </a:pPr>
             <a:r>
               <a:rPr lang="en-US" dirty="0"/>
-              <a:t>Assigned </a:t>
-            </a:r>
-            <a:r>
-              <a:rPr lang="en-US" dirty="0" smtClean="0"/>
-              <a:t>multicast</a:t>
+              <a:t>Assigned multicast</a:t>
             </a:r>
           </a:p>
           <a:p>
@@ -19235,16 +18855,8 @@
               <a:buChar char="§"/>
             </a:pPr>
             <a:r>
-              <a:rPr lang="en-US" dirty="0" smtClean="0"/>
-              <a:t>Solicited </a:t>
-            </a:r>
-            <a:r>
               <a:rPr lang="en-US" dirty="0"/>
-              <a:t>node </a:t>
-            </a:r>
-            <a:r>
-              <a:rPr lang="en-US" dirty="0" smtClean="0"/>
-              <a:t>multicast</a:t>
+              <a:t>Solicited node multicast</a:t>
             </a:r>
           </a:p>
         </p:txBody>
@@ -19560,7 +19172,7 @@
               </a14:hiddenLine>
             </a:ext>
             <a:ext uri="{FAA26D3D-D897-4be2-8F04-BA451C77F1D7}">
-              <ma14:placeholderFlag xmlns:ma14="http://schemas.microsoft.com/office/mac/drawingml/2011/main" xmlns="" val="1"/>
+              <ma14:placeholderFlag xmlns="" xmlns:ma14="http://schemas.microsoft.com/office/mac/drawingml/2011/main" val="1"/>
             </a:ext>
           </a:extLst>
         </p:spPr>
@@ -19854,13 +19466,6 @@
   <p:clrMapOvr>
     <a:masterClrMapping/>
   </p:clrMapOvr>
-  <p:timing>
-    <p:tnLst>
-      <p:par>
-        <p:cTn id="1" dur="indefinite" restart="never" nodeType="tmRoot"/>
-      </p:par>
-    </p:tnLst>
-  </p:timing>
 </p:sld>
 </file>
 
@@ -19916,14 +19521,11 @@
               </a:rPr>
             </a:br>
             <a:r>
-              <a:rPr lang="en-US" dirty="0" smtClean="0">
+              <a:rPr lang="en-US" dirty="0">
                 <a:latin typeface="Arial" charset="0"/>
               </a:rPr>
               <a:t>Assigned IPv6 Multicast Addresses (cont.)</a:t>
             </a:r>
-            <a:endParaRPr lang="en-US" dirty="0">
-              <a:latin typeface="Arial" charset="0"/>
-            </a:endParaRPr>
           </a:p>
         </p:txBody>
       </p:sp>
@@ -19966,11 +19568,7 @@
             </a:r>
             <a:r>
               <a:rPr lang="en-US" dirty="0"/>
-              <a:t> </a:t>
-            </a:r>
-            <a:r>
-              <a:rPr lang="en-US" dirty="0" smtClean="0"/>
-              <a:t>– </a:t>
+              <a:t> – </a:t>
             </a:r>
           </a:p>
           <a:p>
@@ -20125,14 +19723,11 @@
               </a:rPr>
             </a:br>
             <a:r>
-              <a:rPr lang="en-US" dirty="0" smtClean="0">
+              <a:rPr lang="en-US" dirty="0">
                 <a:latin typeface="Arial" charset="0"/>
               </a:rPr>
               <a:t>Assigned IPv6 Multicast Addresses (cont.)</a:t>
             </a:r>
-            <a:endParaRPr lang="en-US" dirty="0">
-              <a:latin typeface="Arial" charset="0"/>
-            </a:endParaRPr>
           </a:p>
         </p:txBody>
       </p:sp>
@@ -20298,7 +19893,7 @@
               </a14:hiddenLine>
             </a:ext>
             <a:ext uri="{FAA26D3D-D897-4be2-8F04-BA451C77F1D7}">
-              <ma14:placeholderFlag xmlns:ma14="http://schemas.microsoft.com/office/mac/drawingml/2011/main" xmlns="" val="1"/>
+              <ma14:placeholderFlag xmlns="" xmlns:ma14="http://schemas.microsoft.com/office/mac/drawingml/2011/main" val="1"/>
             </a:ext>
           </a:extLst>
         </p:spPr>
@@ -20791,10 +20386,9 @@
           <a:lstStyle/>
           <a:p>
             <a:r>
-              <a:rPr lang="en-US" dirty="0" smtClean="0"/>
+              <a:rPr lang="en-US" dirty="0"/>
               <a:t>Recourses</a:t>
             </a:r>
-            <a:endParaRPr lang="en-US" dirty="0"/>
           </a:p>
         </p:txBody>
       </p:sp>
@@ -20814,7 +20408,7 @@
           <a:lstStyle/>
           <a:p>
             <a:r>
-              <a:rPr lang="en-US" b="1" dirty="0" smtClean="0"/>
+              <a:rPr lang="en-US" b="1" dirty="0"/>
               <a:t>Cisco Networking Academy program , Introduction to Networks</a:t>
             </a:r>
             <a:endParaRPr lang="en-US" dirty="0"/>
@@ -21262,13 +20856,6 @@
   <p:clrMapOvr>
     <a:masterClrMapping/>
   </p:clrMapOvr>
-  <p:timing>
-    <p:tnLst>
-      <p:par>
-        <p:cTn id="1" dur="indefinite" restart="never" nodeType="tmRoot"/>
-      </p:par>
-    </p:tnLst>
-  </p:timing>
 </p:sld>
 </file>
 
@@ -22197,13 +21784,6 @@
   <p:clrMapOvr>
     <a:masterClrMapping/>
   </p:clrMapOvr>
-  <p:timing>
-    <p:tnLst>
-      <p:par>
-        <p:cTn id="1" dur="indefinite" restart="never" nodeType="tmRoot"/>
-      </p:par>
-    </p:tnLst>
-  </p:timing>
 </p:sld>
 </file>
 
@@ -22502,13 +22082,6 @@
   <p:clrMapOvr>
     <a:masterClrMapping/>
   </p:clrMapOvr>
-  <p:timing>
-    <p:tnLst>
-      <p:par>
-        <p:cTn id="1" dur="indefinite" restart="never" nodeType="tmRoot"/>
-      </p:par>
-    </p:tnLst>
-  </p:timing>
 </p:sld>
 </file>
 
@@ -22850,13 +22423,6 @@
   <p:clrMapOvr>
     <a:masterClrMapping/>
   </p:clrMapOvr>
-  <p:timing>
-    <p:tnLst>
-      <p:par>
-        <p:cTn id="1" dur="indefinite" restart="never" nodeType="tmRoot"/>
-      </p:par>
-    </p:tnLst>
-  </p:timing>
 </p:sld>
 </file>
 
@@ -23234,13 +22800,6 @@
   <p:clrMapOvr>
     <a:masterClrMapping/>
   </p:clrMapOvr>
-  <p:timing>
-    <p:tnLst>
-      <p:par>
-        <p:cTn id="1" dur="indefinite" restart="never" nodeType="tmRoot"/>
-      </p:par>
-    </p:tnLst>
-  </p:timing>
 </p:sld>
 </file>
 
@@ -23642,13 +23201,6 @@
   <p:clrMapOvr>
     <a:masterClrMapping/>
   </p:clrMapOvr>
-  <p:timing>
-    <p:tnLst>
-      <p:par>
-        <p:cTn id="1" dur="indefinite" restart="never" nodeType="tmRoot"/>
-      </p:par>
-    </p:tnLst>
-  </p:timing>
 </p:sld>
 </file>
 

--- a/7th Semester/CCE-415_Network Routing & Switching/Sobuj sir/IPV 6.pptx
+++ b/7th Semester/CCE-415_Network Routing & Switching/Sobuj sir/IPV 6.pptx
@@ -242,7 +242,7 @@
           <a:p>
             <a:fld id="{2516541C-3DB1-48CF-8574-BE58FE0745A4}" type="datetimeFigureOut">
               <a:rPr lang="en-GB" smtClean="0"/>
-              <a:t>12/08/2026</a:t>
+              <a:t>04/01/2023</a:t>
             </a:fld>
             <a:endParaRPr lang="en-GB"/>
           </a:p>
@@ -529,62 +529,243 @@
       </p:grpSpPr>
       <p:sp>
         <p:nvSpPr>
-          <p:cNvPr id="2" name="Slide Image Placeholder 1"/>
+          <p:cNvPr id="51201" name="Rectangle 11"/>
           <p:cNvSpPr>
-            <a:spLocks noGrp="1" noRot="1" noChangeAspect="1"/>
+            <a:spLocks noGrp="1" noChangeArrowheads="1"/>
+          </p:cNvSpPr>
+          <p:nvPr>
+            <p:ph type="sldNum" sz="quarter" idx="5"/>
+          </p:nvPr>
+        </p:nvSpPr>
+        <p:spPr>
+          <a:noFill/>
+          <a:ln/>
+          <a:extLst>
+            <a:ext uri="{909E8E84-426E-40DD-AFC4-6F175D3DCCD1}">
+              <a14:hiddenFill xmlns:a14="http://schemas.microsoft.com/office/drawing/2010/main">
+                <a:solidFill>
+                  <a:srgbClr val="FFFFFF"/>
+                </a:solidFill>
+              </a14:hiddenFill>
+            </a:ext>
+            <a:ext uri="{91240B29-F687-4F45-9708-019B960494DF}">
+              <a14:hiddenLine xmlns:a14="http://schemas.microsoft.com/office/drawing/2010/main" w="9525">
+                <a:solidFill>
+                  <a:srgbClr val="000000"/>
+                </a:solidFill>
+                <a:miter lim="800000"/>
+                <a:headEnd/>
+                <a:tailEnd/>
+              </a14:hiddenLine>
+            </a:ext>
+          </a:extLst>
+        </p:spPr>
+        <p:txBody>
+          <a:bodyPr/>
+          <a:lstStyle>
+            <a:lvl1pPr defTabSz="886397">
+              <a:defRPr sz="2400">
+                <a:solidFill>
+                  <a:schemeClr val="tx1"/>
+                </a:solidFill>
+                <a:latin typeface="Arial" charset="0"/>
+                <a:ea typeface="ＭＳ Ｐゴシック" charset="0"/>
+                <a:cs typeface="ＭＳ Ｐゴシック" charset="0"/>
+              </a:defRPr>
+            </a:lvl1pPr>
+            <a:lvl2pPr marL="729057" indent="-280406" defTabSz="886397">
+              <a:defRPr sz="2400">
+                <a:solidFill>
+                  <a:schemeClr val="tx1"/>
+                </a:solidFill>
+                <a:latin typeface="Arial" charset="0"/>
+                <a:ea typeface="ＭＳ Ｐゴシック" charset="0"/>
+              </a:defRPr>
+            </a:lvl2pPr>
+            <a:lvl3pPr marL="1121626" indent="-224325" defTabSz="886397">
+              <a:defRPr sz="2400">
+                <a:solidFill>
+                  <a:schemeClr val="tx1"/>
+                </a:solidFill>
+                <a:latin typeface="Arial" charset="0"/>
+                <a:ea typeface="ＭＳ Ｐゴシック" charset="0"/>
+              </a:defRPr>
+            </a:lvl3pPr>
+            <a:lvl4pPr marL="1570276" indent="-224325" defTabSz="886397">
+              <a:defRPr sz="2400">
+                <a:solidFill>
+                  <a:schemeClr val="tx1"/>
+                </a:solidFill>
+                <a:latin typeface="Arial" charset="0"/>
+                <a:ea typeface="ＭＳ Ｐゴシック" charset="0"/>
+              </a:defRPr>
+            </a:lvl4pPr>
+            <a:lvl5pPr marL="2018927" indent="-224325" defTabSz="886397">
+              <a:defRPr sz="2400">
+                <a:solidFill>
+                  <a:schemeClr val="tx1"/>
+                </a:solidFill>
+                <a:latin typeface="Arial" charset="0"/>
+                <a:ea typeface="ＭＳ Ｐゴシック" charset="0"/>
+              </a:defRPr>
+            </a:lvl5pPr>
+            <a:lvl6pPr marL="2467577" indent="-224325" algn="ctr" defTabSz="886397" eaLnBrk="0" fontAlgn="base" hangingPunct="0">
+              <a:lnSpc>
+                <a:spcPct val="90000"/>
+              </a:lnSpc>
+              <a:spcBef>
+                <a:spcPct val="0"/>
+              </a:spcBef>
+              <a:spcAft>
+                <a:spcPct val="0"/>
+              </a:spcAft>
+              <a:defRPr sz="2400">
+                <a:solidFill>
+                  <a:schemeClr val="tx1"/>
+                </a:solidFill>
+                <a:latin typeface="Arial" charset="0"/>
+                <a:ea typeface="ＭＳ Ｐゴシック" charset="0"/>
+              </a:defRPr>
+            </a:lvl6pPr>
+            <a:lvl7pPr marL="2916227" indent="-224325" algn="ctr" defTabSz="886397" eaLnBrk="0" fontAlgn="base" hangingPunct="0">
+              <a:lnSpc>
+                <a:spcPct val="90000"/>
+              </a:lnSpc>
+              <a:spcBef>
+                <a:spcPct val="0"/>
+              </a:spcBef>
+              <a:spcAft>
+                <a:spcPct val="0"/>
+              </a:spcAft>
+              <a:defRPr sz="2400">
+                <a:solidFill>
+                  <a:schemeClr val="tx1"/>
+                </a:solidFill>
+                <a:latin typeface="Arial" charset="0"/>
+                <a:ea typeface="ＭＳ Ｐゴシック" charset="0"/>
+              </a:defRPr>
+            </a:lvl7pPr>
+            <a:lvl8pPr marL="3364878" indent="-224325" algn="ctr" defTabSz="886397" eaLnBrk="0" fontAlgn="base" hangingPunct="0">
+              <a:lnSpc>
+                <a:spcPct val="90000"/>
+              </a:lnSpc>
+              <a:spcBef>
+                <a:spcPct val="0"/>
+              </a:spcBef>
+              <a:spcAft>
+                <a:spcPct val="0"/>
+              </a:spcAft>
+              <a:defRPr sz="2400">
+                <a:solidFill>
+                  <a:schemeClr val="tx1"/>
+                </a:solidFill>
+                <a:latin typeface="Arial" charset="0"/>
+                <a:ea typeface="ＭＳ Ｐゴシック" charset="0"/>
+              </a:defRPr>
+            </a:lvl8pPr>
+            <a:lvl9pPr marL="3813528" indent="-224325" algn="ctr" defTabSz="886397" eaLnBrk="0" fontAlgn="base" hangingPunct="0">
+              <a:lnSpc>
+                <a:spcPct val="90000"/>
+              </a:lnSpc>
+              <a:spcBef>
+                <a:spcPct val="0"/>
+              </a:spcBef>
+              <a:spcAft>
+                <a:spcPct val="0"/>
+              </a:spcAft>
+              <a:defRPr sz="2400">
+                <a:solidFill>
+                  <a:schemeClr val="tx1"/>
+                </a:solidFill>
+                <a:latin typeface="Arial" charset="0"/>
+                <a:ea typeface="ＭＳ Ｐゴシック" charset="0"/>
+              </a:defRPr>
+            </a:lvl9pPr>
+          </a:lstStyle>
+          <a:p>
+            <a:fld id="{126C4740-6176-6B42-AE8B-248565D05237}" type="slidenum">
+              <a:rPr lang="en-US" sz="800"/>
+              <a:pPr/>
+              <a:t>12</a:t>
+            </a:fld>
+            <a:endParaRPr lang="en-US" sz="800" dirty="0"/>
+          </a:p>
+        </p:txBody>
+      </p:sp>
+      <p:sp>
+        <p:nvSpPr>
+          <p:cNvPr id="51202" name="Rectangle 2"/>
+          <p:cNvSpPr>
+            <a:spLocks noGrp="1" noRot="1" noChangeAspect="1" noChangeArrowheads="1" noTextEdit="1"/>
           </p:cNvSpPr>
           <p:nvPr>
             <p:ph type="sldImg"/>
           </p:nvPr>
         </p:nvSpPr>
-        <p:spPr/>
-      </p:sp>
-      <p:sp>
-        <p:nvSpPr>
-          <p:cNvPr id="3" name="Notes Placeholder 2"/>
+        <p:spPr>
+          <a:ln/>
+        </p:spPr>
+      </p:sp>
+      <p:sp>
+        <p:nvSpPr>
+          <p:cNvPr id="51203" name="Rectangle 3"/>
           <p:cNvSpPr>
-            <a:spLocks noGrp="1"/>
+            <a:spLocks noGrp="1" noChangeArrowheads="1"/>
           </p:cNvSpPr>
           <p:nvPr>
             <p:ph type="body" idx="1"/>
           </p:nvPr>
         </p:nvSpPr>
-        <p:spPr/>
+        <p:spPr>
+          <a:noFill/>
+          <a:ln/>
+          <a:extLst>
+            <a:ext uri="{909E8E84-426E-40DD-AFC4-6F175D3DCCD1}">
+              <a14:hiddenFill xmlns:a14="http://schemas.microsoft.com/office/drawing/2010/main">
+                <a:solidFill>
+                  <a:srgbClr val="FFFFFF"/>
+                </a:solidFill>
+              </a14:hiddenFill>
+            </a:ext>
+            <a:ext uri="{91240B29-F687-4F45-9708-019B960494DF}">
+              <a14:hiddenLine xmlns:a14="http://schemas.microsoft.com/office/drawing/2010/main" w="9525">
+                <a:solidFill>
+                  <a:srgbClr val="000000"/>
+                </a:solidFill>
+                <a:miter lim="800000"/>
+                <a:headEnd/>
+                <a:tailEnd/>
+              </a14:hiddenLine>
+            </a:ext>
+          </a:extLst>
+        </p:spPr>
         <p:txBody>
           <a:bodyPr/>
           <a:lstStyle/>
           <a:p>
+            <a:pPr>
+              <a:lnSpc>
+                <a:spcPct val="80000"/>
+              </a:lnSpc>
+              <a:buFontTx/>
+              <a:buNone/>
+            </a:pPr>
+            <a:r>
+              <a:rPr lang="en-US" dirty="0" smtClean="0"/>
+              <a:t>8.2.1.2  IPv4</a:t>
+            </a:r>
+            <a:r>
+              <a:rPr lang="en-US" baseline="0" dirty="0" smtClean="0"/>
+              <a:t> and IPv6 Coexistence</a:t>
+            </a:r>
             <a:endParaRPr lang="en-US" dirty="0"/>
-          </a:p>
-        </p:txBody>
-      </p:sp>
-      <p:sp>
-        <p:nvSpPr>
-          <p:cNvPr id="4" name="Slide Number Placeholder 3"/>
-          <p:cNvSpPr>
-            <a:spLocks noGrp="1"/>
-          </p:cNvSpPr>
-          <p:nvPr>
-            <p:ph type="sldNum" sz="quarter" idx="5"/>
-          </p:nvPr>
-        </p:nvSpPr>
-        <p:spPr/>
-        <p:txBody>
-          <a:bodyPr/>
-          <a:lstStyle/>
-          <a:p>
-            <a:fld id="{11EA0069-CE9C-4DF7-A414-7EEDF68B1A10}" type="slidenum">
-              <a:rPr lang="en-GB" smtClean="0"/>
-              <a:t>1</a:t>
-            </a:fld>
-            <a:endParaRPr lang="en-GB"/>
           </a:p>
         </p:txBody>
       </p:sp>
     </p:spTree>
     <p:extLst>
       <p:ext uri="{BB962C8B-B14F-4D97-AF65-F5344CB8AC3E}">
-        <p14:creationId xmlns:p14="http://schemas.microsoft.com/office/powerpoint/2010/main" val="1085499146"/>
+        <p14:creationId xmlns:p14="http://schemas.microsoft.com/office/powerpoint/2010/main" val="3556055785"/>
       </p:ext>
     </p:extLst>
   </p:cSld>
@@ -770,7 +951,7 @@
             <a:fld id="{4EE133E6-1A71-3948-B0E1-530C95DEAFDE}" type="slidenum">
               <a:rPr lang="en-US" sz="800"/>
               <a:pPr/>
-              <a:t>19</a:t>
+              <a:t>21</a:t>
             </a:fld>
             <a:endParaRPr lang="en-US" sz="800" dirty="0"/>
           </a:p>
@@ -835,12 +1016,12 @@
               <a:buNone/>
             </a:pPr>
             <a:r>
-              <a:rPr lang="en-US" dirty="0"/>
-              <a:t>8.2.3.3</a:t>
-            </a:r>
-            <a:r>
-              <a:rPr lang="en-US" baseline="0" dirty="0"/>
-              <a:t>  IPv6 Unicast Addresses (cont.)</a:t>
+              <a:rPr lang="en-US" dirty="0" smtClean="0"/>
+              <a:t>8.2.3.3  IPv6 Unicast</a:t>
+            </a:r>
+            <a:r>
+              <a:rPr lang="en-US" baseline="0" dirty="0" smtClean="0"/>
+              <a:t> Addresses (cont.)</a:t>
             </a:r>
             <a:endParaRPr lang="en-US" dirty="0"/>
           </a:p>
@@ -849,7 +1030,7 @@
     </p:spTree>
     <p:extLst>
       <p:ext uri="{BB962C8B-B14F-4D97-AF65-F5344CB8AC3E}">
-        <p14:creationId xmlns:p14="http://schemas.microsoft.com/office/powerpoint/2010/main" val="2523864835"/>
+        <p14:creationId xmlns:p14="http://schemas.microsoft.com/office/powerpoint/2010/main" val="1087119043"/>
       </p:ext>
     </p:extLst>
   </p:cSld>
@@ -1035,7 +1216,7 @@
             <a:fld id="{4EE133E6-1A71-3948-B0E1-530C95DEAFDE}" type="slidenum">
               <a:rPr lang="en-US" sz="800"/>
               <a:pPr/>
-              <a:t>20</a:t>
+              <a:t>22</a:t>
             </a:fld>
             <a:endParaRPr lang="en-US" sz="800" dirty="0"/>
           </a:p>
@@ -1100,12 +1281,8 @@
               <a:buNone/>
             </a:pPr>
             <a:r>
-              <a:rPr lang="en-US" dirty="0"/>
-              <a:t>8.2.3.3  IPv6 Unicast</a:t>
-            </a:r>
-            <a:r>
-              <a:rPr lang="en-US" baseline="0" dirty="0"/>
-              <a:t> Addresses (cont.)</a:t>
+              <a:rPr lang="en-US" dirty="0" smtClean="0"/>
+              <a:t>8.2.3.4  IPv6 Link-Local Unicast Addresses</a:t>
             </a:r>
             <a:endParaRPr lang="en-US" dirty="0"/>
           </a:p>
@@ -1114,7 +1291,7 @@
     </p:spTree>
     <p:extLst>
       <p:ext uri="{BB962C8B-B14F-4D97-AF65-F5344CB8AC3E}">
-        <p14:creationId xmlns:p14="http://schemas.microsoft.com/office/powerpoint/2010/main" val="3304898829"/>
+        <p14:creationId xmlns:p14="http://schemas.microsoft.com/office/powerpoint/2010/main" val="3703692188"/>
       </p:ext>
     </p:extLst>
   </p:cSld>
@@ -1300,7 +1477,7 @@
             <a:fld id="{4EE133E6-1A71-3948-B0E1-530C95DEAFDE}" type="slidenum">
               <a:rPr lang="en-US" sz="800"/>
               <a:pPr/>
-              <a:t>21</a:t>
+              <a:t>23</a:t>
             </a:fld>
             <a:endParaRPr lang="en-US" sz="800" dirty="0"/>
           </a:p>
@@ -1365,12 +1542,8 @@
               <a:buNone/>
             </a:pPr>
             <a:r>
-              <a:rPr lang="en-US" dirty="0"/>
-              <a:t>8.2.3.3  IPv6 Unicast</a:t>
-            </a:r>
-            <a:r>
-              <a:rPr lang="en-US" baseline="0" dirty="0"/>
-              <a:t> Addresses (cont.)</a:t>
+              <a:rPr lang="en-US" dirty="0" smtClean="0"/>
+              <a:t>8.2.3.4  IPv6 Link-Local Unicast Addresses</a:t>
             </a:r>
             <a:endParaRPr lang="en-US" dirty="0"/>
           </a:p>
@@ -1379,7 +1552,7 @@
     </p:spTree>
     <p:extLst>
       <p:ext uri="{BB962C8B-B14F-4D97-AF65-F5344CB8AC3E}">
-        <p14:creationId xmlns:p14="http://schemas.microsoft.com/office/powerpoint/2010/main" val="1087119043"/>
+        <p14:creationId xmlns:p14="http://schemas.microsoft.com/office/powerpoint/2010/main" val="2561802767"/>
       </p:ext>
     </p:extLst>
   </p:cSld>
@@ -1565,7 +1738,7 @@
             <a:fld id="{4EE133E6-1A71-3948-B0E1-530C95DEAFDE}" type="slidenum">
               <a:rPr lang="en-US" sz="800"/>
               <a:pPr/>
-              <a:t>22</a:t>
+              <a:t>24</a:t>
             </a:fld>
             <a:endParaRPr lang="en-US" sz="800" dirty="0"/>
           </a:p>
@@ -1630,16 +1803,21 @@
               <a:buNone/>
             </a:pPr>
             <a:r>
-              <a:rPr lang="en-US" dirty="0"/>
-              <a:t>8.2.3.4  IPv6 Link-Local Unicast Addresses</a:t>
-            </a:r>
+              <a:rPr lang="en-US" dirty="0" smtClean="0"/>
+              <a:t>8.2.4.1  Structure of an IPv6 Global Unicast</a:t>
+            </a:r>
+            <a:r>
+              <a:rPr lang="en-US" baseline="0" dirty="0" smtClean="0"/>
+              <a:t> Address</a:t>
+            </a:r>
+            <a:endParaRPr lang="en-US" dirty="0"/>
           </a:p>
         </p:txBody>
       </p:sp>
     </p:spTree>
     <p:extLst>
       <p:ext uri="{BB962C8B-B14F-4D97-AF65-F5344CB8AC3E}">
-        <p14:creationId xmlns:p14="http://schemas.microsoft.com/office/powerpoint/2010/main" val="3703692188"/>
+        <p14:creationId xmlns:p14="http://schemas.microsoft.com/office/powerpoint/2010/main" val="1910588659"/>
       </p:ext>
     </p:extLst>
   </p:cSld>
@@ -1825,7 +2003,7 @@
             <a:fld id="{4EE133E6-1A71-3948-B0E1-530C95DEAFDE}" type="slidenum">
               <a:rPr lang="en-US" sz="800"/>
               <a:pPr/>
-              <a:t>23</a:t>
+              <a:t>25</a:t>
             </a:fld>
             <a:endParaRPr lang="en-US" sz="800" dirty="0"/>
           </a:p>
@@ -1890,16 +2068,21 @@
               <a:buNone/>
             </a:pPr>
             <a:r>
-              <a:rPr lang="en-US" dirty="0"/>
-              <a:t>8.2.3.4  IPv6 Link-Local Unicast Addresses</a:t>
-            </a:r>
+              <a:rPr lang="en-US" dirty="0" smtClean="0"/>
+              <a:t>8.2.4.1  Structure</a:t>
+            </a:r>
+            <a:r>
+              <a:rPr lang="en-US" baseline="0" dirty="0" smtClean="0"/>
+              <a:t> of an IPv6 Global Unicast Address (cont.)</a:t>
+            </a:r>
+            <a:endParaRPr lang="en-US" dirty="0"/>
           </a:p>
         </p:txBody>
       </p:sp>
     </p:spTree>
     <p:extLst>
       <p:ext uri="{BB962C8B-B14F-4D97-AF65-F5344CB8AC3E}">
-        <p14:creationId xmlns:p14="http://schemas.microsoft.com/office/powerpoint/2010/main" val="2561802767"/>
+        <p14:creationId xmlns:p14="http://schemas.microsoft.com/office/powerpoint/2010/main" val="1107294553"/>
       </p:ext>
     </p:extLst>
   </p:cSld>
@@ -2085,7 +2268,7 @@
             <a:fld id="{4EE133E6-1A71-3948-B0E1-530C95DEAFDE}" type="slidenum">
               <a:rPr lang="en-US" sz="800"/>
               <a:pPr/>
-              <a:t>24</a:t>
+              <a:t>26</a:t>
             </a:fld>
             <a:endParaRPr lang="en-US" sz="800" dirty="0"/>
           </a:p>
@@ -2150,12 +2333,12 @@
               <a:buNone/>
             </a:pPr>
             <a:r>
-              <a:rPr lang="en-US" dirty="0"/>
-              <a:t>8.2.4.1  Structure of an IPv6 Global Unicast</a:t>
-            </a:r>
-            <a:r>
-              <a:rPr lang="en-US" baseline="0" dirty="0"/>
-              <a:t> Address</a:t>
+              <a:rPr lang="en-US" dirty="0" smtClean="0"/>
+              <a:t>8.2.4.1  Structure</a:t>
+            </a:r>
+            <a:r>
+              <a:rPr lang="en-US" baseline="0" dirty="0" smtClean="0"/>
+              <a:t> of an IPv6 Global Unicast Address</a:t>
             </a:r>
             <a:endParaRPr lang="en-US" dirty="0"/>
           </a:p>
@@ -2164,7 +2347,7 @@
     </p:spTree>
     <p:extLst>
       <p:ext uri="{BB962C8B-B14F-4D97-AF65-F5344CB8AC3E}">
-        <p14:creationId xmlns:p14="http://schemas.microsoft.com/office/powerpoint/2010/main" val="1910588659"/>
+        <p14:creationId xmlns:p14="http://schemas.microsoft.com/office/powerpoint/2010/main" val="1432458225"/>
       </p:ext>
     </p:extLst>
   </p:cSld>
@@ -2350,7 +2533,7 @@
             <a:fld id="{4EE133E6-1A71-3948-B0E1-530C95DEAFDE}" type="slidenum">
               <a:rPr lang="en-US" sz="800"/>
               <a:pPr/>
-              <a:t>25</a:t>
+              <a:t>27</a:t>
             </a:fld>
             <a:endParaRPr lang="en-US" sz="800" dirty="0"/>
           </a:p>
@@ -2415,12 +2598,8 @@
               <a:buNone/>
             </a:pPr>
             <a:r>
-              <a:rPr lang="en-US" dirty="0"/>
-              <a:t>8.2.4.1  Structure</a:t>
-            </a:r>
-            <a:r>
-              <a:rPr lang="en-US" baseline="0" dirty="0"/>
-              <a:t> of an IPv6 Global Unicast Address (cont.)</a:t>
+              <a:rPr lang="en-US" dirty="0" smtClean="0"/>
+              <a:t>8.2.4.2  Static Configuration of a Global Unicast Address</a:t>
             </a:r>
             <a:endParaRPr lang="en-US" dirty="0"/>
           </a:p>
@@ -2429,7 +2608,7 @@
     </p:spTree>
     <p:extLst>
       <p:ext uri="{BB962C8B-B14F-4D97-AF65-F5344CB8AC3E}">
-        <p14:creationId xmlns:p14="http://schemas.microsoft.com/office/powerpoint/2010/main" val="1107294553"/>
+        <p14:creationId xmlns:p14="http://schemas.microsoft.com/office/powerpoint/2010/main" val="3164288878"/>
       </p:ext>
     </p:extLst>
   </p:cSld>
@@ -2615,7 +2794,7 @@
             <a:fld id="{4EE133E6-1A71-3948-B0E1-530C95DEAFDE}" type="slidenum">
               <a:rPr lang="en-US" sz="800"/>
               <a:pPr/>
-              <a:t>26</a:t>
+              <a:t>28</a:t>
             </a:fld>
             <a:endParaRPr lang="en-US" sz="800" dirty="0"/>
           </a:p>
@@ -2680,12 +2859,12 @@
               <a:buNone/>
             </a:pPr>
             <a:r>
-              <a:rPr lang="en-US" dirty="0"/>
-              <a:t>8.2.4.1  Structure</a:t>
-            </a:r>
-            <a:r>
-              <a:rPr lang="en-US" baseline="0" dirty="0"/>
-              <a:t> of an IPv6 Global Unicast Address</a:t>
+              <a:rPr lang="en-US" dirty="0" smtClean="0"/>
+              <a:t>8.2.4.2  Static Configuration</a:t>
+            </a:r>
+            <a:r>
+              <a:rPr lang="en-US" baseline="0" dirty="0" smtClean="0"/>
+              <a:t> of an IPv6 Global Unicast Address (cont.)</a:t>
             </a:r>
             <a:endParaRPr lang="en-US" dirty="0"/>
           </a:p>
@@ -2694,7 +2873,7 @@
     </p:spTree>
     <p:extLst>
       <p:ext uri="{BB962C8B-B14F-4D97-AF65-F5344CB8AC3E}">
-        <p14:creationId xmlns:p14="http://schemas.microsoft.com/office/powerpoint/2010/main" val="1432458225"/>
+        <p14:creationId xmlns:p14="http://schemas.microsoft.com/office/powerpoint/2010/main" val="3206030898"/>
       </p:ext>
     </p:extLst>
   </p:cSld>
@@ -2880,7 +3059,7 @@
             <a:fld id="{4EE133E6-1A71-3948-B0E1-530C95DEAFDE}" type="slidenum">
               <a:rPr lang="en-US" sz="800"/>
               <a:pPr/>
-              <a:t>27</a:t>
+              <a:t>29</a:t>
             </a:fld>
             <a:endParaRPr lang="en-US" sz="800" dirty="0"/>
           </a:p>
@@ -2945,16 +3124,23 @@
               <a:buNone/>
             </a:pPr>
             <a:r>
-              <a:rPr lang="en-US" dirty="0"/>
-              <a:t>8.2.4.2  Static Configuration of a Global Unicast Address</a:t>
-            </a:r>
+              <a:rPr lang="en-US" dirty="0" smtClean="0"/>
+              <a:t>8.2.4.5  </a:t>
+            </a:r>
+            <a:r>
+              <a:rPr lang="en-US" dirty="0">
+                <a:latin typeface="Arial" charset="0"/>
+              </a:rPr>
+              <a:t>EUI-64 Process or Randomly Generated</a:t>
+            </a:r>
+            <a:endParaRPr lang="en-US" dirty="0"/>
           </a:p>
         </p:txBody>
       </p:sp>
     </p:spTree>
     <p:extLst>
       <p:ext uri="{BB962C8B-B14F-4D97-AF65-F5344CB8AC3E}">
-        <p14:creationId xmlns:p14="http://schemas.microsoft.com/office/powerpoint/2010/main" val="3164288878"/>
+        <p14:creationId xmlns:p14="http://schemas.microsoft.com/office/powerpoint/2010/main" val="24282342"/>
       </p:ext>
     </p:extLst>
   </p:cSld>
@@ -3140,7 +3326,7 @@
             <a:fld id="{4EE133E6-1A71-3948-B0E1-530C95DEAFDE}" type="slidenum">
               <a:rPr lang="en-US" sz="800"/>
               <a:pPr/>
-              <a:t>28</a:t>
+              <a:t>30</a:t>
             </a:fld>
             <a:endParaRPr lang="en-US" sz="800" dirty="0"/>
           </a:p>
@@ -3205,12 +3391,14 @@
               <a:buNone/>
             </a:pPr>
             <a:r>
-              <a:rPr lang="en-US" dirty="0"/>
-              <a:t>8.2.4.2  Static Configuration</a:t>
-            </a:r>
-            <a:r>
-              <a:rPr lang="en-US" baseline="0" dirty="0"/>
-              <a:t> of an IPv6 Global Unicast Address (cont.)</a:t>
+              <a:rPr lang="en-US" dirty="0" smtClean="0"/>
+              <a:t>8.2.4.5  </a:t>
+            </a:r>
+            <a:r>
+              <a:rPr lang="en-US" dirty="0">
+                <a:latin typeface="Arial" charset="0"/>
+              </a:rPr>
+              <a:t>EUI-64 Process or Randomly Generated</a:t>
             </a:r>
             <a:endParaRPr lang="en-US" dirty="0"/>
           </a:p>
@@ -3219,7 +3407,7 @@
     </p:spTree>
     <p:extLst>
       <p:ext uri="{BB962C8B-B14F-4D97-AF65-F5344CB8AC3E}">
-        <p14:creationId xmlns:p14="http://schemas.microsoft.com/office/powerpoint/2010/main" val="3206030898"/>
+        <p14:creationId xmlns:p14="http://schemas.microsoft.com/office/powerpoint/2010/main" val="23701965"/>
       </p:ext>
     </p:extLst>
   </p:cSld>
@@ -3248,62 +3436,239 @@
       </p:grpSpPr>
       <p:sp>
         <p:nvSpPr>
-          <p:cNvPr id="2" name="Slide Image Placeholder 1"/>
+          <p:cNvPr id="51201" name="Rectangle 11"/>
           <p:cNvSpPr>
-            <a:spLocks noGrp="1" noRot="1" noChangeAspect="1"/>
+            <a:spLocks noGrp="1" noChangeArrowheads="1"/>
+          </p:cNvSpPr>
+          <p:nvPr>
+            <p:ph type="sldNum" sz="quarter" idx="5"/>
+          </p:nvPr>
+        </p:nvSpPr>
+        <p:spPr>
+          <a:noFill/>
+          <a:ln/>
+          <a:extLst>
+            <a:ext uri="{909E8E84-426E-40DD-AFC4-6F175D3DCCD1}">
+              <a14:hiddenFill xmlns:a14="http://schemas.microsoft.com/office/drawing/2010/main">
+                <a:solidFill>
+                  <a:srgbClr val="FFFFFF"/>
+                </a:solidFill>
+              </a14:hiddenFill>
+            </a:ext>
+            <a:ext uri="{91240B29-F687-4F45-9708-019B960494DF}">
+              <a14:hiddenLine xmlns:a14="http://schemas.microsoft.com/office/drawing/2010/main" w="9525">
+                <a:solidFill>
+                  <a:srgbClr val="000000"/>
+                </a:solidFill>
+                <a:miter lim="800000"/>
+                <a:headEnd/>
+                <a:tailEnd/>
+              </a14:hiddenLine>
+            </a:ext>
+          </a:extLst>
+        </p:spPr>
+        <p:txBody>
+          <a:bodyPr/>
+          <a:lstStyle>
+            <a:lvl1pPr defTabSz="886397">
+              <a:defRPr sz="2400">
+                <a:solidFill>
+                  <a:schemeClr val="tx1"/>
+                </a:solidFill>
+                <a:latin typeface="Arial" charset="0"/>
+                <a:ea typeface="ＭＳ Ｐゴシック" charset="0"/>
+                <a:cs typeface="ＭＳ Ｐゴシック" charset="0"/>
+              </a:defRPr>
+            </a:lvl1pPr>
+            <a:lvl2pPr marL="729057" indent="-280406" defTabSz="886397">
+              <a:defRPr sz="2400">
+                <a:solidFill>
+                  <a:schemeClr val="tx1"/>
+                </a:solidFill>
+                <a:latin typeface="Arial" charset="0"/>
+                <a:ea typeface="ＭＳ Ｐゴシック" charset="0"/>
+              </a:defRPr>
+            </a:lvl2pPr>
+            <a:lvl3pPr marL="1121626" indent="-224325" defTabSz="886397">
+              <a:defRPr sz="2400">
+                <a:solidFill>
+                  <a:schemeClr val="tx1"/>
+                </a:solidFill>
+                <a:latin typeface="Arial" charset="0"/>
+                <a:ea typeface="ＭＳ Ｐゴシック" charset="0"/>
+              </a:defRPr>
+            </a:lvl3pPr>
+            <a:lvl4pPr marL="1570276" indent="-224325" defTabSz="886397">
+              <a:defRPr sz="2400">
+                <a:solidFill>
+                  <a:schemeClr val="tx1"/>
+                </a:solidFill>
+                <a:latin typeface="Arial" charset="0"/>
+                <a:ea typeface="ＭＳ Ｐゴシック" charset="0"/>
+              </a:defRPr>
+            </a:lvl4pPr>
+            <a:lvl5pPr marL="2018927" indent="-224325" defTabSz="886397">
+              <a:defRPr sz="2400">
+                <a:solidFill>
+                  <a:schemeClr val="tx1"/>
+                </a:solidFill>
+                <a:latin typeface="Arial" charset="0"/>
+                <a:ea typeface="ＭＳ Ｐゴシック" charset="0"/>
+              </a:defRPr>
+            </a:lvl5pPr>
+            <a:lvl6pPr marL="2467577" indent="-224325" algn="ctr" defTabSz="886397" eaLnBrk="0" fontAlgn="base" hangingPunct="0">
+              <a:lnSpc>
+                <a:spcPct val="90000"/>
+              </a:lnSpc>
+              <a:spcBef>
+                <a:spcPct val="0"/>
+              </a:spcBef>
+              <a:spcAft>
+                <a:spcPct val="0"/>
+              </a:spcAft>
+              <a:defRPr sz="2400">
+                <a:solidFill>
+                  <a:schemeClr val="tx1"/>
+                </a:solidFill>
+                <a:latin typeface="Arial" charset="0"/>
+                <a:ea typeface="ＭＳ Ｐゴシック" charset="0"/>
+              </a:defRPr>
+            </a:lvl6pPr>
+            <a:lvl7pPr marL="2916227" indent="-224325" algn="ctr" defTabSz="886397" eaLnBrk="0" fontAlgn="base" hangingPunct="0">
+              <a:lnSpc>
+                <a:spcPct val="90000"/>
+              </a:lnSpc>
+              <a:spcBef>
+                <a:spcPct val="0"/>
+              </a:spcBef>
+              <a:spcAft>
+                <a:spcPct val="0"/>
+              </a:spcAft>
+              <a:defRPr sz="2400">
+                <a:solidFill>
+                  <a:schemeClr val="tx1"/>
+                </a:solidFill>
+                <a:latin typeface="Arial" charset="0"/>
+                <a:ea typeface="ＭＳ Ｐゴシック" charset="0"/>
+              </a:defRPr>
+            </a:lvl7pPr>
+            <a:lvl8pPr marL="3364878" indent="-224325" algn="ctr" defTabSz="886397" eaLnBrk="0" fontAlgn="base" hangingPunct="0">
+              <a:lnSpc>
+                <a:spcPct val="90000"/>
+              </a:lnSpc>
+              <a:spcBef>
+                <a:spcPct val="0"/>
+              </a:spcBef>
+              <a:spcAft>
+                <a:spcPct val="0"/>
+              </a:spcAft>
+              <a:defRPr sz="2400">
+                <a:solidFill>
+                  <a:schemeClr val="tx1"/>
+                </a:solidFill>
+                <a:latin typeface="Arial" charset="0"/>
+                <a:ea typeface="ＭＳ Ｐゴシック" charset="0"/>
+              </a:defRPr>
+            </a:lvl8pPr>
+            <a:lvl9pPr marL="3813528" indent="-224325" algn="ctr" defTabSz="886397" eaLnBrk="0" fontAlgn="base" hangingPunct="0">
+              <a:lnSpc>
+                <a:spcPct val="90000"/>
+              </a:lnSpc>
+              <a:spcBef>
+                <a:spcPct val="0"/>
+              </a:spcBef>
+              <a:spcAft>
+                <a:spcPct val="0"/>
+              </a:spcAft>
+              <a:defRPr sz="2400">
+                <a:solidFill>
+                  <a:schemeClr val="tx1"/>
+                </a:solidFill>
+                <a:latin typeface="Arial" charset="0"/>
+                <a:ea typeface="ＭＳ Ｐゴシック" charset="0"/>
+              </a:defRPr>
+            </a:lvl9pPr>
+          </a:lstStyle>
+          <a:p>
+            <a:fld id="{126C4740-6176-6B42-AE8B-248565D05237}" type="slidenum">
+              <a:rPr lang="en-US" sz="800"/>
+              <a:pPr/>
+              <a:t>13</a:t>
+            </a:fld>
+            <a:endParaRPr lang="en-US" sz="800" dirty="0"/>
+          </a:p>
+        </p:txBody>
+      </p:sp>
+      <p:sp>
+        <p:nvSpPr>
+          <p:cNvPr id="51202" name="Rectangle 2"/>
+          <p:cNvSpPr>
+            <a:spLocks noGrp="1" noRot="1" noChangeAspect="1" noChangeArrowheads="1" noTextEdit="1"/>
           </p:cNvSpPr>
           <p:nvPr>
             <p:ph type="sldImg"/>
           </p:nvPr>
         </p:nvSpPr>
-        <p:spPr/>
-      </p:sp>
-      <p:sp>
-        <p:nvSpPr>
-          <p:cNvPr id="3" name="Notes Placeholder 2"/>
+        <p:spPr>
+          <a:ln/>
+        </p:spPr>
+      </p:sp>
+      <p:sp>
+        <p:nvSpPr>
+          <p:cNvPr id="51203" name="Rectangle 3"/>
           <p:cNvSpPr>
-            <a:spLocks noGrp="1"/>
+            <a:spLocks noGrp="1" noChangeArrowheads="1"/>
           </p:cNvSpPr>
           <p:nvPr>
             <p:ph type="body" idx="1"/>
           </p:nvPr>
         </p:nvSpPr>
-        <p:spPr/>
+        <p:spPr>
+          <a:noFill/>
+          <a:ln/>
+          <a:extLst>
+            <a:ext uri="{909E8E84-426E-40DD-AFC4-6F175D3DCCD1}">
+              <a14:hiddenFill xmlns:a14="http://schemas.microsoft.com/office/drawing/2010/main">
+                <a:solidFill>
+                  <a:srgbClr val="FFFFFF"/>
+                </a:solidFill>
+              </a14:hiddenFill>
+            </a:ext>
+            <a:ext uri="{91240B29-F687-4F45-9708-019B960494DF}">
+              <a14:hiddenLine xmlns:a14="http://schemas.microsoft.com/office/drawing/2010/main" w="9525">
+                <a:solidFill>
+                  <a:srgbClr val="000000"/>
+                </a:solidFill>
+                <a:miter lim="800000"/>
+                <a:headEnd/>
+                <a:tailEnd/>
+              </a14:hiddenLine>
+            </a:ext>
+          </a:extLst>
+        </p:spPr>
         <p:txBody>
           <a:bodyPr/>
           <a:lstStyle/>
           <a:p>
+            <a:pPr>
+              <a:lnSpc>
+                <a:spcPct val="80000"/>
+              </a:lnSpc>
+              <a:buFontTx/>
+              <a:buNone/>
+            </a:pPr>
+            <a:r>
+              <a:rPr lang="en-US" dirty="0" smtClean="0"/>
+              <a:t>8.2.1.2  IPv4 and IPv6 Coexistence</a:t>
+            </a:r>
             <a:endParaRPr lang="en-US" dirty="0"/>
-          </a:p>
-        </p:txBody>
-      </p:sp>
-      <p:sp>
-        <p:nvSpPr>
-          <p:cNvPr id="4" name="Slide Number Placeholder 3"/>
-          <p:cNvSpPr>
-            <a:spLocks noGrp="1"/>
-          </p:cNvSpPr>
-          <p:nvPr>
-            <p:ph type="sldNum" sz="quarter" idx="5"/>
-          </p:nvPr>
-        </p:nvSpPr>
-        <p:spPr/>
-        <p:txBody>
-          <a:bodyPr/>
-          <a:lstStyle/>
-          <a:p>
-            <a:fld id="{11EA0069-CE9C-4DF7-A414-7EEDF68B1A10}" type="slidenum">
-              <a:rPr lang="en-GB" smtClean="0"/>
-              <a:t>3</a:t>
-            </a:fld>
-            <a:endParaRPr lang="en-GB"/>
           </a:p>
         </p:txBody>
       </p:sp>
     </p:spTree>
     <p:extLst>
       <p:ext uri="{BB962C8B-B14F-4D97-AF65-F5344CB8AC3E}">
-        <p14:creationId xmlns:p14="http://schemas.microsoft.com/office/powerpoint/2010/main" val="2373402650"/>
+        <p14:creationId xmlns:p14="http://schemas.microsoft.com/office/powerpoint/2010/main" val="3848619941"/>
       </p:ext>
     </p:extLst>
   </p:cSld>
@@ -3489,7 +3854,7 @@
             <a:fld id="{4EE133E6-1A71-3948-B0E1-530C95DEAFDE}" type="slidenum">
               <a:rPr lang="en-US" sz="800"/>
               <a:pPr/>
-              <a:t>29</a:t>
+              <a:t>31</a:t>
             </a:fld>
             <a:endParaRPr lang="en-US" sz="800" dirty="0"/>
           </a:p>
@@ -3554,14 +3919,14 @@
               <a:buNone/>
             </a:pPr>
             <a:r>
-              <a:rPr lang="en-US" dirty="0"/>
+              <a:rPr lang="en-US" dirty="0" smtClean="0"/>
               <a:t>8.2.4.5  </a:t>
             </a:r>
             <a:r>
               <a:rPr lang="en-US" dirty="0">
                 <a:latin typeface="Arial" charset="0"/>
               </a:rPr>
-              <a:t>EUI-64 Process or Randomly Generated</a:t>
+              <a:t>EUI-64 Process or Randomly Generated (cont.)</a:t>
             </a:r>
             <a:endParaRPr lang="en-US" dirty="0"/>
           </a:p>
@@ -3570,7 +3935,7 @@
     </p:spTree>
     <p:extLst>
       <p:ext uri="{BB962C8B-B14F-4D97-AF65-F5344CB8AC3E}">
-        <p14:creationId xmlns:p14="http://schemas.microsoft.com/office/powerpoint/2010/main" val="24282342"/>
+        <p14:creationId xmlns:p14="http://schemas.microsoft.com/office/powerpoint/2010/main" val="930282408"/>
       </p:ext>
     </p:extLst>
   </p:cSld>
@@ -3756,7 +4121,7 @@
             <a:fld id="{4EE133E6-1A71-3948-B0E1-530C95DEAFDE}" type="slidenum">
               <a:rPr lang="en-US" sz="800"/>
               <a:pPr/>
-              <a:t>30</a:t>
+              <a:t>32</a:t>
             </a:fld>
             <a:endParaRPr lang="en-US" sz="800" dirty="0"/>
           </a:p>
@@ -3821,14 +4186,14 @@
               <a:buNone/>
             </a:pPr>
             <a:r>
-              <a:rPr lang="en-US" dirty="0"/>
+              <a:rPr lang="en-US" dirty="0" smtClean="0"/>
               <a:t>8.2.4.5  </a:t>
             </a:r>
             <a:r>
               <a:rPr lang="en-US" dirty="0">
                 <a:latin typeface="Arial" charset="0"/>
               </a:rPr>
-              <a:t>EUI-64 Process or Randomly Generated</a:t>
+              <a:t>EUI-64 Process or Randomly Generated (cont.)</a:t>
             </a:r>
             <a:endParaRPr lang="en-US" dirty="0"/>
           </a:p>
@@ -3837,7 +4202,7 @@
     </p:spTree>
     <p:extLst>
       <p:ext uri="{BB962C8B-B14F-4D97-AF65-F5344CB8AC3E}">
-        <p14:creationId xmlns:p14="http://schemas.microsoft.com/office/powerpoint/2010/main" val="23701965"/>
+        <p14:creationId xmlns:p14="http://schemas.microsoft.com/office/powerpoint/2010/main" val="1833187210"/>
       </p:ext>
     </p:extLst>
   </p:cSld>
@@ -4023,7 +4388,7 @@
             <a:fld id="{4EE133E6-1A71-3948-B0E1-530C95DEAFDE}" type="slidenum">
               <a:rPr lang="en-US" sz="800"/>
               <a:pPr/>
-              <a:t>31</a:t>
+              <a:t>33</a:t>
             </a:fld>
             <a:endParaRPr lang="en-US" sz="800" dirty="0"/>
           </a:p>
@@ -4088,14 +4453,12 @@
               <a:buNone/>
             </a:pPr>
             <a:r>
-              <a:rPr lang="en-US" dirty="0"/>
-              <a:t>8.2.4.5  </a:t>
-            </a:r>
-            <a:r>
-              <a:rPr lang="en-US" dirty="0">
-                <a:latin typeface="Arial" charset="0"/>
-              </a:rPr>
-              <a:t>EUI-64 Process or Randomly Generated (cont.)</a:t>
+              <a:rPr lang="en-US" dirty="0" smtClean="0"/>
+              <a:t>8.2.4.6  Dynamic</a:t>
+            </a:r>
+            <a:r>
+              <a:rPr lang="en-US" baseline="0" dirty="0" smtClean="0"/>
+              <a:t> Link-local Addresses</a:t>
             </a:r>
             <a:endParaRPr lang="en-US" dirty="0"/>
           </a:p>
@@ -4104,7 +4467,7 @@
     </p:spTree>
     <p:extLst>
       <p:ext uri="{BB962C8B-B14F-4D97-AF65-F5344CB8AC3E}">
-        <p14:creationId xmlns:p14="http://schemas.microsoft.com/office/powerpoint/2010/main" val="930282408"/>
+        <p14:creationId xmlns:p14="http://schemas.microsoft.com/office/powerpoint/2010/main" val="506498711"/>
       </p:ext>
     </p:extLst>
   </p:cSld>
@@ -4290,7 +4653,7 @@
             <a:fld id="{4EE133E6-1A71-3948-B0E1-530C95DEAFDE}" type="slidenum">
               <a:rPr lang="en-US" sz="800"/>
               <a:pPr/>
-              <a:t>32</a:t>
+              <a:t>34</a:t>
             </a:fld>
             <a:endParaRPr lang="en-US" sz="800" dirty="0"/>
           </a:p>
@@ -4355,14 +4718,14 @@
               <a:buNone/>
             </a:pPr>
             <a:r>
-              <a:rPr lang="en-US" dirty="0"/>
-              <a:t>8.2.4.5  </a:t>
-            </a:r>
-            <a:r>
-              <a:rPr lang="en-US" dirty="0">
+              <a:rPr lang="en-US" dirty="0" smtClean="0"/>
+              <a:t>8.2.4.6  </a:t>
+            </a:r>
+            <a:r>
+              <a:rPr lang="en-US" dirty="0" smtClean="0">
                 <a:latin typeface="Arial" charset="0"/>
               </a:rPr>
-              <a:t>EUI-64 Process or Randomly Generated (cont.)</a:t>
+              <a:t>Dynamic Link-local Addresses (cont.)</a:t>
             </a:r>
             <a:endParaRPr lang="en-US" dirty="0"/>
           </a:p>
@@ -4371,7 +4734,7 @@
     </p:spTree>
     <p:extLst>
       <p:ext uri="{BB962C8B-B14F-4D97-AF65-F5344CB8AC3E}">
-        <p14:creationId xmlns:p14="http://schemas.microsoft.com/office/powerpoint/2010/main" val="1833187210"/>
+        <p14:creationId xmlns:p14="http://schemas.microsoft.com/office/powerpoint/2010/main" val="2030010452"/>
       </p:ext>
     </p:extLst>
   </p:cSld>
@@ -4557,7 +4920,7 @@
             <a:fld id="{4EE133E6-1A71-3948-B0E1-530C95DEAFDE}" type="slidenum">
               <a:rPr lang="en-US" sz="800"/>
               <a:pPr/>
-              <a:t>33</a:t>
+              <a:t>35</a:t>
             </a:fld>
             <a:endParaRPr lang="en-US" sz="800" dirty="0"/>
           </a:p>
@@ -4622,11 +4985,11 @@
               <a:buNone/>
             </a:pPr>
             <a:r>
-              <a:rPr lang="en-US" dirty="0"/>
-              <a:t>8.2.4.6  Dynamic</a:t>
-            </a:r>
-            <a:r>
-              <a:rPr lang="en-US" baseline="0" dirty="0"/>
+              <a:rPr lang="en-US" dirty="0" smtClean="0"/>
+              <a:t>8.2.4.7  Static</a:t>
+            </a:r>
+            <a:r>
+              <a:rPr lang="en-US" baseline="0" dirty="0" smtClean="0"/>
               <a:t> Link-local Addresses</a:t>
             </a:r>
             <a:endParaRPr lang="en-US" dirty="0"/>
@@ -4636,7 +4999,7 @@
     </p:spTree>
     <p:extLst>
       <p:ext uri="{BB962C8B-B14F-4D97-AF65-F5344CB8AC3E}">
-        <p14:creationId xmlns:p14="http://schemas.microsoft.com/office/powerpoint/2010/main" val="506498711"/>
+        <p14:creationId xmlns:p14="http://schemas.microsoft.com/office/powerpoint/2010/main" val="3035704153"/>
       </p:ext>
     </p:extLst>
   </p:cSld>
@@ -4822,7 +5185,7 @@
             <a:fld id="{4EE133E6-1A71-3948-B0E1-530C95DEAFDE}" type="slidenum">
               <a:rPr lang="en-US" sz="800"/>
               <a:pPr/>
-              <a:t>34</a:t>
+              <a:t>36</a:t>
             </a:fld>
             <a:endParaRPr lang="en-US" sz="800" dirty="0"/>
           </a:p>
@@ -4879,6 +5242,30 @@
           <a:bodyPr/>
           <a:lstStyle/>
           <a:p>
+            <a:pPr marL="110605" indent="-110605" defTabSz="1001675" eaLnBrk="0" fontAlgn="base" hangingPunct="0">
+              <a:lnSpc>
+                <a:spcPct val="80000"/>
+              </a:lnSpc>
+              <a:spcBef>
+                <a:spcPct val="50000"/>
+              </a:spcBef>
+              <a:spcAft>
+                <a:spcPct val="0"/>
+              </a:spcAft>
+              <a:buSzPct val="100000"/>
+              <a:defRPr/>
+            </a:pPr>
+            <a:r>
+              <a:rPr lang="en-US" dirty="0" smtClean="0"/>
+              <a:t>8.2.4.7  Static</a:t>
+            </a:r>
+            <a:r>
+              <a:rPr lang="en-US" baseline="0" dirty="0" smtClean="0"/>
+              <a:t> Link-local Addresses (cont.)</a:t>
+            </a:r>
+            <a:endParaRPr lang="en-US" dirty="0" smtClean="0"/>
+          </a:p>
+          <a:p>
             <a:pPr>
               <a:lnSpc>
                 <a:spcPct val="80000"/>
@@ -4886,16 +5273,6 @@
               <a:buFontTx/>
               <a:buNone/>
             </a:pPr>
-            <a:r>
-              <a:rPr lang="en-US" dirty="0"/>
-              <a:t>8.2.4.6  </a:t>
-            </a:r>
-            <a:r>
-              <a:rPr lang="en-US" dirty="0">
-                <a:latin typeface="Arial" charset="0"/>
-              </a:rPr>
-              <a:t>Dynamic Link-local Addresses (cont.)</a:t>
-            </a:r>
             <a:endParaRPr lang="en-US" dirty="0"/>
           </a:p>
         </p:txBody>
@@ -4903,7 +5280,7 @@
     </p:spTree>
     <p:extLst>
       <p:ext uri="{BB962C8B-B14F-4D97-AF65-F5344CB8AC3E}">
-        <p14:creationId xmlns:p14="http://schemas.microsoft.com/office/powerpoint/2010/main" val="2030010452"/>
+        <p14:creationId xmlns:p14="http://schemas.microsoft.com/office/powerpoint/2010/main" val="1548682403"/>
       </p:ext>
     </p:extLst>
   </p:cSld>
@@ -5089,7 +5466,7 @@
             <a:fld id="{4EE133E6-1A71-3948-B0E1-530C95DEAFDE}" type="slidenum">
               <a:rPr lang="en-US" sz="800"/>
               <a:pPr/>
-              <a:t>35</a:t>
+              <a:t>37</a:t>
             </a:fld>
             <a:endParaRPr lang="en-US" sz="800" dirty="0"/>
           </a:p>
@@ -5154,12 +5531,8 @@
               <a:buNone/>
             </a:pPr>
             <a:r>
-              <a:rPr lang="en-US" dirty="0"/>
-              <a:t>8.2.4.7  Static</a:t>
-            </a:r>
-            <a:r>
-              <a:rPr lang="en-US" baseline="0" dirty="0"/>
-              <a:t> Link-local Addresses</a:t>
+              <a:rPr lang="en-US" dirty="0" smtClean="0"/>
+              <a:t>8.2.4.8 Verifying IPv6 Address Configuration</a:t>
             </a:r>
             <a:endParaRPr lang="en-US" dirty="0"/>
           </a:p>
@@ -5168,7 +5541,7 @@
     </p:spTree>
     <p:extLst>
       <p:ext uri="{BB962C8B-B14F-4D97-AF65-F5344CB8AC3E}">
-        <p14:creationId xmlns:p14="http://schemas.microsoft.com/office/powerpoint/2010/main" val="3035704153"/>
+        <p14:creationId xmlns:p14="http://schemas.microsoft.com/office/powerpoint/2010/main" val="2040059033"/>
       </p:ext>
     </p:extLst>
   </p:cSld>
@@ -5354,7 +5727,7 @@
             <a:fld id="{4EE133E6-1A71-3948-B0E1-530C95DEAFDE}" type="slidenum">
               <a:rPr lang="en-US" sz="800"/>
               <a:pPr/>
-              <a:t>36</a:t>
+              <a:t>38</a:t>
             </a:fld>
             <a:endParaRPr lang="en-US" sz="800" dirty="0"/>
           </a:p>
@@ -5411,30 +5784,6 @@
           <a:bodyPr/>
           <a:lstStyle/>
           <a:p>
-            <a:pPr marL="110605" indent="-110605" defTabSz="1001675" eaLnBrk="0" fontAlgn="base" hangingPunct="0">
-              <a:lnSpc>
-                <a:spcPct val="80000"/>
-              </a:lnSpc>
-              <a:spcBef>
-                <a:spcPct val="50000"/>
-              </a:spcBef>
-              <a:spcAft>
-                <a:spcPct val="0"/>
-              </a:spcAft>
-              <a:buSzPct val="100000"/>
-              <a:defRPr/>
-            </a:pPr>
-            <a:r>
-              <a:rPr lang="en-US" dirty="0"/>
-              <a:t>8.2.4.7  Static</a:t>
-            </a:r>
-            <a:r>
-              <a:rPr lang="en-US" baseline="0" dirty="0"/>
-              <a:t> Link-local Addresses (cont.)</a:t>
-            </a:r>
-            <a:endParaRPr lang="en-US" dirty="0"/>
-          </a:p>
-          <a:p>
             <a:pPr>
               <a:lnSpc>
                 <a:spcPct val="80000"/>
@@ -5442,6 +5791,10 @@
               <a:buFontTx/>
               <a:buNone/>
             </a:pPr>
+            <a:r>
+              <a:rPr lang="en-US" dirty="0" smtClean="0"/>
+              <a:t>8.2.4.8 Verifying IPv6 Address Configuration (cont.)</a:t>
+            </a:r>
             <a:endParaRPr lang="en-US" dirty="0"/>
           </a:p>
         </p:txBody>
@@ -5449,7 +5802,7 @@
     </p:spTree>
     <p:extLst>
       <p:ext uri="{BB962C8B-B14F-4D97-AF65-F5344CB8AC3E}">
-        <p14:creationId xmlns:p14="http://schemas.microsoft.com/office/powerpoint/2010/main" val="1548682403"/>
+        <p14:creationId xmlns:p14="http://schemas.microsoft.com/office/powerpoint/2010/main" val="4167531511"/>
       </p:ext>
     </p:extLst>
   </p:cSld>
@@ -5478,7 +5831,7 @@
       </p:grpSpPr>
       <p:sp>
         <p:nvSpPr>
-          <p:cNvPr id="59393" name="Rectangle 11"/>
+          <p:cNvPr id="61441" name="Rectangle 11"/>
           <p:cNvSpPr>
             <a:spLocks noGrp="1" noChangeArrowheads="1"/>
           </p:cNvSpPr>
@@ -5632,10 +5985,10 @@
             </a:lvl9pPr>
           </a:lstStyle>
           <a:p>
-            <a:fld id="{4EE133E6-1A71-3948-B0E1-530C95DEAFDE}" type="slidenum">
+            <a:fld id="{B0AE87D6-DF4D-4E45-B583-CE3BFF4036EF}" type="slidenum">
               <a:rPr lang="en-US" sz="800"/>
               <a:pPr/>
-              <a:t>37</a:t>
+              <a:t>39</a:t>
             </a:fld>
             <a:endParaRPr lang="en-US" sz="800" dirty="0"/>
           </a:p>
@@ -5643,7 +5996,7 @@
       </p:sp>
       <p:sp>
         <p:nvSpPr>
-          <p:cNvPr id="59394" name="Rectangle 2"/>
+          <p:cNvPr id="61442" name="Rectangle 2"/>
           <p:cNvSpPr>
             <a:spLocks noGrp="1" noRot="1" noChangeAspect="1" noChangeArrowheads="1" noTextEdit="1"/>
           </p:cNvSpPr>
@@ -5657,7 +6010,7 @@
       </p:sp>
       <p:sp>
         <p:nvSpPr>
-          <p:cNvPr id="59395" name="Rectangle 3"/>
+          <p:cNvPr id="61443" name="Rectangle 3"/>
           <p:cNvSpPr>
             <a:spLocks noGrp="1" noChangeArrowheads="1"/>
           </p:cNvSpPr>
@@ -5700,16 +6053,21 @@
               <a:buNone/>
             </a:pPr>
             <a:r>
-              <a:rPr lang="en-US" dirty="0"/>
-              <a:t>8.2.4.8 Verifying IPv6 Address Configuration</a:t>
-            </a:r>
+              <a:rPr lang="en-US" dirty="0" smtClean="0"/>
+              <a:t>8.2.5.1  Assigned</a:t>
+            </a:r>
+            <a:r>
+              <a:rPr lang="en-US" baseline="0" dirty="0" smtClean="0"/>
+              <a:t> IPv6 Multicast Addresses</a:t>
+            </a:r>
+            <a:endParaRPr lang="en-US" dirty="0"/>
           </a:p>
         </p:txBody>
       </p:sp>
     </p:spTree>
     <p:extLst>
       <p:ext uri="{BB962C8B-B14F-4D97-AF65-F5344CB8AC3E}">
-        <p14:creationId xmlns:p14="http://schemas.microsoft.com/office/powerpoint/2010/main" val="2040059033"/>
+        <p14:creationId xmlns:p14="http://schemas.microsoft.com/office/powerpoint/2010/main" val="2500687778"/>
       </p:ext>
     </p:extLst>
   </p:cSld>
@@ -5738,7 +6096,7 @@
       </p:grpSpPr>
       <p:sp>
         <p:nvSpPr>
-          <p:cNvPr id="59393" name="Rectangle 11"/>
+          <p:cNvPr id="61441" name="Rectangle 11"/>
           <p:cNvSpPr>
             <a:spLocks noGrp="1" noChangeArrowheads="1"/>
           </p:cNvSpPr>
@@ -5892,10 +6250,10 @@
             </a:lvl9pPr>
           </a:lstStyle>
           <a:p>
-            <a:fld id="{4EE133E6-1A71-3948-B0E1-530C95DEAFDE}" type="slidenum">
+            <a:fld id="{B0AE87D6-DF4D-4E45-B583-CE3BFF4036EF}" type="slidenum">
               <a:rPr lang="en-US" sz="800"/>
               <a:pPr/>
-              <a:t>38</a:t>
+              <a:t>40</a:t>
             </a:fld>
             <a:endParaRPr lang="en-US" sz="800" dirty="0"/>
           </a:p>
@@ -5903,7 +6261,7 @@
       </p:sp>
       <p:sp>
         <p:nvSpPr>
-          <p:cNvPr id="59394" name="Rectangle 2"/>
+          <p:cNvPr id="61442" name="Rectangle 2"/>
           <p:cNvSpPr>
             <a:spLocks noGrp="1" noRot="1" noChangeAspect="1" noChangeArrowheads="1" noTextEdit="1"/>
           </p:cNvSpPr>
@@ -5917,7 +6275,7 @@
       </p:sp>
       <p:sp>
         <p:nvSpPr>
-          <p:cNvPr id="59395" name="Rectangle 3"/>
+          <p:cNvPr id="61443" name="Rectangle 3"/>
           <p:cNvSpPr>
             <a:spLocks noGrp="1" noChangeArrowheads="1"/>
           </p:cNvSpPr>
@@ -5960,16 +6318,17 @@
               <a:buNone/>
             </a:pPr>
             <a:r>
-              <a:rPr lang="en-US" dirty="0"/>
-              <a:t>8.2.4.8 Verifying IPv6 Address Configuration (cont.)</a:t>
-            </a:r>
+              <a:rPr lang="en-US" dirty="0" smtClean="0"/>
+              <a:t>8.2.5.1  Assigned IPv6 Multicast Addresses (cont.)</a:t>
+            </a:r>
+            <a:endParaRPr lang="en-US" dirty="0"/>
           </a:p>
         </p:txBody>
       </p:sp>
     </p:spTree>
     <p:extLst>
       <p:ext uri="{BB962C8B-B14F-4D97-AF65-F5344CB8AC3E}">
-        <p14:creationId xmlns:p14="http://schemas.microsoft.com/office/powerpoint/2010/main" val="4167531511"/>
+        <p14:creationId xmlns:p14="http://schemas.microsoft.com/office/powerpoint/2010/main" val="768673095"/>
       </p:ext>
     </p:extLst>
   </p:cSld>
@@ -6155,7 +6514,7 @@
             <a:fld id="{126C4740-6176-6B42-AE8B-248565D05237}" type="slidenum">
               <a:rPr lang="en-US" sz="800"/>
               <a:pPr/>
-              <a:t>12</a:t>
+              <a:t>14</a:t>
             </a:fld>
             <a:endParaRPr lang="en-US" sz="800" dirty="0"/>
           </a:p>
@@ -6220,12 +6579,12 @@
               <a:buNone/>
             </a:pPr>
             <a:r>
-              <a:rPr lang="en-US" dirty="0"/>
-              <a:t>8.2.1.2  IPv4</a:t>
-            </a:r>
-            <a:r>
-              <a:rPr lang="en-US" baseline="0" dirty="0"/>
-              <a:t> and IPv6 Coexistence</a:t>
+              <a:rPr lang="en-US" dirty="0" smtClean="0"/>
+              <a:t>8.2.1.2 IPv4</a:t>
+            </a:r>
+            <a:r>
+              <a:rPr lang="en-US" baseline="0" dirty="0" smtClean="0"/>
+              <a:t> and IPV6 Coexistence (cont.)</a:t>
             </a:r>
             <a:endParaRPr lang="en-US" dirty="0"/>
           </a:p>
@@ -6234,7 +6593,7 @@
     </p:spTree>
     <p:extLst>
       <p:ext uri="{BB962C8B-B14F-4D97-AF65-F5344CB8AC3E}">
-        <p14:creationId xmlns:p14="http://schemas.microsoft.com/office/powerpoint/2010/main" val="3556055785"/>
+        <p14:creationId xmlns:p14="http://schemas.microsoft.com/office/powerpoint/2010/main" val="2378733314"/>
       </p:ext>
     </p:extLst>
   </p:cSld>
@@ -6420,7 +6779,7 @@
             <a:fld id="{B0AE87D6-DF4D-4E45-B583-CE3BFF4036EF}" type="slidenum">
               <a:rPr lang="en-US" sz="800"/>
               <a:pPr/>
-              <a:t>39</a:t>
+              <a:t>41</a:t>
             </a:fld>
             <a:endParaRPr lang="en-US" sz="800" dirty="0"/>
           </a:p>
@@ -6485,12 +6844,8 @@
               <a:buNone/>
             </a:pPr>
             <a:r>
-              <a:rPr lang="en-US" dirty="0"/>
-              <a:t>8.2.5.1  Assigned</a:t>
-            </a:r>
-            <a:r>
-              <a:rPr lang="en-US" baseline="0" dirty="0"/>
-              <a:t> IPv6 Multicast Addresses</a:t>
+              <a:rPr lang="en-US" dirty="0" smtClean="0"/>
+              <a:t>8.2.5.1  Assigned IPv6 Multicast Addresses (cont.)</a:t>
             </a:r>
             <a:endParaRPr lang="en-US" dirty="0"/>
           </a:p>
@@ -6499,7 +6854,7 @@
     </p:spTree>
     <p:extLst>
       <p:ext uri="{BB962C8B-B14F-4D97-AF65-F5344CB8AC3E}">
-        <p14:creationId xmlns:p14="http://schemas.microsoft.com/office/powerpoint/2010/main" val="2500687778"/>
+        <p14:creationId xmlns:p14="http://schemas.microsoft.com/office/powerpoint/2010/main" val="1671902261"/>
       </p:ext>
     </p:extLst>
   </p:cSld>
@@ -6685,7 +7040,7 @@
             <a:fld id="{B0AE87D6-DF4D-4E45-B583-CE3BFF4036EF}" type="slidenum">
               <a:rPr lang="en-US" sz="800"/>
               <a:pPr/>
-              <a:t>40</a:t>
+              <a:t>42</a:t>
             </a:fld>
             <a:endParaRPr lang="en-US" sz="800" dirty="0"/>
           </a:p>
@@ -6750,16 +7105,17 @@
               <a:buNone/>
             </a:pPr>
             <a:r>
-              <a:rPr lang="en-US" dirty="0"/>
-              <a:t>8.2.5.1  Assigned IPv6 Multicast Addresses (cont.)</a:t>
-            </a:r>
+              <a:rPr lang="en-US" dirty="0" smtClean="0"/>
+              <a:t>8.2.5.2  Solicited Node IPv6 Multicast Addresses</a:t>
+            </a:r>
+            <a:endParaRPr lang="en-US" dirty="0"/>
           </a:p>
         </p:txBody>
       </p:sp>
     </p:spTree>
     <p:extLst>
       <p:ext uri="{BB962C8B-B14F-4D97-AF65-F5344CB8AC3E}">
-        <p14:creationId xmlns:p14="http://schemas.microsoft.com/office/powerpoint/2010/main" val="768673095"/>
+        <p14:creationId xmlns:p14="http://schemas.microsoft.com/office/powerpoint/2010/main" val="3410590287"/>
       </p:ext>
     </p:extLst>
   </p:cSld>
@@ -6945,7 +7301,7 @@
             <a:fld id="{B0AE87D6-DF4D-4E45-B583-CE3BFF4036EF}" type="slidenum">
               <a:rPr lang="en-US" sz="800"/>
               <a:pPr/>
-              <a:t>41</a:t>
+              <a:t>43</a:t>
             </a:fld>
             <a:endParaRPr lang="en-US" sz="800" dirty="0"/>
           </a:p>
@@ -7010,529 +7366,10 @@
               <a:buNone/>
             </a:pPr>
             <a:r>
-              <a:rPr lang="en-US" dirty="0"/>
-              <a:t>8.2.5.1  Assigned IPv6 Multicast Addresses (cont.)</a:t>
-            </a:r>
-          </a:p>
-        </p:txBody>
-      </p:sp>
-    </p:spTree>
-    <p:extLst>
-      <p:ext uri="{BB962C8B-B14F-4D97-AF65-F5344CB8AC3E}">
-        <p14:creationId xmlns:p14="http://schemas.microsoft.com/office/powerpoint/2010/main" val="1671902261"/>
-      </p:ext>
-    </p:extLst>
-  </p:cSld>
-  <p:clrMapOvr>
-    <a:masterClrMapping/>
-  </p:clrMapOvr>
-</p:notes>
-</file>
-
-<file path=ppt/notesSlides/notesSlide33.xml><?xml version="1.0" encoding="utf-8"?>
-<p:notes xmlns:a="http://schemas.openxmlformats.org/drawingml/2006/main" xmlns:r="http://schemas.openxmlformats.org/officeDocument/2006/relationships" xmlns:p="http://schemas.openxmlformats.org/presentationml/2006/main">
-  <p:cSld>
-    <p:spTree>
-      <p:nvGrpSpPr>
-        <p:cNvPr id="1" name=""/>
-        <p:cNvGrpSpPr/>
-        <p:nvPr/>
-      </p:nvGrpSpPr>
-      <p:grpSpPr>
-        <a:xfrm>
-          <a:off x="0" y="0"/>
-          <a:ext cx="0" cy="0"/>
-          <a:chOff x="0" y="0"/>
-          <a:chExt cx="0" cy="0"/>
-        </a:xfrm>
-      </p:grpSpPr>
-      <p:sp>
-        <p:nvSpPr>
-          <p:cNvPr id="61441" name="Rectangle 11"/>
-          <p:cNvSpPr>
-            <a:spLocks noGrp="1" noChangeArrowheads="1"/>
-          </p:cNvSpPr>
-          <p:nvPr>
-            <p:ph type="sldNum" sz="quarter" idx="5"/>
-          </p:nvPr>
-        </p:nvSpPr>
-        <p:spPr>
-          <a:noFill/>
-          <a:ln/>
-          <a:extLst>
-            <a:ext uri="{909E8E84-426E-40DD-AFC4-6F175D3DCCD1}">
-              <a14:hiddenFill xmlns:a14="http://schemas.microsoft.com/office/drawing/2010/main">
-                <a:solidFill>
-                  <a:srgbClr val="FFFFFF"/>
-                </a:solidFill>
-              </a14:hiddenFill>
-            </a:ext>
-            <a:ext uri="{91240B29-F687-4F45-9708-019B960494DF}">
-              <a14:hiddenLine xmlns:a14="http://schemas.microsoft.com/office/drawing/2010/main" w="9525">
-                <a:solidFill>
-                  <a:srgbClr val="000000"/>
-                </a:solidFill>
-                <a:miter lim="800000"/>
-                <a:headEnd/>
-                <a:tailEnd/>
-              </a14:hiddenLine>
-            </a:ext>
-          </a:extLst>
-        </p:spPr>
-        <p:txBody>
-          <a:bodyPr/>
-          <a:lstStyle>
-            <a:lvl1pPr defTabSz="886397">
-              <a:defRPr sz="2400">
-                <a:solidFill>
-                  <a:schemeClr val="tx1"/>
-                </a:solidFill>
-                <a:latin typeface="Arial" charset="0"/>
-                <a:ea typeface="ＭＳ Ｐゴシック" charset="0"/>
-                <a:cs typeface="ＭＳ Ｐゴシック" charset="0"/>
-              </a:defRPr>
-            </a:lvl1pPr>
-            <a:lvl2pPr marL="729057" indent="-280406" defTabSz="886397">
-              <a:defRPr sz="2400">
-                <a:solidFill>
-                  <a:schemeClr val="tx1"/>
-                </a:solidFill>
-                <a:latin typeface="Arial" charset="0"/>
-                <a:ea typeface="ＭＳ Ｐゴシック" charset="0"/>
-              </a:defRPr>
-            </a:lvl2pPr>
-            <a:lvl3pPr marL="1121626" indent="-224325" defTabSz="886397">
-              <a:defRPr sz="2400">
-                <a:solidFill>
-                  <a:schemeClr val="tx1"/>
-                </a:solidFill>
-                <a:latin typeface="Arial" charset="0"/>
-                <a:ea typeface="ＭＳ Ｐゴシック" charset="0"/>
-              </a:defRPr>
-            </a:lvl3pPr>
-            <a:lvl4pPr marL="1570276" indent="-224325" defTabSz="886397">
-              <a:defRPr sz="2400">
-                <a:solidFill>
-                  <a:schemeClr val="tx1"/>
-                </a:solidFill>
-                <a:latin typeface="Arial" charset="0"/>
-                <a:ea typeface="ＭＳ Ｐゴシック" charset="0"/>
-              </a:defRPr>
-            </a:lvl4pPr>
-            <a:lvl5pPr marL="2018927" indent="-224325" defTabSz="886397">
-              <a:defRPr sz="2400">
-                <a:solidFill>
-                  <a:schemeClr val="tx1"/>
-                </a:solidFill>
-                <a:latin typeface="Arial" charset="0"/>
-                <a:ea typeface="ＭＳ Ｐゴシック" charset="0"/>
-              </a:defRPr>
-            </a:lvl5pPr>
-            <a:lvl6pPr marL="2467577" indent="-224325" algn="ctr" defTabSz="886397" eaLnBrk="0" fontAlgn="base" hangingPunct="0">
-              <a:lnSpc>
-                <a:spcPct val="90000"/>
-              </a:lnSpc>
-              <a:spcBef>
-                <a:spcPct val="0"/>
-              </a:spcBef>
-              <a:spcAft>
-                <a:spcPct val="0"/>
-              </a:spcAft>
-              <a:defRPr sz="2400">
-                <a:solidFill>
-                  <a:schemeClr val="tx1"/>
-                </a:solidFill>
-                <a:latin typeface="Arial" charset="0"/>
-                <a:ea typeface="ＭＳ Ｐゴシック" charset="0"/>
-              </a:defRPr>
-            </a:lvl6pPr>
-            <a:lvl7pPr marL="2916227" indent="-224325" algn="ctr" defTabSz="886397" eaLnBrk="0" fontAlgn="base" hangingPunct="0">
-              <a:lnSpc>
-                <a:spcPct val="90000"/>
-              </a:lnSpc>
-              <a:spcBef>
-                <a:spcPct val="0"/>
-              </a:spcBef>
-              <a:spcAft>
-                <a:spcPct val="0"/>
-              </a:spcAft>
-              <a:defRPr sz="2400">
-                <a:solidFill>
-                  <a:schemeClr val="tx1"/>
-                </a:solidFill>
-                <a:latin typeface="Arial" charset="0"/>
-                <a:ea typeface="ＭＳ Ｐゴシック" charset="0"/>
-              </a:defRPr>
-            </a:lvl7pPr>
-            <a:lvl8pPr marL="3364878" indent="-224325" algn="ctr" defTabSz="886397" eaLnBrk="0" fontAlgn="base" hangingPunct="0">
-              <a:lnSpc>
-                <a:spcPct val="90000"/>
-              </a:lnSpc>
-              <a:spcBef>
-                <a:spcPct val="0"/>
-              </a:spcBef>
-              <a:spcAft>
-                <a:spcPct val="0"/>
-              </a:spcAft>
-              <a:defRPr sz="2400">
-                <a:solidFill>
-                  <a:schemeClr val="tx1"/>
-                </a:solidFill>
-                <a:latin typeface="Arial" charset="0"/>
-                <a:ea typeface="ＭＳ Ｐゴシック" charset="0"/>
-              </a:defRPr>
-            </a:lvl8pPr>
-            <a:lvl9pPr marL="3813528" indent="-224325" algn="ctr" defTabSz="886397" eaLnBrk="0" fontAlgn="base" hangingPunct="0">
-              <a:lnSpc>
-                <a:spcPct val="90000"/>
-              </a:lnSpc>
-              <a:spcBef>
-                <a:spcPct val="0"/>
-              </a:spcBef>
-              <a:spcAft>
-                <a:spcPct val="0"/>
-              </a:spcAft>
-              <a:defRPr sz="2400">
-                <a:solidFill>
-                  <a:schemeClr val="tx1"/>
-                </a:solidFill>
-                <a:latin typeface="Arial" charset="0"/>
-                <a:ea typeface="ＭＳ Ｐゴシック" charset="0"/>
-              </a:defRPr>
-            </a:lvl9pPr>
-          </a:lstStyle>
-          <a:p>
-            <a:fld id="{B0AE87D6-DF4D-4E45-B583-CE3BFF4036EF}" type="slidenum">
-              <a:rPr lang="en-US" sz="800"/>
-              <a:pPr/>
-              <a:t>42</a:t>
-            </a:fld>
-            <a:endParaRPr lang="en-US" sz="800" dirty="0"/>
-          </a:p>
-        </p:txBody>
-      </p:sp>
-      <p:sp>
-        <p:nvSpPr>
-          <p:cNvPr id="61442" name="Rectangle 2"/>
-          <p:cNvSpPr>
-            <a:spLocks noGrp="1" noRot="1" noChangeAspect="1" noChangeArrowheads="1" noTextEdit="1"/>
-          </p:cNvSpPr>
-          <p:nvPr>
-            <p:ph type="sldImg"/>
-          </p:nvPr>
-        </p:nvSpPr>
-        <p:spPr>
-          <a:ln/>
-        </p:spPr>
-      </p:sp>
-      <p:sp>
-        <p:nvSpPr>
-          <p:cNvPr id="61443" name="Rectangle 3"/>
-          <p:cNvSpPr>
-            <a:spLocks noGrp="1" noChangeArrowheads="1"/>
-          </p:cNvSpPr>
-          <p:nvPr>
-            <p:ph type="body" idx="1"/>
-          </p:nvPr>
-        </p:nvSpPr>
-        <p:spPr>
-          <a:noFill/>
-          <a:ln/>
-          <a:extLst>
-            <a:ext uri="{909E8E84-426E-40DD-AFC4-6F175D3DCCD1}">
-              <a14:hiddenFill xmlns:a14="http://schemas.microsoft.com/office/drawing/2010/main">
-                <a:solidFill>
-                  <a:srgbClr val="FFFFFF"/>
-                </a:solidFill>
-              </a14:hiddenFill>
-            </a:ext>
-            <a:ext uri="{91240B29-F687-4F45-9708-019B960494DF}">
-              <a14:hiddenLine xmlns:a14="http://schemas.microsoft.com/office/drawing/2010/main" w="9525">
-                <a:solidFill>
-                  <a:srgbClr val="000000"/>
-                </a:solidFill>
-                <a:miter lim="800000"/>
-                <a:headEnd/>
-                <a:tailEnd/>
-              </a14:hiddenLine>
-            </a:ext>
-          </a:extLst>
-        </p:spPr>
-        <p:txBody>
-          <a:bodyPr/>
-          <a:lstStyle/>
-          <a:p>
-            <a:pPr>
-              <a:lnSpc>
-                <a:spcPct val="80000"/>
-              </a:lnSpc>
-              <a:buFontTx/>
-              <a:buNone/>
-            </a:pPr>
-            <a:r>
-              <a:rPr lang="en-US" dirty="0"/>
-              <a:t>8.2.5.2  Solicited Node IPv6 Multicast Addresses</a:t>
-            </a:r>
-          </a:p>
-        </p:txBody>
-      </p:sp>
-    </p:spTree>
-    <p:extLst>
-      <p:ext uri="{BB962C8B-B14F-4D97-AF65-F5344CB8AC3E}">
-        <p14:creationId xmlns:p14="http://schemas.microsoft.com/office/powerpoint/2010/main" val="3410590287"/>
-      </p:ext>
-    </p:extLst>
-  </p:cSld>
-  <p:clrMapOvr>
-    <a:masterClrMapping/>
-  </p:clrMapOvr>
-</p:notes>
-</file>
-
-<file path=ppt/notesSlides/notesSlide34.xml><?xml version="1.0" encoding="utf-8"?>
-<p:notes xmlns:a="http://schemas.openxmlformats.org/drawingml/2006/main" xmlns:r="http://schemas.openxmlformats.org/officeDocument/2006/relationships" xmlns:p="http://schemas.openxmlformats.org/presentationml/2006/main">
-  <p:cSld>
-    <p:spTree>
-      <p:nvGrpSpPr>
-        <p:cNvPr id="1" name=""/>
-        <p:cNvGrpSpPr/>
-        <p:nvPr/>
-      </p:nvGrpSpPr>
-      <p:grpSpPr>
-        <a:xfrm>
-          <a:off x="0" y="0"/>
-          <a:ext cx="0" cy="0"/>
-          <a:chOff x="0" y="0"/>
-          <a:chExt cx="0" cy="0"/>
-        </a:xfrm>
-      </p:grpSpPr>
-      <p:sp>
-        <p:nvSpPr>
-          <p:cNvPr id="61441" name="Rectangle 11"/>
-          <p:cNvSpPr>
-            <a:spLocks noGrp="1" noChangeArrowheads="1"/>
-          </p:cNvSpPr>
-          <p:nvPr>
-            <p:ph type="sldNum" sz="quarter" idx="5"/>
-          </p:nvPr>
-        </p:nvSpPr>
-        <p:spPr>
-          <a:noFill/>
-          <a:ln/>
-          <a:extLst>
-            <a:ext uri="{909E8E84-426E-40DD-AFC4-6F175D3DCCD1}">
-              <a14:hiddenFill xmlns:a14="http://schemas.microsoft.com/office/drawing/2010/main">
-                <a:solidFill>
-                  <a:srgbClr val="FFFFFF"/>
-                </a:solidFill>
-              </a14:hiddenFill>
-            </a:ext>
-            <a:ext uri="{91240B29-F687-4F45-9708-019B960494DF}">
-              <a14:hiddenLine xmlns:a14="http://schemas.microsoft.com/office/drawing/2010/main" w="9525">
-                <a:solidFill>
-                  <a:srgbClr val="000000"/>
-                </a:solidFill>
-                <a:miter lim="800000"/>
-                <a:headEnd/>
-                <a:tailEnd/>
-              </a14:hiddenLine>
-            </a:ext>
-          </a:extLst>
-        </p:spPr>
-        <p:txBody>
-          <a:bodyPr/>
-          <a:lstStyle>
-            <a:lvl1pPr defTabSz="886397">
-              <a:defRPr sz="2400">
-                <a:solidFill>
-                  <a:schemeClr val="tx1"/>
-                </a:solidFill>
-                <a:latin typeface="Arial" charset="0"/>
-                <a:ea typeface="ＭＳ Ｐゴシック" charset="0"/>
-                <a:cs typeface="ＭＳ Ｐゴシック" charset="0"/>
-              </a:defRPr>
-            </a:lvl1pPr>
-            <a:lvl2pPr marL="729057" indent="-280406" defTabSz="886397">
-              <a:defRPr sz="2400">
-                <a:solidFill>
-                  <a:schemeClr val="tx1"/>
-                </a:solidFill>
-                <a:latin typeface="Arial" charset="0"/>
-                <a:ea typeface="ＭＳ Ｐゴシック" charset="0"/>
-              </a:defRPr>
-            </a:lvl2pPr>
-            <a:lvl3pPr marL="1121626" indent="-224325" defTabSz="886397">
-              <a:defRPr sz="2400">
-                <a:solidFill>
-                  <a:schemeClr val="tx1"/>
-                </a:solidFill>
-                <a:latin typeface="Arial" charset="0"/>
-                <a:ea typeface="ＭＳ Ｐゴシック" charset="0"/>
-              </a:defRPr>
-            </a:lvl3pPr>
-            <a:lvl4pPr marL="1570276" indent="-224325" defTabSz="886397">
-              <a:defRPr sz="2400">
-                <a:solidFill>
-                  <a:schemeClr val="tx1"/>
-                </a:solidFill>
-                <a:latin typeface="Arial" charset="0"/>
-                <a:ea typeface="ＭＳ Ｐゴシック" charset="0"/>
-              </a:defRPr>
-            </a:lvl4pPr>
-            <a:lvl5pPr marL="2018927" indent="-224325" defTabSz="886397">
-              <a:defRPr sz="2400">
-                <a:solidFill>
-                  <a:schemeClr val="tx1"/>
-                </a:solidFill>
-                <a:latin typeface="Arial" charset="0"/>
-                <a:ea typeface="ＭＳ Ｐゴシック" charset="0"/>
-              </a:defRPr>
-            </a:lvl5pPr>
-            <a:lvl6pPr marL="2467577" indent="-224325" algn="ctr" defTabSz="886397" eaLnBrk="0" fontAlgn="base" hangingPunct="0">
-              <a:lnSpc>
-                <a:spcPct val="90000"/>
-              </a:lnSpc>
-              <a:spcBef>
-                <a:spcPct val="0"/>
-              </a:spcBef>
-              <a:spcAft>
-                <a:spcPct val="0"/>
-              </a:spcAft>
-              <a:defRPr sz="2400">
-                <a:solidFill>
-                  <a:schemeClr val="tx1"/>
-                </a:solidFill>
-                <a:latin typeface="Arial" charset="0"/>
-                <a:ea typeface="ＭＳ Ｐゴシック" charset="0"/>
-              </a:defRPr>
-            </a:lvl6pPr>
-            <a:lvl7pPr marL="2916227" indent="-224325" algn="ctr" defTabSz="886397" eaLnBrk="0" fontAlgn="base" hangingPunct="0">
-              <a:lnSpc>
-                <a:spcPct val="90000"/>
-              </a:lnSpc>
-              <a:spcBef>
-                <a:spcPct val="0"/>
-              </a:spcBef>
-              <a:spcAft>
-                <a:spcPct val="0"/>
-              </a:spcAft>
-              <a:defRPr sz="2400">
-                <a:solidFill>
-                  <a:schemeClr val="tx1"/>
-                </a:solidFill>
-                <a:latin typeface="Arial" charset="0"/>
-                <a:ea typeface="ＭＳ Ｐゴシック" charset="0"/>
-              </a:defRPr>
-            </a:lvl7pPr>
-            <a:lvl8pPr marL="3364878" indent="-224325" algn="ctr" defTabSz="886397" eaLnBrk="0" fontAlgn="base" hangingPunct="0">
-              <a:lnSpc>
-                <a:spcPct val="90000"/>
-              </a:lnSpc>
-              <a:spcBef>
-                <a:spcPct val="0"/>
-              </a:spcBef>
-              <a:spcAft>
-                <a:spcPct val="0"/>
-              </a:spcAft>
-              <a:defRPr sz="2400">
-                <a:solidFill>
-                  <a:schemeClr val="tx1"/>
-                </a:solidFill>
-                <a:latin typeface="Arial" charset="0"/>
-                <a:ea typeface="ＭＳ Ｐゴシック" charset="0"/>
-              </a:defRPr>
-            </a:lvl8pPr>
-            <a:lvl9pPr marL="3813528" indent="-224325" algn="ctr" defTabSz="886397" eaLnBrk="0" fontAlgn="base" hangingPunct="0">
-              <a:lnSpc>
-                <a:spcPct val="90000"/>
-              </a:lnSpc>
-              <a:spcBef>
-                <a:spcPct val="0"/>
-              </a:spcBef>
-              <a:spcAft>
-                <a:spcPct val="0"/>
-              </a:spcAft>
-              <a:defRPr sz="2400">
-                <a:solidFill>
-                  <a:schemeClr val="tx1"/>
-                </a:solidFill>
-                <a:latin typeface="Arial" charset="0"/>
-                <a:ea typeface="ＭＳ Ｐゴシック" charset="0"/>
-              </a:defRPr>
-            </a:lvl9pPr>
-          </a:lstStyle>
-          <a:p>
-            <a:fld id="{B0AE87D6-DF4D-4E45-B583-CE3BFF4036EF}" type="slidenum">
-              <a:rPr lang="en-US" sz="800"/>
-              <a:pPr/>
-              <a:t>43</a:t>
-            </a:fld>
-            <a:endParaRPr lang="en-US" sz="800" dirty="0"/>
-          </a:p>
-        </p:txBody>
-      </p:sp>
-      <p:sp>
-        <p:nvSpPr>
-          <p:cNvPr id="61442" name="Rectangle 2"/>
-          <p:cNvSpPr>
-            <a:spLocks noGrp="1" noRot="1" noChangeAspect="1" noChangeArrowheads="1" noTextEdit="1"/>
-          </p:cNvSpPr>
-          <p:nvPr>
-            <p:ph type="sldImg"/>
-          </p:nvPr>
-        </p:nvSpPr>
-        <p:spPr>
-          <a:ln/>
-        </p:spPr>
-      </p:sp>
-      <p:sp>
-        <p:nvSpPr>
-          <p:cNvPr id="61443" name="Rectangle 3"/>
-          <p:cNvSpPr>
-            <a:spLocks noGrp="1" noChangeArrowheads="1"/>
-          </p:cNvSpPr>
-          <p:nvPr>
-            <p:ph type="body" idx="1"/>
-          </p:nvPr>
-        </p:nvSpPr>
-        <p:spPr>
-          <a:noFill/>
-          <a:ln/>
-          <a:extLst>
-            <a:ext uri="{909E8E84-426E-40DD-AFC4-6F175D3DCCD1}">
-              <a14:hiddenFill xmlns:a14="http://schemas.microsoft.com/office/drawing/2010/main">
-                <a:solidFill>
-                  <a:srgbClr val="FFFFFF"/>
-                </a:solidFill>
-              </a14:hiddenFill>
-            </a:ext>
-            <a:ext uri="{91240B29-F687-4F45-9708-019B960494DF}">
-              <a14:hiddenLine xmlns:a14="http://schemas.microsoft.com/office/drawing/2010/main" w="9525">
-                <a:solidFill>
-                  <a:srgbClr val="000000"/>
-                </a:solidFill>
-                <a:miter lim="800000"/>
-                <a:headEnd/>
-                <a:tailEnd/>
-              </a14:hiddenLine>
-            </a:ext>
-          </a:extLst>
-        </p:spPr>
-        <p:txBody>
-          <a:bodyPr/>
-          <a:lstStyle/>
-          <a:p>
-            <a:pPr>
-              <a:lnSpc>
-                <a:spcPct val="80000"/>
-              </a:lnSpc>
-              <a:buFontTx/>
-              <a:buNone/>
-            </a:pPr>
-            <a:r>
-              <a:rPr lang="en-US" dirty="0"/>
+              <a:rPr lang="en-US" dirty="0" smtClean="0"/>
               <a:t>8.2.5.2  Solicited Node IPv6 Multicast Addresses (cont.)</a:t>
             </a:r>
+            <a:endParaRPr lang="en-US" dirty="0"/>
           </a:p>
         </p:txBody>
       </p:sp>
@@ -7568,7 +7405,7 @@
       </p:grpSpPr>
       <p:sp>
         <p:nvSpPr>
-          <p:cNvPr id="51201" name="Rectangle 11"/>
+          <p:cNvPr id="59393" name="Rectangle 11"/>
           <p:cNvSpPr>
             <a:spLocks noGrp="1" noChangeArrowheads="1"/>
           </p:cNvSpPr>
@@ -7722,10 +7559,10 @@
             </a:lvl9pPr>
           </a:lstStyle>
           <a:p>
-            <a:fld id="{126C4740-6176-6B42-AE8B-248565D05237}" type="slidenum">
+            <a:fld id="{4EE133E6-1A71-3948-B0E1-530C95DEAFDE}" type="slidenum">
               <a:rPr lang="en-US" sz="800"/>
               <a:pPr/>
-              <a:t>13</a:t>
+              <a:t>15</a:t>
             </a:fld>
             <a:endParaRPr lang="en-US" sz="800" dirty="0"/>
           </a:p>
@@ -7733,7 +7570,7 @@
       </p:sp>
       <p:sp>
         <p:nvSpPr>
-          <p:cNvPr id="51202" name="Rectangle 2"/>
+          <p:cNvPr id="59394" name="Rectangle 2"/>
           <p:cNvSpPr>
             <a:spLocks noGrp="1" noRot="1" noChangeAspect="1" noChangeArrowheads="1" noTextEdit="1"/>
           </p:cNvSpPr>
@@ -7747,7 +7584,7 @@
       </p:sp>
       <p:sp>
         <p:nvSpPr>
-          <p:cNvPr id="51203" name="Rectangle 3"/>
+          <p:cNvPr id="59395" name="Rectangle 3"/>
           <p:cNvSpPr>
             <a:spLocks noGrp="1" noChangeArrowheads="1"/>
           </p:cNvSpPr>
@@ -7790,16 +7627,17 @@
               <a:buNone/>
             </a:pPr>
             <a:r>
-              <a:rPr lang="en-US" dirty="0"/>
-              <a:t>8.2.1.2  IPv4 and IPv6 Coexistence</a:t>
-            </a:r>
+              <a:rPr lang="en-US" dirty="0" smtClean="0"/>
+              <a:t>8.2.3.2  IPv6 Prefix Length</a:t>
+            </a:r>
+            <a:endParaRPr lang="en-US" dirty="0"/>
           </a:p>
         </p:txBody>
       </p:sp>
     </p:spTree>
     <p:extLst>
       <p:ext uri="{BB962C8B-B14F-4D97-AF65-F5344CB8AC3E}">
-        <p14:creationId xmlns:p14="http://schemas.microsoft.com/office/powerpoint/2010/main" val="3848619941"/>
+        <p14:creationId xmlns:p14="http://schemas.microsoft.com/office/powerpoint/2010/main" val="3670492007"/>
       </p:ext>
     </p:extLst>
   </p:cSld>
@@ -7828,7 +7666,7 @@
       </p:grpSpPr>
       <p:sp>
         <p:nvSpPr>
-          <p:cNvPr id="51201" name="Rectangle 11"/>
+          <p:cNvPr id="59393" name="Rectangle 11"/>
           <p:cNvSpPr>
             <a:spLocks noGrp="1" noChangeArrowheads="1"/>
           </p:cNvSpPr>
@@ -7982,10 +7820,10 @@
             </a:lvl9pPr>
           </a:lstStyle>
           <a:p>
-            <a:fld id="{126C4740-6176-6B42-AE8B-248565D05237}" type="slidenum">
+            <a:fld id="{4EE133E6-1A71-3948-B0E1-530C95DEAFDE}" type="slidenum">
               <a:rPr lang="en-US" sz="800"/>
               <a:pPr/>
-              <a:t>14</a:t>
+              <a:t>16</a:t>
             </a:fld>
             <a:endParaRPr lang="en-US" sz="800" dirty="0"/>
           </a:p>
@@ -7993,7 +7831,7 @@
       </p:sp>
       <p:sp>
         <p:nvSpPr>
-          <p:cNvPr id="51202" name="Rectangle 2"/>
+          <p:cNvPr id="59394" name="Rectangle 2"/>
           <p:cNvSpPr>
             <a:spLocks noGrp="1" noRot="1" noChangeAspect="1" noChangeArrowheads="1" noTextEdit="1"/>
           </p:cNvSpPr>
@@ -8007,7 +7845,7 @@
       </p:sp>
       <p:sp>
         <p:nvSpPr>
-          <p:cNvPr id="51203" name="Rectangle 3"/>
+          <p:cNvPr id="59395" name="Rectangle 3"/>
           <p:cNvSpPr>
             <a:spLocks noGrp="1" noChangeArrowheads="1"/>
           </p:cNvSpPr>
@@ -8050,12 +7888,12 @@
               <a:buNone/>
             </a:pPr>
             <a:r>
-              <a:rPr lang="en-US" dirty="0"/>
-              <a:t>8.2.1.2 IPv4</a:t>
-            </a:r>
-            <a:r>
-              <a:rPr lang="en-US" baseline="0" dirty="0"/>
-              <a:t> and IPV6 Coexistence (cont.)</a:t>
+              <a:rPr lang="en-US" dirty="0" smtClean="0"/>
+              <a:t>8.2.3.1  IPv6</a:t>
+            </a:r>
+            <a:r>
+              <a:rPr lang="en-US" baseline="0" dirty="0" smtClean="0"/>
+              <a:t> Address Types</a:t>
             </a:r>
             <a:endParaRPr lang="en-US" dirty="0"/>
           </a:p>
@@ -8064,7 +7902,7 @@
     </p:spTree>
     <p:extLst>
       <p:ext uri="{BB962C8B-B14F-4D97-AF65-F5344CB8AC3E}">
-        <p14:creationId xmlns:p14="http://schemas.microsoft.com/office/powerpoint/2010/main" val="2378733314"/>
+        <p14:creationId xmlns:p14="http://schemas.microsoft.com/office/powerpoint/2010/main" val="1463685246"/>
       </p:ext>
     </p:extLst>
   </p:cSld>
@@ -8250,7 +8088,7 @@
             <a:fld id="{4EE133E6-1A71-3948-B0E1-530C95DEAFDE}" type="slidenum">
               <a:rPr lang="en-US" sz="800"/>
               <a:pPr/>
-              <a:t>15</a:t>
+              <a:t>17</a:t>
             </a:fld>
             <a:endParaRPr lang="en-US" sz="800" dirty="0"/>
           </a:p>
@@ -8315,16 +8153,21 @@
               <a:buNone/>
             </a:pPr>
             <a:r>
-              <a:rPr lang="en-US" dirty="0"/>
-              <a:t>8.2.3.2  IPv6 Prefix Length</a:t>
-            </a:r>
+              <a:rPr lang="en-US" dirty="0" smtClean="0"/>
+              <a:t>8.2.3.1/8.2.3.3  IPv6</a:t>
+            </a:r>
+            <a:r>
+              <a:rPr lang="en-US" baseline="0" dirty="0" smtClean="0"/>
+              <a:t> Unicast Addresses</a:t>
+            </a:r>
+            <a:endParaRPr lang="en-US" dirty="0"/>
           </a:p>
         </p:txBody>
       </p:sp>
     </p:spTree>
     <p:extLst>
       <p:ext uri="{BB962C8B-B14F-4D97-AF65-F5344CB8AC3E}">
-        <p14:creationId xmlns:p14="http://schemas.microsoft.com/office/powerpoint/2010/main" val="3670492007"/>
+        <p14:creationId xmlns:p14="http://schemas.microsoft.com/office/powerpoint/2010/main" val="1663675421"/>
       </p:ext>
     </p:extLst>
   </p:cSld>
@@ -8510,7 +8353,7 @@
             <a:fld id="{4EE133E6-1A71-3948-B0E1-530C95DEAFDE}" type="slidenum">
               <a:rPr lang="en-US" sz="800"/>
               <a:pPr/>
-              <a:t>16</a:t>
+              <a:t>18</a:t>
             </a:fld>
             <a:endParaRPr lang="en-US" sz="800" dirty="0"/>
           </a:p>
@@ -8575,12 +8418,8 @@
               <a:buNone/>
             </a:pPr>
             <a:r>
-              <a:rPr lang="en-US" dirty="0"/>
-              <a:t>8.2.3.1  IPv6</a:t>
-            </a:r>
-            <a:r>
-              <a:rPr lang="en-US" baseline="0" dirty="0"/>
-              <a:t> Address Types</a:t>
+              <a:rPr lang="en-US" dirty="0" smtClean="0"/>
+              <a:t>8.2.3.3  IPv6 Unicast Addresses (cont.)</a:t>
             </a:r>
             <a:endParaRPr lang="en-US" dirty="0"/>
           </a:p>
@@ -8589,7 +8428,7 @@
     </p:spTree>
     <p:extLst>
       <p:ext uri="{BB962C8B-B14F-4D97-AF65-F5344CB8AC3E}">
-        <p14:creationId xmlns:p14="http://schemas.microsoft.com/office/powerpoint/2010/main" val="1463685246"/>
+        <p14:creationId xmlns:p14="http://schemas.microsoft.com/office/powerpoint/2010/main" val="3292512762"/>
       </p:ext>
     </p:extLst>
   </p:cSld>
@@ -8775,7 +8614,7 @@
             <a:fld id="{4EE133E6-1A71-3948-B0E1-530C95DEAFDE}" type="slidenum">
               <a:rPr lang="en-US" sz="800"/>
               <a:pPr/>
-              <a:t>17</a:t>
+              <a:t>19</a:t>
             </a:fld>
             <a:endParaRPr lang="en-US" sz="800" dirty="0"/>
           </a:p>
@@ -8840,12 +8679,12 @@
               <a:buNone/>
             </a:pPr>
             <a:r>
-              <a:rPr lang="en-US" dirty="0"/>
-              <a:t>8.2.3.1/8.2.3.3  IPv6</a:t>
-            </a:r>
-            <a:r>
-              <a:rPr lang="en-US" baseline="0" dirty="0"/>
-              <a:t> Unicast Addresses</a:t>
+              <a:rPr lang="en-US" dirty="0" smtClean="0"/>
+              <a:t>8.2.3.3</a:t>
+            </a:r>
+            <a:r>
+              <a:rPr lang="en-US" baseline="0" dirty="0" smtClean="0"/>
+              <a:t>  IPv6 Unicast Addresses (cont.)</a:t>
             </a:r>
             <a:endParaRPr lang="en-US" dirty="0"/>
           </a:p>
@@ -8854,7 +8693,7 @@
     </p:spTree>
     <p:extLst>
       <p:ext uri="{BB962C8B-B14F-4D97-AF65-F5344CB8AC3E}">
-        <p14:creationId xmlns:p14="http://schemas.microsoft.com/office/powerpoint/2010/main" val="1663675421"/>
+        <p14:creationId xmlns:p14="http://schemas.microsoft.com/office/powerpoint/2010/main" val="2523864835"/>
       </p:ext>
     </p:extLst>
   </p:cSld>
@@ -9040,7 +8879,7 @@
             <a:fld id="{4EE133E6-1A71-3948-B0E1-530C95DEAFDE}" type="slidenum">
               <a:rPr lang="en-US" sz="800"/>
               <a:pPr/>
-              <a:t>18</a:t>
+              <a:t>20</a:t>
             </a:fld>
             <a:endParaRPr lang="en-US" sz="800" dirty="0"/>
           </a:p>
@@ -9105,16 +8944,21 @@
               <a:buNone/>
             </a:pPr>
             <a:r>
-              <a:rPr lang="en-US" dirty="0"/>
-              <a:t>8.2.3.3  IPv6 Unicast Addresses (cont.)</a:t>
-            </a:r>
+              <a:rPr lang="en-US" dirty="0" smtClean="0"/>
+              <a:t>8.2.3.3  IPv6 Unicast</a:t>
+            </a:r>
+            <a:r>
+              <a:rPr lang="en-US" baseline="0" dirty="0" smtClean="0"/>
+              <a:t> Addresses (cont.)</a:t>
+            </a:r>
+            <a:endParaRPr lang="en-US" dirty="0"/>
           </a:p>
         </p:txBody>
       </p:sp>
     </p:spTree>
     <p:extLst>
       <p:ext uri="{BB962C8B-B14F-4D97-AF65-F5344CB8AC3E}">
-        <p14:creationId xmlns:p14="http://schemas.microsoft.com/office/powerpoint/2010/main" val="3292512762"/>
+        <p14:creationId xmlns:p14="http://schemas.microsoft.com/office/powerpoint/2010/main" val="3304898829"/>
       </p:ext>
     </p:extLst>
   </p:cSld>
@@ -9255,7 +9099,7 @@
           <a:p>
             <a:fld id="{97B33207-BA23-4F25-9AB9-C0CEEC03B0F6}" type="datetimeFigureOut">
               <a:rPr lang="en-GB" smtClean="0"/>
-              <a:t>12/08/2026</a:t>
+              <a:t>04/01/2023</a:t>
             </a:fld>
             <a:endParaRPr lang="en-GB"/>
           </a:p>
@@ -9425,7 +9269,7 @@
           <a:p>
             <a:fld id="{97B33207-BA23-4F25-9AB9-C0CEEC03B0F6}" type="datetimeFigureOut">
               <a:rPr lang="en-GB" smtClean="0"/>
-              <a:t>12/08/2026</a:t>
+              <a:t>04/01/2023</a:t>
             </a:fld>
             <a:endParaRPr lang="en-GB"/>
           </a:p>
@@ -9605,7 +9449,7 @@
           <a:p>
             <a:fld id="{97B33207-BA23-4F25-9AB9-C0CEEC03B0F6}" type="datetimeFigureOut">
               <a:rPr lang="en-GB" smtClean="0"/>
-              <a:t>12/08/2026</a:t>
+              <a:t>04/01/2023</a:t>
             </a:fld>
             <a:endParaRPr lang="en-GB"/>
           </a:p>
@@ -9775,7 +9619,7 @@
           <a:p>
             <a:fld id="{97B33207-BA23-4F25-9AB9-C0CEEC03B0F6}" type="datetimeFigureOut">
               <a:rPr lang="en-GB" smtClean="0"/>
-              <a:t>12/08/2026</a:t>
+              <a:t>04/01/2023</a:t>
             </a:fld>
             <a:endParaRPr lang="en-GB"/>
           </a:p>
@@ -10021,7 +9865,7 @@
           <a:p>
             <a:fld id="{97B33207-BA23-4F25-9AB9-C0CEEC03B0F6}" type="datetimeFigureOut">
               <a:rPr lang="en-GB" smtClean="0"/>
-              <a:t>12/08/2026</a:t>
+              <a:t>04/01/2023</a:t>
             </a:fld>
             <a:endParaRPr lang="en-GB"/>
           </a:p>
@@ -10253,7 +10097,7 @@
           <a:p>
             <a:fld id="{97B33207-BA23-4F25-9AB9-C0CEEC03B0F6}" type="datetimeFigureOut">
               <a:rPr lang="en-GB" smtClean="0"/>
-              <a:t>12/08/2026</a:t>
+              <a:t>04/01/2023</a:t>
             </a:fld>
             <a:endParaRPr lang="en-GB"/>
           </a:p>
@@ -10620,7 +10464,7 @@
           <a:p>
             <a:fld id="{97B33207-BA23-4F25-9AB9-C0CEEC03B0F6}" type="datetimeFigureOut">
               <a:rPr lang="en-GB" smtClean="0"/>
-              <a:t>12/08/2026</a:t>
+              <a:t>04/01/2023</a:t>
             </a:fld>
             <a:endParaRPr lang="en-GB"/>
           </a:p>
@@ -10738,7 +10582,7 @@
           <a:p>
             <a:fld id="{97B33207-BA23-4F25-9AB9-C0CEEC03B0F6}" type="datetimeFigureOut">
               <a:rPr lang="en-GB" smtClean="0"/>
-              <a:t>12/08/2026</a:t>
+              <a:t>04/01/2023</a:t>
             </a:fld>
             <a:endParaRPr lang="en-GB"/>
           </a:p>
@@ -10833,7 +10677,7 @@
           <a:p>
             <a:fld id="{97B33207-BA23-4F25-9AB9-C0CEEC03B0F6}" type="datetimeFigureOut">
               <a:rPr lang="en-GB" smtClean="0"/>
-              <a:t>12/08/2026</a:t>
+              <a:t>04/01/2023</a:t>
             </a:fld>
             <a:endParaRPr lang="en-GB"/>
           </a:p>
@@ -11110,7 +10954,7 @@
           <a:p>
             <a:fld id="{97B33207-BA23-4F25-9AB9-C0CEEC03B0F6}" type="datetimeFigureOut">
               <a:rPr lang="en-GB" smtClean="0"/>
-              <a:t>12/08/2026</a:t>
+              <a:t>04/01/2023</a:t>
             </a:fld>
             <a:endParaRPr lang="en-GB"/>
           </a:p>
@@ -11363,7 +11207,7 @@
           <a:p>
             <a:fld id="{97B33207-BA23-4F25-9AB9-C0CEEC03B0F6}" type="datetimeFigureOut">
               <a:rPr lang="en-GB" smtClean="0"/>
-              <a:t>12/08/2026</a:t>
+              <a:t>04/01/2023</a:t>
             </a:fld>
             <a:endParaRPr lang="en-GB"/>
           </a:p>
@@ -11576,7 +11420,7 @@
           <a:p>
             <a:fld id="{97B33207-BA23-4F25-9AB9-C0CEEC03B0F6}" type="datetimeFigureOut">
               <a:rPr lang="en-GB" smtClean="0"/>
-              <a:t>12/08/2026</a:t>
+              <a:t>04/01/2023</a:t>
             </a:fld>
             <a:endParaRPr lang="en-GB"/>
           </a:p>
@@ -11996,7 +11840,7 @@
           <p:nvPr/>
         </p:nvPicPr>
         <p:blipFill>
-          <a:blip r:embed="rId3">
+          <a:blip r:embed="rId2">
             <a:extLst>
               <a:ext uri="{28A0092B-C50C-407E-A947-70E740481C1C}">
                 <a14:useLocalDpi xmlns:a14="http://schemas.microsoft.com/office/drawing/2010/main" val="0"/>
@@ -12032,7 +11876,7 @@
           <p:nvPr/>
         </p:nvPicPr>
         <p:blipFill>
-          <a:blip r:embed="rId4">
+          <a:blip r:embed="rId3">
             <a:extLst>
               <a:ext uri="{28A0092B-C50C-407E-A947-70E740481C1C}">
                 <a14:useLocalDpi xmlns:a14="http://schemas.microsoft.com/office/drawing/2010/main" val="0"/>
@@ -12133,7 +11977,7 @@
           <p:nvPr/>
         </p:nvPicPr>
         <p:blipFill>
-          <a:blip r:embed="rId5" cstate="print">
+          <a:blip r:embed="rId4" cstate="print">
             <a:extLst>
               <a:ext uri="{28A0092B-C50C-407E-A947-70E740481C1C}">
                 <a14:useLocalDpi xmlns:a14="http://schemas.microsoft.com/office/drawing/2010/main" val="0"/>
@@ -12163,7 +12007,7 @@
           <p:nvPr/>
         </p:nvPicPr>
         <p:blipFill>
-          <a:blip r:embed="rId6">
+          <a:blip r:embed="rId5">
             <a:extLst>
               <a:ext uri="{28A0092B-C50C-407E-A947-70E740481C1C}">
                 <a14:useLocalDpi xmlns:a14="http://schemas.microsoft.com/office/drawing/2010/main" val="0"/>
@@ -12204,7 +12048,7 @@
           <p:nvPr/>
         </p:nvPicPr>
         <p:blipFill>
-          <a:blip r:embed="rId7"/>
+          <a:blip r:embed="rId6"/>
           <a:stretch>
             <a:fillRect/>
           </a:stretch>
@@ -12291,6 +12135,13 @@
   <p:clrMapOvr>
     <a:masterClrMapping/>
   </p:clrMapOvr>
+  <p:timing>
+    <p:tnLst>
+      <p:par>
+        <p:cTn id="1" dur="indefinite" restart="never" nodeType="tmRoot"/>
+      </p:par>
+    </p:tnLst>
+  </p:timing>
 </p:sld>
 </file>
 
@@ -12590,7 +12441,7 @@
         </p:blipFill>
         <p:spPr>
           <a:xfrm>
-            <a:off x="1470719" y="920975"/>
+            <a:off x="1304465" y="920975"/>
             <a:ext cx="8564170" cy="4334480"/>
           </a:xfrm>
           <a:prstGeom prst="rect">
@@ -12632,6 +12483,13 @@
   <p:clrMapOvr>
     <a:masterClrMapping/>
   </p:clrMapOvr>
+  <p:timing>
+    <p:tnLst>
+      <p:par>
+        <p:cTn id="1" dur="indefinite" restart="never" nodeType="tmRoot"/>
+      </p:par>
+    </p:tnLst>
+  </p:timing>
 </p:sld>
 </file>
 
@@ -13033,6 +12891,13 @@
   <p:clrMapOvr>
     <a:masterClrMapping/>
   </p:clrMapOvr>
+  <p:timing>
+    <p:tnLst>
+      <p:par>
+        <p:cTn id="1" dur="indefinite" restart="never" nodeType="tmRoot"/>
+      </p:par>
+    </p:tnLst>
+  </p:timing>
 </p:sld>
 </file>
 
@@ -13082,17 +12947,26 @@
               </a:rPr>
               <a:t>IPv4 Issues</a:t>
             </a:r>
+            <a:r>
+              <a:rPr lang="en-US" dirty="0">
+                <a:latin typeface="Arial" charset="0"/>
+              </a:rPr>
+              <a:t/>
+            </a:r>
             <a:br>
               <a:rPr lang="en-US" dirty="0">
                 <a:latin typeface="Arial" charset="0"/>
               </a:rPr>
             </a:br>
             <a:r>
-              <a:rPr lang="en-US" dirty="0">
+              <a:rPr lang="en-US" dirty="0" smtClean="0">
                 <a:latin typeface="Arial" charset="0"/>
               </a:rPr>
               <a:t>IPv4 and IPv6 Coexistence</a:t>
             </a:r>
+            <a:endParaRPr lang="en-US" dirty="0">
+              <a:latin typeface="Arial" charset="0"/>
+            </a:endParaRPr>
           </a:p>
         </p:txBody>
       </p:sp>
@@ -13314,17 +13188,26 @@
               </a:rPr>
               <a:t>IPv4 Issues</a:t>
             </a:r>
+            <a:r>
+              <a:rPr lang="en-US" dirty="0">
+                <a:latin typeface="Arial" charset="0"/>
+              </a:rPr>
+              <a:t/>
+            </a:r>
             <a:br>
               <a:rPr lang="en-US" dirty="0">
                 <a:latin typeface="Arial" charset="0"/>
               </a:rPr>
             </a:br>
             <a:r>
-              <a:rPr lang="en-US" dirty="0">
+              <a:rPr lang="en-US" dirty="0" smtClean="0">
                 <a:latin typeface="Arial" charset="0"/>
               </a:rPr>
               <a:t>IPv4 and IPv6 Coexistence (cont.)</a:t>
             </a:r>
+            <a:endParaRPr lang="en-US" dirty="0">
+              <a:latin typeface="Arial" charset="0"/>
+            </a:endParaRPr>
           </a:p>
         </p:txBody>
       </p:sp>
@@ -13503,17 +13386,26 @@
               </a:rPr>
               <a:t>IPv4 Issues</a:t>
             </a:r>
+            <a:r>
+              <a:rPr lang="en-US" dirty="0">
+                <a:latin typeface="Arial" charset="0"/>
+              </a:rPr>
+              <a:t/>
+            </a:r>
             <a:br>
               <a:rPr lang="en-US" dirty="0">
                 <a:latin typeface="Arial" charset="0"/>
               </a:rPr>
             </a:br>
             <a:r>
-              <a:rPr lang="en-US" dirty="0">
+              <a:rPr lang="en-US" dirty="0" smtClean="0">
                 <a:latin typeface="Arial" charset="0"/>
               </a:rPr>
               <a:t>IPv4 and IPv6 Coexistence (cont.)</a:t>
             </a:r>
+            <a:endParaRPr lang="en-US" dirty="0">
+              <a:latin typeface="Arial" charset="0"/>
+            </a:endParaRPr>
           </a:p>
         </p:txBody>
       </p:sp>
@@ -13689,17 +13581,26 @@
               </a:rPr>
               <a:t>Types of IPv6 Addresses</a:t>
             </a:r>
+            <a:r>
+              <a:rPr lang="en-US" dirty="0">
+                <a:latin typeface="Arial" charset="0"/>
+              </a:rPr>
+              <a:t/>
+            </a:r>
             <a:br>
               <a:rPr lang="en-US" dirty="0">
                 <a:latin typeface="Arial" charset="0"/>
               </a:rPr>
             </a:br>
             <a:r>
-              <a:rPr lang="en-US" dirty="0">
+              <a:rPr lang="en-US" dirty="0" smtClean="0">
                 <a:latin typeface="Arial" charset="0"/>
               </a:rPr>
               <a:t>IPv6 Prefix Length</a:t>
             </a:r>
+            <a:endParaRPr lang="en-US" dirty="0">
+              <a:latin typeface="Arial" charset="0"/>
+            </a:endParaRPr>
           </a:p>
         </p:txBody>
       </p:sp>
@@ -13740,7 +13641,7 @@
               <a:buChar char="§"/>
             </a:pPr>
             <a:r>
-              <a:rPr lang="en-US" dirty="0"/>
+              <a:rPr lang="en-US" dirty="0" smtClean="0"/>
               <a:t>IPv6 address/prefix length</a:t>
             </a:r>
           </a:p>
@@ -13751,7 +13652,11 @@
             </a:pPr>
             <a:r>
               <a:rPr lang="en-US" dirty="0"/>
-              <a:t>Prefix length can range from 0 to 128</a:t>
+              <a:t>P</a:t>
+            </a:r>
+            <a:r>
+              <a:rPr lang="en-US" dirty="0" smtClean="0"/>
+              <a:t>refix length can range from 0 to 128</a:t>
             </a:r>
           </a:p>
           <a:p>
@@ -13760,7 +13665,7 @@
               <a:buChar char="§"/>
             </a:pPr>
             <a:r>
-              <a:rPr lang="en-US" dirty="0"/>
+              <a:rPr lang="en-US" dirty="0" smtClean="0"/>
               <a:t>Typical prefix length is /64</a:t>
             </a:r>
           </a:p>
@@ -13936,17 +13841,26 @@
               </a:rPr>
               <a:t>Types of IPv6 Addresses</a:t>
             </a:r>
+            <a:r>
+              <a:rPr lang="en-US" dirty="0">
+                <a:latin typeface="Arial" charset="0"/>
+              </a:rPr>
+              <a:t/>
+            </a:r>
             <a:br>
               <a:rPr lang="en-US" dirty="0">
                 <a:latin typeface="Arial" charset="0"/>
               </a:rPr>
             </a:br>
             <a:r>
-              <a:rPr lang="en-US" dirty="0">
+              <a:rPr lang="en-US" dirty="0" smtClean="0">
                 <a:latin typeface="Arial" charset="0"/>
               </a:rPr>
               <a:t>IPv6 Address Types</a:t>
             </a:r>
+            <a:endParaRPr lang="en-US" dirty="0">
+              <a:latin typeface="Arial" charset="0"/>
+            </a:endParaRPr>
           </a:p>
         </p:txBody>
       </p:sp>
@@ -14111,6 +14025,12 @@
               </a:rPr>
               <a:t>Types of IPv6 Addresses</a:t>
             </a:r>
+            <a:r>
+              <a:rPr lang="en-US" dirty="0">
+                <a:latin typeface="Arial" charset="0"/>
+              </a:rPr>
+              <a:t/>
+            </a:r>
             <a:br>
               <a:rPr lang="en-US" dirty="0">
                 <a:latin typeface="Arial" charset="0"/>
@@ -14120,8 +14040,17 @@
               <a:rPr lang="en-US" dirty="0">
                 <a:latin typeface="Arial" charset="0"/>
               </a:rPr>
-              <a:t>IPv6 Unicast Addresses</a:t>
-            </a:r>
+              <a:t>IPv6 </a:t>
+            </a:r>
+            <a:r>
+              <a:rPr lang="en-US" dirty="0" smtClean="0">
+                <a:latin typeface="Arial" charset="0"/>
+              </a:rPr>
+              <a:t>Unicast Addresses</a:t>
+            </a:r>
+            <a:endParaRPr lang="en-US" dirty="0">
+              <a:latin typeface="Arial" charset="0"/>
+            </a:endParaRPr>
           </a:p>
         </p:txBody>
       </p:sp>
@@ -14151,12 +14080,16 @@
               <a:buNone/>
             </a:pPr>
             <a:r>
-              <a:rPr lang="en-US" b="1" dirty="0"/>
+              <a:rPr lang="en-US" b="1" dirty="0" smtClean="0"/>
               <a:t>Unicast</a:t>
             </a:r>
             <a:r>
               <a:rPr lang="en-US" dirty="0"/>
-              <a:t>  </a:t>
+              <a:t> </a:t>
+            </a:r>
+            <a:r>
+              <a:rPr lang="en-US" dirty="0" smtClean="0"/>
+              <a:t> </a:t>
             </a:r>
           </a:p>
           <a:p>
@@ -14166,7 +14099,19 @@
             </a:pPr>
             <a:r>
               <a:rPr lang="en-US" dirty="0"/>
-              <a:t>Uniquely identifies an interface on an IPv6-enabled device.</a:t>
+              <a:t>U</a:t>
+            </a:r>
+            <a:r>
+              <a:rPr lang="en-US" dirty="0" smtClean="0"/>
+              <a:t>niquely </a:t>
+            </a:r>
+            <a:r>
+              <a:rPr lang="en-US" dirty="0"/>
+              <a:t>identifies an interface on an IPv6-enabled </a:t>
+            </a:r>
+            <a:r>
+              <a:rPr lang="en-US" dirty="0" smtClean="0"/>
+              <a:t>device.</a:t>
             </a:r>
           </a:p>
           <a:p>
@@ -14175,8 +14120,16 @@
               <a:buChar char="§"/>
             </a:pPr>
             <a:r>
+              <a:rPr lang="en-US" dirty="0" smtClean="0"/>
+              <a:t>A </a:t>
+            </a:r>
+            <a:r>
               <a:rPr lang="en-US" dirty="0"/>
-              <a:t>A packet sent to a unicast address is received by the interface that is assigned that address.  </a:t>
+              <a:t>packet sent to a unicast address is received by the interface that is assigned that address. </a:t>
+            </a:r>
+            <a:r>
+              <a:rPr lang="en-US" dirty="0" smtClean="0"/>
+              <a:t> </a:t>
             </a:r>
           </a:p>
           <a:p>
@@ -14187,19 +14140,19 @@
             <a:endParaRPr lang="en-US" dirty="0"/>
           </a:p>
           <a:p>
+            <a:endParaRPr lang="en-US" dirty="0" smtClean="0"/>
+          </a:p>
+          <a:p>
             <a:endParaRPr lang="en-US" dirty="0"/>
           </a:p>
           <a:p>
-            <a:endParaRPr lang="en-US" dirty="0"/>
+            <a:endParaRPr lang="en-US" b="1" dirty="0" smtClean="0"/>
           </a:p>
           <a:p>
             <a:endParaRPr lang="en-US" b="1" dirty="0"/>
           </a:p>
           <a:p>
-            <a:endParaRPr lang="en-US" b="1" dirty="0"/>
-          </a:p>
-          <a:p>
-            <a:endParaRPr lang="en-US" b="1" dirty="0"/>
+            <a:endParaRPr lang="en-US" b="1" dirty="0" smtClean="0"/>
           </a:p>
           <a:p>
             <a:endParaRPr lang="en-US" b="1" dirty="0"/>
@@ -14330,6 +14283,12 @@
               </a:rPr>
               <a:t>Types of IPv6 Addresses</a:t>
             </a:r>
+            <a:r>
+              <a:rPr lang="en-US" dirty="0">
+                <a:latin typeface="Arial" charset="0"/>
+              </a:rPr>
+              <a:t/>
+            </a:r>
             <a:br>
               <a:rPr lang="en-US" dirty="0">
                 <a:latin typeface="Arial" charset="0"/>
@@ -14339,8 +14298,17 @@
               <a:rPr lang="en-US" dirty="0">
                 <a:latin typeface="Arial" charset="0"/>
               </a:rPr>
-              <a:t>IPv6 Unicast Addresses (cont.)</a:t>
-            </a:r>
+              <a:t>IPv6 </a:t>
+            </a:r>
+            <a:r>
+              <a:rPr lang="en-US" dirty="0" smtClean="0">
+                <a:latin typeface="Arial" charset="0"/>
+              </a:rPr>
+              <a:t>Unicast Addresses (cont.)</a:t>
+            </a:r>
+            <a:endParaRPr lang="en-US" dirty="0">
+              <a:latin typeface="Arial" charset="0"/>
+            </a:endParaRPr>
           </a:p>
         </p:txBody>
       </p:sp>
@@ -14455,17 +14423,26 @@
               </a:rPr>
               <a:t>Types of IPv6 Addresses</a:t>
             </a:r>
+            <a:r>
+              <a:rPr lang="en-US" dirty="0">
+                <a:latin typeface="Arial" charset="0"/>
+              </a:rPr>
+              <a:t/>
+            </a:r>
             <a:br>
               <a:rPr lang="en-US" dirty="0">
                 <a:latin typeface="Arial" charset="0"/>
               </a:rPr>
             </a:br>
             <a:r>
-              <a:rPr lang="en-US" dirty="0">
+              <a:rPr lang="en-US" dirty="0" smtClean="0">
                 <a:latin typeface="Arial" charset="0"/>
               </a:rPr>
               <a:t>IPv6 Unicast Addresses (cont.)</a:t>
             </a:r>
+            <a:endParaRPr lang="en-US" dirty="0">
+              <a:latin typeface="Arial" charset="0"/>
+            </a:endParaRPr>
           </a:p>
         </p:txBody>
       </p:sp>
@@ -14505,7 +14482,19 @@
             </a:pPr>
             <a:r>
               <a:rPr lang="en-US" dirty="0"/>
-              <a:t>Similar to a public IPv4 address</a:t>
+              <a:t>S</a:t>
+            </a:r>
+            <a:r>
+              <a:rPr lang="en-US" dirty="0" smtClean="0"/>
+              <a:t>imilar </a:t>
+            </a:r>
+            <a:r>
+              <a:rPr lang="en-US" dirty="0"/>
+              <a:t>to a public IPv4 </a:t>
+            </a:r>
+            <a:r>
+              <a:rPr lang="en-US" dirty="0" smtClean="0"/>
+              <a:t>address</a:t>
             </a:r>
           </a:p>
           <a:p>
@@ -14515,7 +14504,11 @@
             </a:pPr>
             <a:r>
               <a:rPr lang="en-US" dirty="0"/>
-              <a:t>Globally unique</a:t>
+              <a:t>G</a:t>
+            </a:r>
+            <a:r>
+              <a:rPr lang="en-US" dirty="0" smtClean="0"/>
+              <a:t>lobally unique</a:t>
             </a:r>
           </a:p>
           <a:p>
@@ -14524,8 +14517,16 @@
               <a:buChar char="§"/>
             </a:pPr>
             <a:r>
+              <a:rPr lang="en-US" dirty="0" smtClean="0"/>
+              <a:t>Internet </a:t>
+            </a:r>
+            <a:r>
               <a:rPr lang="en-US" dirty="0"/>
-              <a:t>Internet routable addresses</a:t>
+              <a:t>routable </a:t>
+            </a:r>
+            <a:r>
+              <a:rPr lang="en-US" dirty="0" smtClean="0"/>
+              <a:t>addresses</a:t>
             </a:r>
           </a:p>
           <a:p>
@@ -14534,8 +14535,16 @@
               <a:buChar char="§"/>
             </a:pPr>
             <a:r>
+              <a:rPr lang="en-US" dirty="0" smtClean="0"/>
+              <a:t>Can </a:t>
+            </a:r>
+            <a:r>
               <a:rPr lang="en-US" dirty="0"/>
-              <a:t>Can be configured statically or assigned dynamically </a:t>
+              <a:t>be configured statically or assigned </a:t>
+            </a:r>
+            <a:r>
+              <a:rPr lang="en-US" dirty="0" smtClean="0"/>
+              <a:t>dynamically </a:t>
             </a:r>
           </a:p>
           <a:p>
@@ -14554,8 +14563,16 @@
               <a:buChar char="§"/>
             </a:pPr>
             <a:r>
+              <a:rPr lang="en-US" dirty="0" smtClean="0"/>
+              <a:t>Used </a:t>
+            </a:r>
+            <a:r>
               <a:rPr lang="en-US" dirty="0"/>
-              <a:t>Used to communicate with other devices on the same local link</a:t>
+              <a:t>to communicate with other devices on the same local </a:t>
+            </a:r>
+            <a:r>
+              <a:rPr lang="en-US" dirty="0" smtClean="0"/>
+              <a:t>link</a:t>
             </a:r>
           </a:p>
           <a:p>
@@ -14564,8 +14581,24 @@
               <a:buChar char="§"/>
             </a:pPr>
             <a:r>
+              <a:rPr lang="en-US" dirty="0" smtClean="0"/>
+              <a:t>Confined </a:t>
+            </a:r>
+            <a:r>
               <a:rPr lang="en-US" dirty="0"/>
-              <a:t>Confined to a single link;  not routable beyond the link</a:t>
+              <a:t>to a single </a:t>
+            </a:r>
+            <a:r>
+              <a:rPr lang="en-US" dirty="0" smtClean="0"/>
+              <a:t>link;  not </a:t>
+            </a:r>
+            <a:r>
+              <a:rPr lang="en-US" dirty="0"/>
+              <a:t>routable beyond the </a:t>
+            </a:r>
+            <a:r>
+              <a:rPr lang="en-US" dirty="0" smtClean="0"/>
+              <a:t>link</a:t>
             </a:r>
           </a:p>
         </p:txBody>
@@ -14880,6 +14913,13 @@
   <p:clrMapOvr>
     <a:masterClrMapping/>
   </p:clrMapOvr>
+  <p:timing>
+    <p:tnLst>
+      <p:par>
+        <p:cTn id="1" dur="indefinite" restart="never" nodeType="tmRoot"/>
+      </p:par>
+    </p:tnLst>
+  </p:timing>
 </p:sld>
 </file>
 
@@ -14929,17 +14969,26 @@
               </a:rPr>
               <a:t>Types of IPv6 Addresses</a:t>
             </a:r>
+            <a:r>
+              <a:rPr lang="en-US" dirty="0">
+                <a:latin typeface="Arial" charset="0"/>
+              </a:rPr>
+              <a:t/>
+            </a:r>
             <a:br>
               <a:rPr lang="en-US" dirty="0">
                 <a:latin typeface="Arial" charset="0"/>
               </a:rPr>
             </a:br>
             <a:r>
-              <a:rPr lang="en-US" dirty="0">
+              <a:rPr lang="en-US" dirty="0" smtClean="0">
                 <a:latin typeface="Arial" charset="0"/>
               </a:rPr>
               <a:t>IPv6 Unicast Addresses (cont.)</a:t>
             </a:r>
+            <a:endParaRPr lang="en-US" dirty="0">
+              <a:latin typeface="Arial" charset="0"/>
+            </a:endParaRPr>
           </a:p>
         </p:txBody>
       </p:sp>
@@ -14979,8 +15028,16 @@
               <a:buChar char="§"/>
             </a:pPr>
             <a:r>
+              <a:rPr lang="en-US" dirty="0" smtClean="0"/>
+              <a:t>Used </a:t>
+            </a:r>
+            <a:r>
               <a:rPr lang="en-US" dirty="0"/>
-              <a:t>Used by a host to send a packet to itself and cannot be assigned to a physical interface.</a:t>
+              <a:t>by a host to send a packet to itself and cannot be assigned to a physical </a:t>
+            </a:r>
+            <a:r>
+              <a:rPr lang="en-US" dirty="0" smtClean="0"/>
+              <a:t>interface.</a:t>
             </a:r>
           </a:p>
           <a:p>
@@ -14990,7 +15047,19 @@
             </a:pPr>
             <a:r>
               <a:rPr lang="en-US" dirty="0"/>
-              <a:t>Ping an IPv6 loopback address to test the configuration of TCP/IP on the local host.</a:t>
+              <a:t>P</a:t>
+            </a:r>
+            <a:r>
+              <a:rPr lang="en-US" dirty="0" smtClean="0"/>
+              <a:t>ing </a:t>
+            </a:r>
+            <a:r>
+              <a:rPr lang="en-US" dirty="0"/>
+              <a:t>an IPv6 loopback address to test the configuration of TCP/IP on the local </a:t>
+            </a:r>
+            <a:r>
+              <a:rPr lang="en-US" dirty="0" smtClean="0"/>
+              <a:t>host.</a:t>
             </a:r>
           </a:p>
           <a:p>
@@ -15000,8 +15069,21 @@
             </a:pPr>
             <a:r>
               <a:rPr lang="en-US" dirty="0"/>
-              <a:t>All-0s except for the last bit, represented as ::1/128 or just ::1.</a:t>
-            </a:r>
+              <a:t>A</a:t>
+            </a:r>
+            <a:r>
+              <a:rPr lang="en-US" dirty="0" smtClean="0"/>
+              <a:t>ll-0s </a:t>
+            </a:r>
+            <a:r>
+              <a:rPr lang="en-US" dirty="0"/>
+              <a:t>except for the last bit, represented as ::1/128 or just ::</a:t>
+            </a:r>
+            <a:r>
+              <a:rPr lang="en-US" dirty="0" smtClean="0"/>
+              <a:t>1.</a:t>
+            </a:r>
+            <a:endParaRPr lang="en-US" dirty="0"/>
           </a:p>
           <a:p>
             <a:pPr>
@@ -15018,8 +15100,24 @@
               <a:buChar char="§"/>
             </a:pPr>
             <a:r>
+              <a:rPr lang="en-US" dirty="0" smtClean="0"/>
+              <a:t>All-0’s </a:t>
+            </a:r>
+            <a:r>
               <a:rPr lang="en-US" dirty="0"/>
-              <a:t>All-0’s address represented as ::/128 or just :: </a:t>
+              <a:t>address represented </a:t>
+            </a:r>
+            <a:r>
+              <a:rPr lang="en-US" dirty="0" smtClean="0"/>
+              <a:t>as </a:t>
+            </a:r>
+            <a:r>
+              <a:rPr lang="en-US" dirty="0"/>
+              <a:t>::/128 or just </a:t>
+            </a:r>
+            <a:r>
+              <a:rPr lang="en-US" dirty="0" smtClean="0"/>
+              <a:t>:: </a:t>
             </a:r>
           </a:p>
           <a:p>
@@ -15029,7 +15127,27 @@
             </a:pPr>
             <a:r>
               <a:rPr lang="en-US" dirty="0"/>
-              <a:t>Cannot be assigned to an interface and is only used as a source address.</a:t>
+              <a:t>C</a:t>
+            </a:r>
+            <a:r>
+              <a:rPr lang="en-US" dirty="0" smtClean="0"/>
+              <a:t>annot </a:t>
+            </a:r>
+            <a:r>
+              <a:rPr lang="en-US" dirty="0"/>
+              <a:t>be assigned to an interface and is </a:t>
+            </a:r>
+            <a:r>
+              <a:rPr lang="en-US" dirty="0" smtClean="0"/>
+              <a:t>only used </a:t>
+            </a:r>
+            <a:r>
+              <a:rPr lang="en-US" dirty="0"/>
+              <a:t>as a source </a:t>
+            </a:r>
+            <a:r>
+              <a:rPr lang="en-US" dirty="0" smtClean="0"/>
+              <a:t>address.</a:t>
             </a:r>
           </a:p>
           <a:p>
@@ -15038,9 +15156,18 @@
               <a:buChar char="§"/>
             </a:pPr>
             <a:r>
+              <a:rPr lang="en-US" dirty="0" smtClean="0"/>
+              <a:t>An </a:t>
+            </a:r>
+            <a:r>
               <a:rPr lang="en-US" dirty="0"/>
-              <a:t>An unspecified address is used as a source address when the device does not yet have a permanent IPv6 address or when the source of the packet is irrelevant to the destination.</a:t>
-            </a:r>
+              <a:t>unspecified address is used as a source address when the device does not yet have a permanent IPv6 address or when the source of the packet is irrelevant to the </a:t>
+            </a:r>
+            <a:r>
+              <a:rPr lang="en-US" dirty="0" smtClean="0"/>
+              <a:t>destination.</a:t>
+            </a:r>
+            <a:endParaRPr lang="en-US" dirty="0"/>
           </a:p>
         </p:txBody>
       </p:sp>
@@ -15106,17 +15233,26 @@
               </a:rPr>
               <a:t>Types of IPv6 Addresses</a:t>
             </a:r>
+            <a:r>
+              <a:rPr lang="en-US" dirty="0">
+                <a:latin typeface="Arial" charset="0"/>
+              </a:rPr>
+              <a:t/>
+            </a:r>
             <a:br>
               <a:rPr lang="en-US" dirty="0">
                 <a:latin typeface="Arial" charset="0"/>
               </a:rPr>
             </a:br>
             <a:r>
-              <a:rPr lang="en-US" dirty="0">
+              <a:rPr lang="en-US" dirty="0" smtClean="0">
                 <a:latin typeface="Arial" charset="0"/>
               </a:rPr>
               <a:t>IPv6 Unicast Addresses (cont.)</a:t>
             </a:r>
+            <a:endParaRPr lang="en-US" dirty="0">
+              <a:latin typeface="Arial" charset="0"/>
+            </a:endParaRPr>
           </a:p>
         </p:txBody>
       </p:sp>
@@ -15155,8 +15291,16 @@
               <a:buChar char="§"/>
             </a:pPr>
             <a:r>
+              <a:rPr lang="en-US" dirty="0" smtClean="0"/>
+              <a:t>Similar to private </a:t>
+            </a:r>
+            <a:r>
               <a:rPr lang="en-US" dirty="0"/>
-              <a:t>Similar to private addresses for IPv4.</a:t>
+              <a:t>addresses for </a:t>
+            </a:r>
+            <a:r>
+              <a:rPr lang="en-US" dirty="0" smtClean="0"/>
+              <a:t>IPv4.</a:t>
             </a:r>
           </a:p>
           <a:p>
@@ -15166,7 +15310,19 @@
             </a:pPr>
             <a:r>
               <a:rPr lang="en-US" dirty="0"/>
-              <a:t>Used for local addressing within a site or between a limited number of sites.</a:t>
+              <a:t>U</a:t>
+            </a:r>
+            <a:r>
+              <a:rPr lang="en-US" dirty="0" smtClean="0"/>
+              <a:t>sed </a:t>
+            </a:r>
+            <a:r>
+              <a:rPr lang="en-US" dirty="0"/>
+              <a:t>for local addressing within a site or between a limited number of </a:t>
+            </a:r>
+            <a:r>
+              <a:rPr lang="en-US" dirty="0" smtClean="0"/>
+              <a:t>sites.</a:t>
             </a:r>
           </a:p>
           <a:p>
@@ -15176,8 +15332,21 @@
             </a:pPr>
             <a:r>
               <a:rPr lang="en-US" dirty="0"/>
-              <a:t>In the range of FC00::/7 to FDFF::/7.</a:t>
-            </a:r>
+              <a:t>I</a:t>
+            </a:r>
+            <a:r>
+              <a:rPr lang="en-US" dirty="0" smtClean="0"/>
+              <a:t>n </a:t>
+            </a:r>
+            <a:r>
+              <a:rPr lang="en-US" dirty="0"/>
+              <a:t>the range of FC00::/7 to FDFF::/</a:t>
+            </a:r>
+            <a:r>
+              <a:rPr lang="en-US" dirty="0" smtClean="0"/>
+              <a:t>7.</a:t>
+            </a:r>
+            <a:endParaRPr lang="en-US" dirty="0"/>
           </a:p>
           <a:p>
             <a:pPr marL="0" indent="0">
@@ -15195,8 +15364,16 @@
               <a:buChar char="§"/>
             </a:pPr>
             <a:r>
+              <a:rPr lang="en-US" dirty="0" smtClean="0"/>
+              <a:t>Used </a:t>
+            </a:r>
+            <a:r>
               <a:rPr lang="en-US" dirty="0"/>
-              <a:t>Used to help transition from IPv4 to IPv6.</a:t>
+              <a:t>to help transition from IPv4 to </a:t>
+            </a:r>
+            <a:r>
+              <a:rPr lang="en-US" dirty="0" smtClean="0"/>
+              <a:t>IPv6.</a:t>
             </a:r>
             <a:endParaRPr lang="en-US" dirty="0">
               <a:effectLst/>
@@ -15266,17 +15443,26 @@
               </a:rPr>
               <a:t>Types of IPv6 Addresses</a:t>
             </a:r>
+            <a:r>
+              <a:rPr lang="en-US" dirty="0">
+                <a:latin typeface="Arial" charset="0"/>
+              </a:rPr>
+              <a:t/>
+            </a:r>
             <a:br>
               <a:rPr lang="en-US" dirty="0">
                 <a:latin typeface="Arial" charset="0"/>
               </a:rPr>
             </a:br>
             <a:r>
-              <a:rPr lang="en-US" dirty="0">
+              <a:rPr lang="en-US" dirty="0" smtClean="0">
                 <a:latin typeface="Arial" charset="0"/>
               </a:rPr>
               <a:t>IPv6 Link-Local Unicast Addresses</a:t>
             </a:r>
+            <a:endParaRPr lang="en-US" dirty="0">
+              <a:latin typeface="Arial" charset="0"/>
+            </a:endParaRPr>
           </a:p>
         </p:txBody>
       </p:sp>
@@ -15514,17 +15700,26 @@
               </a:rPr>
               <a:t>Types of IPv6 Addresses</a:t>
             </a:r>
+            <a:r>
+              <a:rPr lang="en-US" dirty="0">
+                <a:latin typeface="Arial" charset="0"/>
+              </a:rPr>
+              <a:t/>
+            </a:r>
             <a:br>
               <a:rPr lang="en-US" dirty="0">
                 <a:latin typeface="Arial" charset="0"/>
               </a:rPr>
             </a:br>
             <a:r>
-              <a:rPr lang="en-US" dirty="0">
+              <a:rPr lang="en-US" dirty="0" smtClean="0">
                 <a:latin typeface="Arial" charset="0"/>
               </a:rPr>
               <a:t>IPv6 Link-Local Unicast Addresses (cont.)</a:t>
             </a:r>
+            <a:endParaRPr lang="en-US" dirty="0">
+              <a:latin typeface="Arial" charset="0"/>
+            </a:endParaRPr>
           </a:p>
         </p:txBody>
       </p:sp>
@@ -15672,6 +15867,12 @@
               </a:rPr>
               <a:t>IPv6 Unicast Addresses</a:t>
             </a:r>
+            <a:r>
+              <a:rPr lang="en-US" dirty="0">
+                <a:latin typeface="Arial" charset="0"/>
+              </a:rPr>
+              <a:t/>
+            </a:r>
             <a:br>
               <a:rPr lang="en-US" dirty="0">
                 <a:latin typeface="Arial" charset="0"/>
@@ -15725,15 +15926,15 @@
           </a:p>
           <a:p>
             <a:r>
-              <a:rPr lang="en-US" dirty="0"/>
+              <a:rPr lang="en-US" dirty="0" smtClean="0"/>
               <a:t>Currently, only global </a:t>
             </a:r>
             <a:r>
-              <a:rPr lang="en-US" dirty="0" err="1"/>
+              <a:rPr lang="en-US" dirty="0" err="1" smtClean="0"/>
               <a:t>unicast</a:t>
             </a:r>
             <a:r>
-              <a:rPr lang="en-US" dirty="0"/>
+              <a:rPr lang="en-US" dirty="0" smtClean="0"/>
               <a:t> addresses with the first three bits of 001 or 2000::/3 are being assigned</a:t>
             </a:r>
           </a:p>
@@ -15853,6 +16054,12 @@
               </a:rPr>
               <a:t>IPv6 Unicast Addresses</a:t>
             </a:r>
+            <a:r>
+              <a:rPr lang="en-US" dirty="0">
+                <a:latin typeface="Arial" charset="0"/>
+              </a:rPr>
+              <a:t/>
+            </a:r>
             <a:br>
               <a:rPr lang="en-US" dirty="0">
                 <a:latin typeface="Arial" charset="0"/>
@@ -16153,6 +16360,12 @@
               </a:rPr>
               <a:t>IPv6 Unicast Addresses</a:t>
             </a:r>
+            <a:r>
+              <a:rPr lang="en-US" dirty="0">
+                <a:latin typeface="Arial" charset="0"/>
+              </a:rPr>
+              <a:t/>
+            </a:r>
             <a:br>
               <a:rPr lang="en-US" dirty="0">
                 <a:latin typeface="Arial" charset="0"/>
@@ -16210,7 +16423,19 @@
             </a:pPr>
             <a:r>
               <a:rPr lang="en-US" dirty="0"/>
-              <a:t>Equivalent to the host portion of an IPv4 address.</a:t>
+              <a:t>E</a:t>
+            </a:r>
+            <a:r>
+              <a:rPr lang="en-US" dirty="0" smtClean="0"/>
+              <a:t>quivalent </a:t>
+            </a:r>
+            <a:r>
+              <a:rPr lang="en-US" dirty="0"/>
+              <a:t>to the host portion of an IPv4 </a:t>
+            </a:r>
+            <a:r>
+              <a:rPr lang="en-US" dirty="0" smtClean="0"/>
+              <a:t>address.</a:t>
             </a:r>
           </a:p>
           <a:p>
@@ -16219,9 +16444,18 @@
               <a:buChar char="§"/>
             </a:pPr>
             <a:r>
+              <a:rPr lang="en-US" dirty="0" smtClean="0"/>
+              <a:t>Used because </a:t>
+            </a:r>
+            <a:r>
               <a:rPr lang="en-US" dirty="0"/>
-              <a:t>Used because a single host may have multiple interfaces, each having one or more IPv6 addresses.</a:t>
-            </a:r>
+              <a:t>a single host may have multiple interfaces, each having one or more IPv6 </a:t>
+            </a:r>
+            <a:r>
+              <a:rPr lang="en-US" dirty="0" smtClean="0"/>
+              <a:t>addresses.</a:t>
+            </a:r>
+            <a:endParaRPr lang="en-US" dirty="0"/>
           </a:p>
           <a:p>
             <a:pPr marL="0" indent="0">
@@ -16396,6 +16630,12 @@
               </a:rPr>
               <a:t>IPv6 Unicast Addresses</a:t>
             </a:r>
+            <a:r>
+              <a:rPr lang="en-US" dirty="0">
+                <a:latin typeface="Arial" charset="0"/>
+              </a:rPr>
+              <a:t/>
+            </a:r>
             <a:br>
               <a:rPr lang="en-US" dirty="0">
                 <a:latin typeface="Arial" charset="0"/>
@@ -16526,6 +16766,12 @@
               </a:rPr>
               <a:t>IPv6 Unicast Addresses</a:t>
             </a:r>
+            <a:r>
+              <a:rPr lang="en-US" dirty="0">
+                <a:latin typeface="Arial" charset="0"/>
+              </a:rPr>
+              <a:t/>
+            </a:r>
             <a:br>
               <a:rPr lang="en-US" dirty="0">
                 <a:latin typeface="Arial" charset="0"/>
@@ -16670,6 +16916,12 @@
                 <a:latin typeface="Arial" charset="0"/>
               </a:rPr>
               <a:t>IPv6 Unicast Addresses</a:t>
+            </a:r>
+            <a:r>
+              <a:rPr lang="en-US" dirty="0">
+                <a:latin typeface="Arial" charset="0"/>
+              </a:rPr>
+              <a:t/>
             </a:r>
             <a:br>
               <a:rPr lang="en-US" dirty="0">
@@ -16884,7 +17136,7 @@
           <p:nvPr/>
         </p:nvPicPr>
         <p:blipFill>
-          <a:blip r:embed="rId3">
+          <a:blip r:embed="rId2">
             <a:extLst>
               <a:ext uri="{28A0092B-C50C-407E-A947-70E740481C1C}">
                 <a14:useLocalDpi xmlns:a14="http://schemas.microsoft.com/office/drawing/2010/main" val="0"/>
@@ -16920,7 +17172,7 @@
           <p:nvPr/>
         </p:nvPicPr>
         <p:blipFill>
-          <a:blip r:embed="rId4">
+          <a:blip r:embed="rId3">
             <a:extLst>
               <a:ext uri="{28A0092B-C50C-407E-A947-70E740481C1C}">
                 <a14:useLocalDpi xmlns:a14="http://schemas.microsoft.com/office/drawing/2010/main" val="0"/>
@@ -17026,7 +17278,7 @@
           <p:nvPr/>
         </p:nvPicPr>
         <p:blipFill>
-          <a:blip r:embed="rId5" cstate="print">
+          <a:blip r:embed="rId4" cstate="print">
             <a:extLst>
               <a:ext uri="{28A0092B-C50C-407E-A947-70E740481C1C}">
                 <a14:useLocalDpi xmlns:a14="http://schemas.microsoft.com/office/drawing/2010/main" val="0"/>
@@ -17056,7 +17308,7 @@
           <p:nvPr/>
         </p:nvPicPr>
         <p:blipFill>
-          <a:blip r:embed="rId6">
+          <a:blip r:embed="rId5">
             <a:extLst>
               <a:ext uri="{28A0092B-C50C-407E-A947-70E740481C1C}">
                 <a14:useLocalDpi xmlns:a14="http://schemas.microsoft.com/office/drawing/2010/main" val="0"/>
@@ -17097,7 +17349,7 @@
           <p:nvPr/>
         </p:nvPicPr>
         <p:blipFill>
-          <a:blip r:embed="rId7"/>
+          <a:blip r:embed="rId6"/>
           <a:stretch>
             <a:fillRect/>
           </a:stretch>
@@ -17115,6 +17367,30 @@
       <p:pic>
         <p:nvPicPr>
           <p:cNvPr id="2" name="Picture 1"/>
+          <p:cNvPicPr>
+            <a:picLocks noChangeAspect="1"/>
+          </p:cNvPicPr>
+          <p:nvPr/>
+        </p:nvPicPr>
+        <p:blipFill>
+          <a:blip r:embed="rId7"/>
+          <a:stretch>
+            <a:fillRect/>
+          </a:stretch>
+        </p:blipFill>
+        <p:spPr>
+          <a:xfrm>
+            <a:off x="175365" y="1161464"/>
+            <a:ext cx="6414149" cy="2729743"/>
+          </a:xfrm>
+          <a:prstGeom prst="rect">
+            <a:avLst/>
+          </a:prstGeom>
+        </p:spPr>
+      </p:pic>
+      <p:pic>
+        <p:nvPicPr>
+          <p:cNvPr id="3" name="Picture 2"/>
           <p:cNvPicPr>
             <a:picLocks noChangeAspect="1"/>
           </p:cNvPicPr>
@@ -17128,17 +17404,58 @@
         </p:blipFill>
         <p:spPr>
           <a:xfrm>
-            <a:off x="175365" y="1161464"/>
-            <a:ext cx="6414149" cy="2729743"/>
+            <a:off x="6589514" y="1352428"/>
+            <a:ext cx="5290160" cy="2745006"/>
           </a:xfrm>
           <a:prstGeom prst="rect">
             <a:avLst/>
           </a:prstGeom>
         </p:spPr>
       </p:pic>
+      <p:sp>
+        <p:nvSpPr>
+          <p:cNvPr id="4" name="Rectangle 3"/>
+          <p:cNvSpPr/>
+          <p:nvPr/>
+        </p:nvSpPr>
+        <p:spPr>
+          <a:xfrm>
+            <a:off x="7236023" y="792132"/>
+            <a:ext cx="1622560" cy="369332"/>
+          </a:xfrm>
+          <a:prstGeom prst="rect">
+            <a:avLst/>
+          </a:prstGeom>
+        </p:spPr>
+        <p:txBody>
+          <a:bodyPr wrap="none">
+            <a:spAutoFit/>
+          </a:bodyPr>
+          <a:lstStyle/>
+          <a:p>
+            <a:r>
+              <a:rPr lang="en-GB" altLang="ko-KR" dirty="0">
+                <a:solidFill>
+                  <a:srgbClr val="002060"/>
+                </a:solidFill>
+                <a:latin typeface="Lucida Sans" pitchFamily="34" charset="0"/>
+                <a:cs typeface="Times New Roman" pitchFamily="18" charset="0"/>
+              </a:rPr>
+              <a:t>Hexadecimal</a:t>
+            </a:r>
+            <a:endParaRPr lang="ko-KR" altLang="en-US" dirty="0">
+              <a:solidFill>
+                <a:srgbClr val="002060"/>
+              </a:solidFill>
+              <a:latin typeface="Lucida Sans" pitchFamily="34" charset="0"/>
+              <a:cs typeface="Times New Roman" pitchFamily="18" charset="0"/>
+            </a:endParaRPr>
+          </a:p>
+        </p:txBody>
+      </p:sp>
       <p:pic>
         <p:nvPicPr>
-          <p:cNvPr id="3" name="Picture 2"/>
+          <p:cNvPr id="6" name="Picture 5"/>
           <p:cNvPicPr>
             <a:picLocks noChangeAspect="1"/>
           </p:cNvPicPr>
@@ -17152,71 +17469,6 @@
         </p:blipFill>
         <p:spPr>
           <a:xfrm>
-            <a:off x="6589514" y="1352428"/>
-            <a:ext cx="5290160" cy="2745006"/>
-          </a:xfrm>
-          <a:prstGeom prst="rect">
-            <a:avLst/>
-          </a:prstGeom>
-        </p:spPr>
-      </p:pic>
-      <p:sp>
-        <p:nvSpPr>
-          <p:cNvPr id="4" name="Rectangle 3"/>
-          <p:cNvSpPr/>
-          <p:nvPr/>
-        </p:nvSpPr>
-        <p:spPr>
-          <a:xfrm>
-            <a:off x="7236023" y="792132"/>
-            <a:ext cx="1622560" cy="369332"/>
-          </a:xfrm>
-          <a:prstGeom prst="rect">
-            <a:avLst/>
-          </a:prstGeom>
-        </p:spPr>
-        <p:txBody>
-          <a:bodyPr wrap="none">
-            <a:spAutoFit/>
-          </a:bodyPr>
-          <a:lstStyle/>
-          <a:p>
-            <a:r>
-              <a:rPr lang="en-GB" altLang="ko-KR" dirty="0">
-                <a:solidFill>
-                  <a:srgbClr val="002060"/>
-                </a:solidFill>
-                <a:latin typeface="Lucida Sans" pitchFamily="34" charset="0"/>
-                <a:cs typeface="Times New Roman" pitchFamily="18" charset="0"/>
-              </a:rPr>
-              <a:t>Hexadecimal</a:t>
-            </a:r>
-            <a:endParaRPr lang="ko-KR" altLang="en-US" dirty="0">
-              <a:solidFill>
-                <a:srgbClr val="002060"/>
-              </a:solidFill>
-              <a:latin typeface="Lucida Sans" pitchFamily="34" charset="0"/>
-              <a:cs typeface="Times New Roman" pitchFamily="18" charset="0"/>
-            </a:endParaRPr>
-          </a:p>
-        </p:txBody>
-      </p:sp>
-      <p:pic>
-        <p:nvPicPr>
-          <p:cNvPr id="6" name="Picture 5"/>
-          <p:cNvPicPr>
-            <a:picLocks noChangeAspect="1"/>
-          </p:cNvPicPr>
-          <p:nvPr/>
-        </p:nvPicPr>
-        <p:blipFill>
-          <a:blip r:embed="rId10"/>
-          <a:stretch>
-            <a:fillRect/>
-          </a:stretch>
-        </p:blipFill>
-        <p:spPr>
-          <a:xfrm>
             <a:off x="4251500" y="3659745"/>
             <a:ext cx="5524849" cy="2734076"/>
           </a:xfrm>
@@ -17235,6 +17487,13 @@
   <p:clrMapOvr>
     <a:masterClrMapping/>
   </p:clrMapOvr>
+  <p:timing>
+    <p:tnLst>
+      <p:par>
+        <p:cTn id="1" dur="indefinite" restart="never" nodeType="tmRoot"/>
+      </p:par>
+    </p:tnLst>
+  </p:timing>
 </p:sld>
 </file>
 
@@ -17283,6 +17542,12 @@
                 <a:latin typeface="Arial" charset="0"/>
               </a:rPr>
               <a:t>IPv6 Unicast Addresses</a:t>
+            </a:r>
+            <a:r>
+              <a:rPr lang="en-US" dirty="0">
+                <a:latin typeface="Arial" charset="0"/>
+              </a:rPr>
+              <a:t/>
             </a:r>
             <a:br>
               <a:rPr lang="en-US" dirty="0">
@@ -17398,36 +17663,78 @@
           <a:lstStyle/>
           <a:p>
             <a:pPr eaLnBrk="1" hangingPunct="1"/>
+            <a:r>
+              <a:rPr lang="en-US" sz="1800" dirty="0">
+                <a:latin typeface="Arial" charset="0"/>
+              </a:rPr>
+              <a:t/>
+            </a:r>
             <a:br>
               <a:rPr lang="en-US" sz="1800" dirty="0">
                 <a:latin typeface="Arial" charset="0"/>
               </a:rPr>
             </a:br>
+            <a:r>
+              <a:rPr lang="en-US" sz="1800" dirty="0">
+                <a:latin typeface="Arial" charset="0"/>
+              </a:rPr>
+              <a:t/>
+            </a:r>
             <a:br>
               <a:rPr lang="en-US" sz="1800" dirty="0">
                 <a:latin typeface="Arial" charset="0"/>
               </a:rPr>
             </a:br>
+            <a:r>
+              <a:rPr lang="en-US" sz="1800" dirty="0">
+                <a:latin typeface="Arial" charset="0"/>
+              </a:rPr>
+              <a:t/>
+            </a:r>
             <a:br>
               <a:rPr lang="en-US" sz="1800" dirty="0">
                 <a:latin typeface="Arial" charset="0"/>
               </a:rPr>
             </a:br>
+            <a:r>
+              <a:rPr lang="en-US" sz="1800" dirty="0">
+                <a:latin typeface="Arial" charset="0"/>
+              </a:rPr>
+              <a:t/>
+            </a:r>
             <a:br>
               <a:rPr lang="en-US" sz="1800" dirty="0">
                 <a:latin typeface="Arial" charset="0"/>
               </a:rPr>
             </a:br>
+            <a:r>
+              <a:rPr lang="en-US" sz="1800" dirty="0">
+                <a:latin typeface="Arial" charset="0"/>
+              </a:rPr>
+              <a:t/>
+            </a:r>
             <a:br>
               <a:rPr lang="en-US" sz="1800" dirty="0">
                 <a:latin typeface="Arial" charset="0"/>
               </a:rPr>
             </a:br>
+            <a:r>
+              <a:rPr lang="en-US" sz="1800" dirty="0">
+                <a:latin typeface="Arial" charset="0"/>
+              </a:rPr>
+              <a:t/>
+            </a:r>
             <a:br>
               <a:rPr lang="en-US" sz="1800" dirty="0">
                 <a:latin typeface="Arial" charset="0"/>
               </a:rPr>
             </a:br>
+            <a:r>
+              <a:rPr lang="en-US" sz="1800" dirty="0">
+                <a:latin typeface="Arial" charset="0"/>
+              </a:rPr>
+              <a:t/>
+            </a:r>
             <a:br>
               <a:rPr lang="en-US" sz="1800" dirty="0">
                 <a:latin typeface="Arial" charset="0"/>
@@ -17438,6 +17745,12 @@
                 <a:latin typeface="Arial" charset="0"/>
               </a:rPr>
               <a:t>IPv6 Unicast Addresses</a:t>
+            </a:r>
+            <a:r>
+              <a:rPr lang="en-US" dirty="0">
+                <a:latin typeface="Arial" charset="0"/>
+              </a:rPr>
+              <a:t/>
             </a:r>
             <a:br>
               <a:rPr lang="en-US" dirty="0">
@@ -17569,6 +17882,12 @@
               </a:rPr>
               <a:t>IPv6 Unicast Addresses</a:t>
             </a:r>
+            <a:r>
+              <a:rPr lang="en-US" dirty="0">
+                <a:latin typeface="Arial" charset="0"/>
+              </a:rPr>
+              <a:t/>
+            </a:r>
             <a:br>
               <a:rPr lang="en-US" dirty="0">
                 <a:latin typeface="Arial" charset="0"/>
@@ -17731,17 +18050,26 @@
               </a:rPr>
               <a:t>IPv6 Unicast Addresses</a:t>
             </a:r>
+            <a:r>
+              <a:rPr lang="en-US" dirty="0">
+                <a:latin typeface="Arial" charset="0"/>
+              </a:rPr>
+              <a:t/>
+            </a:r>
             <a:br>
               <a:rPr lang="en-US" dirty="0">
                 <a:latin typeface="Arial" charset="0"/>
               </a:rPr>
             </a:br>
             <a:r>
-              <a:rPr lang="en-US" dirty="0">
+              <a:rPr lang="en-US" dirty="0" smtClean="0">
                 <a:latin typeface="Arial" charset="0"/>
               </a:rPr>
               <a:t>Dynamic Link-local Addresses</a:t>
             </a:r>
+            <a:endParaRPr lang="en-US" dirty="0">
+              <a:latin typeface="Arial" charset="0"/>
+            </a:endParaRPr>
           </a:p>
         </p:txBody>
       </p:sp>
@@ -17938,17 +18266,26 @@
               </a:rPr>
               <a:t>IPv6 Unicast Addresses</a:t>
             </a:r>
+            <a:r>
+              <a:rPr lang="en-US" dirty="0">
+                <a:latin typeface="Arial" charset="0"/>
+              </a:rPr>
+              <a:t/>
+            </a:r>
             <a:br>
               <a:rPr lang="en-US" dirty="0">
                 <a:latin typeface="Arial" charset="0"/>
               </a:rPr>
             </a:br>
             <a:r>
-              <a:rPr lang="en-US" dirty="0">
+              <a:rPr lang="en-US" dirty="0" smtClean="0">
                 <a:latin typeface="Arial" charset="0"/>
               </a:rPr>
               <a:t>Dynamic Link-local Addresses (cont.)</a:t>
             </a:r>
+            <a:endParaRPr lang="en-US" dirty="0">
+              <a:latin typeface="Arial" charset="0"/>
+            </a:endParaRPr>
           </a:p>
         </p:txBody>
       </p:sp>
@@ -18157,17 +18494,26 @@
               </a:rPr>
               <a:t>IPv6 Unicast Addresses</a:t>
             </a:r>
+            <a:r>
+              <a:rPr lang="en-US" dirty="0">
+                <a:latin typeface="Arial" charset="0"/>
+              </a:rPr>
+              <a:t/>
+            </a:r>
             <a:br>
               <a:rPr lang="en-US" dirty="0">
                 <a:latin typeface="Arial" charset="0"/>
               </a:rPr>
             </a:br>
             <a:r>
-              <a:rPr lang="en-US" dirty="0">
+              <a:rPr lang="en-US" dirty="0" smtClean="0">
                 <a:latin typeface="Arial" charset="0"/>
               </a:rPr>
               <a:t>Static Link-local Addresses</a:t>
             </a:r>
+            <a:endParaRPr lang="en-US" dirty="0">
+              <a:latin typeface="Arial" charset="0"/>
+            </a:endParaRPr>
           </a:p>
         </p:txBody>
       </p:sp>
@@ -18316,17 +18662,26 @@
               </a:rPr>
               <a:t>IPv6 Unicast Addresses</a:t>
             </a:r>
+            <a:r>
+              <a:rPr lang="en-US" dirty="0">
+                <a:latin typeface="Arial" charset="0"/>
+              </a:rPr>
+              <a:t/>
+            </a:r>
             <a:br>
               <a:rPr lang="en-US" dirty="0">
                 <a:latin typeface="Arial" charset="0"/>
               </a:rPr>
             </a:br>
             <a:r>
-              <a:rPr lang="en-US" dirty="0">
+              <a:rPr lang="en-US" dirty="0" smtClean="0">
                 <a:latin typeface="Arial" charset="0"/>
               </a:rPr>
               <a:t>Static Link-local Addresses (cont.)</a:t>
             </a:r>
+            <a:endParaRPr lang="en-US" dirty="0">
+              <a:latin typeface="Arial" charset="0"/>
+            </a:endParaRPr>
           </a:p>
         </p:txBody>
       </p:sp>
@@ -18475,17 +18830,26 @@
               </a:rPr>
               <a:t>IPv6 Global Unicast Addresses</a:t>
             </a:r>
+            <a:r>
+              <a:rPr lang="en-US" dirty="0">
+                <a:latin typeface="Arial" charset="0"/>
+              </a:rPr>
+              <a:t/>
+            </a:r>
             <a:br>
               <a:rPr lang="en-US" dirty="0">
                 <a:latin typeface="Arial" charset="0"/>
               </a:rPr>
             </a:br>
             <a:r>
-              <a:rPr lang="en-US" dirty="0">
+              <a:rPr lang="en-US" dirty="0" smtClean="0">
                 <a:latin typeface="Arial" charset="0"/>
               </a:rPr>
               <a:t>Verifying IPv6 Address Configuration</a:t>
             </a:r>
+            <a:endParaRPr lang="en-US" dirty="0">
+              <a:latin typeface="Arial" charset="0"/>
+            </a:endParaRPr>
           </a:p>
         </p:txBody>
       </p:sp>
@@ -18664,17 +19028,26 @@
               </a:rPr>
               <a:t>IPv6 Global Unicast Addresses</a:t>
             </a:r>
+            <a:r>
+              <a:rPr lang="en-US" dirty="0">
+                <a:latin typeface="Arial" charset="0"/>
+              </a:rPr>
+              <a:t/>
+            </a:r>
             <a:br>
               <a:rPr lang="en-US" dirty="0">
                 <a:latin typeface="Arial" charset="0"/>
               </a:rPr>
             </a:br>
             <a:r>
-              <a:rPr lang="en-US" dirty="0">
+              <a:rPr lang="en-US" dirty="0" smtClean="0">
                 <a:latin typeface="Arial" charset="0"/>
               </a:rPr>
               <a:t>Verifying IPv6 Address Configuration (cont.)</a:t>
             </a:r>
+            <a:endParaRPr lang="en-US" dirty="0">
+              <a:latin typeface="Arial" charset="0"/>
+            </a:endParaRPr>
           </a:p>
         </p:txBody>
       </p:sp>
@@ -18800,11 +19173,14 @@
               </a:rPr>
             </a:br>
             <a:r>
-              <a:rPr lang="en-US" dirty="0">
+              <a:rPr lang="en-US" dirty="0" smtClean="0">
                 <a:latin typeface="Arial" charset="0"/>
               </a:rPr>
               <a:t>Assigned IPv6 Multicast Addresses</a:t>
             </a:r>
+            <a:endParaRPr lang="en-US" dirty="0">
+              <a:latin typeface="Arial" charset="0"/>
+            </a:endParaRPr>
           </a:p>
         </p:txBody>
       </p:sp>
@@ -18846,7 +19222,11 @@
             </a:pPr>
             <a:r>
               <a:rPr lang="en-US" dirty="0"/>
-              <a:t>Assigned multicast</a:t>
+              <a:t>Assigned </a:t>
+            </a:r>
+            <a:r>
+              <a:rPr lang="en-US" dirty="0" smtClean="0"/>
+              <a:t>multicast</a:t>
             </a:r>
           </a:p>
           <a:p>
@@ -18855,8 +19235,16 @@
               <a:buChar char="§"/>
             </a:pPr>
             <a:r>
+              <a:rPr lang="en-US" dirty="0" smtClean="0"/>
+              <a:t>Solicited </a:t>
+            </a:r>
+            <a:r>
               <a:rPr lang="en-US" dirty="0"/>
-              <a:t>Solicited node multicast</a:t>
+              <a:t>node </a:t>
+            </a:r>
+            <a:r>
+              <a:rPr lang="en-US" dirty="0" smtClean="0"/>
+              <a:t>multicast</a:t>
             </a:r>
           </a:p>
         </p:txBody>
@@ -19172,7 +19560,7 @@
               </a14:hiddenLine>
             </a:ext>
             <a:ext uri="{FAA26D3D-D897-4be2-8F04-BA451C77F1D7}">
-              <ma14:placeholderFlag xmlns="" xmlns:ma14="http://schemas.microsoft.com/office/mac/drawingml/2011/main" val="1"/>
+              <ma14:placeholderFlag xmlns:ma14="http://schemas.microsoft.com/office/mac/drawingml/2011/main" xmlns="" val="1"/>
             </a:ext>
           </a:extLst>
         </p:spPr>
@@ -19466,6 +19854,13 @@
   <p:clrMapOvr>
     <a:masterClrMapping/>
   </p:clrMapOvr>
+  <p:timing>
+    <p:tnLst>
+      <p:par>
+        <p:cTn id="1" dur="indefinite" restart="never" nodeType="tmRoot"/>
+      </p:par>
+    </p:tnLst>
+  </p:timing>
 </p:sld>
 </file>
 
@@ -19521,11 +19916,14 @@
               </a:rPr>
             </a:br>
             <a:r>
-              <a:rPr lang="en-US" dirty="0">
+              <a:rPr lang="en-US" dirty="0" smtClean="0">
                 <a:latin typeface="Arial" charset="0"/>
               </a:rPr>
               <a:t>Assigned IPv6 Multicast Addresses (cont.)</a:t>
             </a:r>
+            <a:endParaRPr lang="en-US" dirty="0">
+              <a:latin typeface="Arial" charset="0"/>
+            </a:endParaRPr>
           </a:p>
         </p:txBody>
       </p:sp>
@@ -19568,7 +19966,11 @@
             </a:r>
             <a:r>
               <a:rPr lang="en-US" dirty="0"/>
-              <a:t> – </a:t>
+              <a:t> </a:t>
+            </a:r>
+            <a:r>
+              <a:rPr lang="en-US" dirty="0" smtClean="0"/>
+              <a:t>– </a:t>
             </a:r>
           </a:p>
           <a:p>
@@ -19723,11 +20125,14 @@
               </a:rPr>
             </a:br>
             <a:r>
-              <a:rPr lang="en-US" dirty="0">
+              <a:rPr lang="en-US" dirty="0" smtClean="0">
                 <a:latin typeface="Arial" charset="0"/>
               </a:rPr>
               <a:t>Assigned IPv6 Multicast Addresses (cont.)</a:t>
             </a:r>
+            <a:endParaRPr lang="en-US" dirty="0">
+              <a:latin typeface="Arial" charset="0"/>
+            </a:endParaRPr>
           </a:p>
         </p:txBody>
       </p:sp>
@@ -19893,7 +20298,7 @@
               </a14:hiddenLine>
             </a:ext>
             <a:ext uri="{FAA26D3D-D897-4be2-8F04-BA451C77F1D7}">
-              <ma14:placeholderFlag xmlns="" xmlns:ma14="http://schemas.microsoft.com/office/mac/drawingml/2011/main" val="1"/>
+              <ma14:placeholderFlag xmlns:ma14="http://schemas.microsoft.com/office/mac/drawingml/2011/main" xmlns="" val="1"/>
             </a:ext>
           </a:extLst>
         </p:spPr>
@@ -20386,9 +20791,10 @@
           <a:lstStyle/>
           <a:p>
             <a:r>
-              <a:rPr lang="en-US" dirty="0"/>
+              <a:rPr lang="en-US" dirty="0" smtClean="0"/>
               <a:t>Recourses</a:t>
             </a:r>
+            <a:endParaRPr lang="en-US" dirty="0"/>
           </a:p>
         </p:txBody>
       </p:sp>
@@ -20408,7 +20814,7 @@
           <a:lstStyle/>
           <a:p>
             <a:r>
-              <a:rPr lang="en-US" b="1" dirty="0"/>
+              <a:rPr lang="en-US" b="1" dirty="0" smtClean="0"/>
               <a:t>Cisco Networking Academy program , Introduction to Networks</a:t>
             </a:r>
             <a:endParaRPr lang="en-US" dirty="0"/>
@@ -20856,6 +21262,13 @@
   <p:clrMapOvr>
     <a:masterClrMapping/>
   </p:clrMapOvr>
+  <p:timing>
+    <p:tnLst>
+      <p:par>
+        <p:cTn id="1" dur="indefinite" restart="never" nodeType="tmRoot"/>
+      </p:par>
+    </p:tnLst>
+  </p:timing>
 </p:sld>
 </file>
 
@@ -21784,6 +22197,13 @@
   <p:clrMapOvr>
     <a:masterClrMapping/>
   </p:clrMapOvr>
+  <p:timing>
+    <p:tnLst>
+      <p:par>
+        <p:cTn id="1" dur="indefinite" restart="never" nodeType="tmRoot"/>
+      </p:par>
+    </p:tnLst>
+  </p:timing>
 </p:sld>
 </file>
 
@@ -22082,6 +22502,13 @@
   <p:clrMapOvr>
     <a:masterClrMapping/>
   </p:clrMapOvr>
+  <p:timing>
+    <p:tnLst>
+      <p:par>
+        <p:cTn id="1" dur="indefinite" restart="never" nodeType="tmRoot"/>
+      </p:par>
+    </p:tnLst>
+  </p:timing>
 </p:sld>
 </file>
 
@@ -22423,6 +22850,13 @@
   <p:clrMapOvr>
     <a:masterClrMapping/>
   </p:clrMapOvr>
+  <p:timing>
+    <p:tnLst>
+      <p:par>
+        <p:cTn id="1" dur="indefinite" restart="never" nodeType="tmRoot"/>
+      </p:par>
+    </p:tnLst>
+  </p:timing>
 </p:sld>
 </file>
 
@@ -22800,6 +23234,13 @@
   <p:clrMapOvr>
     <a:masterClrMapping/>
   </p:clrMapOvr>
+  <p:timing>
+    <p:tnLst>
+      <p:par>
+        <p:cTn id="1" dur="indefinite" restart="never" nodeType="tmRoot"/>
+      </p:par>
+    </p:tnLst>
+  </p:timing>
 </p:sld>
 </file>
 
@@ -23201,6 +23642,13 @@
   <p:clrMapOvr>
     <a:masterClrMapping/>
   </p:clrMapOvr>
+  <p:timing>
+    <p:tnLst>
+      <p:par>
+        <p:cTn id="1" dur="indefinite" restart="never" nodeType="tmRoot"/>
+      </p:par>
+    </p:tnLst>
+  </p:timing>
 </p:sld>
 </file>
 
